--- a/preview_v7/cn/l-cn-bs-u2-7.pptx
+++ b/preview_v7/cn/l-cn-bs-u2-7.pptx
@@ -3140,31 +3140,47 @@
           </a:p>
         </p:txBody>
       </p:sp>
-      <p:pic>
-        <p:nvPicPr>
-          <p:cNvPr id="3" name="Picture 2" descr="typewriter.jpg"/>
-          <p:cNvPicPr>
-            <a:picLocks noChangeAspect="1"/>
-          </p:cNvPicPr>
-          <p:nvPr/>
-        </p:nvPicPr>
-        <p:blipFill>
-          <a:blip r:embed="rId2"/>
-          <a:srcRect t="7811" b="7811"/>
-          <a:stretch>
-            <a:fillRect/>
-          </a:stretch>
-        </p:blipFill>
-        <p:spPr>
-          <a:xfrm>
-            <a:off x="0" y="0"/>
-            <a:ext cx="12191695" cy="6858000"/>
-          </a:xfrm>
-          <a:prstGeom prst="rect">
-            <a:avLst/>
-          </a:prstGeom>
-        </p:spPr>
-      </p:pic>
+      <p:sp>
+        <p:nvSpPr>
+          <p:cNvPr id="3" name="TextBox 2"/>
+          <p:cNvSpPr txBox="1"/>
+          <p:nvPr/>
+        </p:nvSpPr>
+        <p:spPr>
+          <a:xfrm>
+            <a:off x="640080" y="640080"/>
+            <a:ext cx="10911535" cy="502920"/>
+          </a:xfrm>
+          <a:prstGeom prst="rect">
+            <a:avLst/>
+          </a:prstGeom>
+          <a:noFill/>
+        </p:spPr>
+        <p:txBody>
+          <a:bodyPr wrap="square" anchor="t" lIns="0" rIns="0" tIns="0" bIns="0">
+            <a:spAutoFit/>
+          </a:bodyPr>
+          <a:lstStyle/>
+          <a:p>
+            <a:pPr algn="l">
+              <a:spcAft>
+                <a:spcPts val="0"/>
+              </a:spcAft>
+            </a:pPr>
+            <a:r>
+              <a:rPr sz="1200" b="1">
+                <a:solidFill>
+                  <a:srgbClr val="B23A2A"/>
+                </a:solidFill>
+                <a:latin typeface="微软雅黑"/>
+                <a:ea typeface="微软雅黑"/>
+                <a:cs typeface="微软雅黑"/>
+              </a:rPr>
+              <a:t>语文 · 必修上册 · 第2单元 劳动光荣</a:t>
+            </a:r>
+          </a:p>
+        </p:txBody>
+      </p:sp>
       <p:sp>
         <p:nvSpPr>
           <p:cNvPr id="4" name="Rectangle 3"/>
@@ -3173,16 +3189,14 @@
         </p:nvSpPr>
         <p:spPr>
           <a:xfrm>
-            <a:off x="0" y="0"/>
-            <a:ext cx="12191695" cy="6858000"/>
+            <a:off x="640080" y="1207008"/>
+            <a:ext cx="822960" cy="30480"/>
           </a:xfrm>
           <a:prstGeom prst="rect">
             <a:avLst/>
           </a:prstGeom>
           <a:solidFill>
-            <a:srgbClr val="1C2A33">
-              <a:alpha val="55000"/>
-            </a:srgbClr>
+            <a:srgbClr val="B23A2A"/>
           </a:solidFill>
           <a:ln>
             <a:noFill/>
@@ -3213,14 +3227,92 @@
       </p:sp>
       <p:sp>
         <p:nvSpPr>
-          <p:cNvPr id="5" name="Rectangle 4"/>
+          <p:cNvPr id="5" name="TextBox 4"/>
+          <p:cNvSpPr txBox="1"/>
+          <p:nvPr/>
+        </p:nvSpPr>
+        <p:spPr>
+          <a:xfrm>
+            <a:off x="640080" y="1737360"/>
+            <a:ext cx="10911535" cy="2011680"/>
+          </a:xfrm>
+          <a:prstGeom prst="rect">
+            <a:avLst/>
+          </a:prstGeom>
+          <a:noFill/>
+        </p:spPr>
+        <p:txBody>
+          <a:bodyPr wrap="square" anchor="t" lIns="0" rIns="0" tIns="0" bIns="0">
+            <a:spAutoFit/>
+          </a:bodyPr>
+          <a:lstStyle/>
+          <a:p>
+            <a:pPr algn="l">
+              <a:lnSpc>
+                <a:spcPct val="115000"/>
+              </a:lnSpc>
+            </a:pPr>
+            <a:r>
+              <a:rPr sz="4000" b="1">
+                <a:solidFill>
+                  <a:srgbClr val="1C2A33"/>
+                </a:solidFill>
+                <a:latin typeface="楷体"/>
+                <a:ea typeface="楷体"/>
+                <a:cs typeface="楷体"/>
+              </a:rPr>
+              <a:t>写作实践与讲评——人物通讯修改与提升</a:t>
+            </a:r>
+          </a:p>
+        </p:txBody>
+      </p:sp>
+      <p:sp>
+        <p:nvSpPr>
+          <p:cNvPr id="6" name="TextBox 5"/>
+          <p:cNvSpPr txBox="1"/>
+          <p:nvPr/>
+        </p:nvSpPr>
+        <p:spPr>
+          <a:xfrm>
+            <a:off x="640080" y="3840480"/>
+            <a:ext cx="10911535" cy="457200"/>
+          </a:xfrm>
+          <a:prstGeom prst="rect">
+            <a:avLst/>
+          </a:prstGeom>
+          <a:noFill/>
+        </p:spPr>
+        <p:txBody>
+          <a:bodyPr wrap="square" anchor="t" lIns="0" rIns="0" tIns="0" bIns="0">
+            <a:spAutoFit/>
+          </a:bodyPr>
+          <a:lstStyle/>
+          <a:p>
+            <a:pPr algn="l"/>
+            <a:r>
+              <a:rPr sz="1700" b="1">
+                <a:solidFill>
+                  <a:srgbClr val="B23A2A"/>
+                </a:solidFill>
+                <a:latin typeface="微软雅黑"/>
+                <a:ea typeface="微软雅黑"/>
+                <a:cs typeface="微软雅黑"/>
+              </a:rPr>
+              <a:t>写作实践  ·  第7课时  ·  45分钟</a:t>
+            </a:r>
+          </a:p>
+        </p:txBody>
+      </p:sp>
+      <p:sp>
+        <p:nvSpPr>
+          <p:cNvPr id="7" name="Rectangle 6"/>
           <p:cNvSpPr/>
           <p:nvPr/>
         </p:nvSpPr>
         <p:spPr>
           <a:xfrm>
-            <a:off x="640080" y="1005840"/>
-            <a:ext cx="822960" cy="38100"/>
+            <a:off x="640080" y="5394960"/>
+            <a:ext cx="2011680" cy="33020"/>
           </a:xfrm>
           <a:prstGeom prst="rect">
             <a:avLst/>
@@ -3257,14 +3349,14 @@
       </p:sp>
       <p:sp>
         <p:nvSpPr>
-          <p:cNvPr id="6" name="TextBox 5"/>
+          <p:cNvPr id="8" name="TextBox 7"/>
           <p:cNvSpPr txBox="1"/>
           <p:nvPr/>
         </p:nvSpPr>
         <p:spPr>
           <a:xfrm>
-            <a:off x="640080" y="1188720"/>
-            <a:ext cx="10058400" cy="457200"/>
+            <a:off x="640080" y="5623560"/>
+            <a:ext cx="10911535" cy="548640"/>
           </a:xfrm>
           <a:prstGeom prst="rect">
             <a:avLst/>
@@ -3279,89 +3371,15 @@
           <a:p>
             <a:pPr algn="l"/>
             <a:r>
-              <a:rPr sz="1500" b="1">
-                <a:solidFill>
-                  <a:srgbClr val="C8A86B"/>
+              <a:rPr sz="1400" b="0">
+                <a:solidFill>
+                  <a:srgbClr val="6B6258"/>
                 </a:solidFill>
                 <a:latin typeface="微软雅黑"/>
                 <a:ea typeface="微软雅黑"/>
                 <a:cs typeface="微软雅黑"/>
               </a:rPr>
-              <a:t>必修上 第二单元 · 劳动光荣 · 第七课时</a:t>
-            </a:r>
-          </a:p>
-        </p:txBody>
-      </p:sp>
-      <p:sp>
-        <p:nvSpPr>
-          <p:cNvPr id="7" name="TextBox 6"/>
-          <p:cNvSpPr txBox="1"/>
-          <p:nvPr/>
-        </p:nvSpPr>
-        <p:spPr>
-          <a:xfrm>
-            <a:off x="640080" y="1874519"/>
-            <a:ext cx="11247120" cy="1828800"/>
-          </a:xfrm>
-          <a:prstGeom prst="rect">
-            <a:avLst/>
-          </a:prstGeom>
-          <a:noFill/>
-        </p:spPr>
-        <p:txBody>
-          <a:bodyPr wrap="square" anchor="t" lIns="0" rIns="0" tIns="0" bIns="0">
-            <a:spAutoFit/>
-          </a:bodyPr>
-          <a:lstStyle/>
-          <a:p>
-            <a:pPr algn="l"/>
-            <a:r>
-              <a:rPr sz="5200" b="1">
-                <a:solidFill>
-                  <a:srgbClr val="FFFFFF"/>
-                </a:solidFill>
-                <a:latin typeface="楷体"/>
-                <a:ea typeface="楷体"/>
-                <a:cs typeface="楷体"/>
-              </a:rPr>
-              <a:t>写作讲评</a:t>
-            </a:r>
-          </a:p>
-        </p:txBody>
-      </p:sp>
-      <p:sp>
-        <p:nvSpPr>
-          <p:cNvPr id="8" name="TextBox 7"/>
-          <p:cNvSpPr txBox="1"/>
-          <p:nvPr/>
-        </p:nvSpPr>
-        <p:spPr>
-          <a:xfrm>
-            <a:off x="640080" y="2926080"/>
-            <a:ext cx="11247120" cy="1097280"/>
-          </a:xfrm>
-          <a:prstGeom prst="rect">
-            <a:avLst/>
-          </a:prstGeom>
-          <a:noFill/>
-        </p:spPr>
-        <p:txBody>
-          <a:bodyPr wrap="square" anchor="t" lIns="0" rIns="0" tIns="0" bIns="0">
-            <a:spAutoFit/>
-          </a:bodyPr>
-          <a:lstStyle/>
-          <a:p>
-            <a:pPr algn="l"/>
-            <a:r>
-              <a:rPr sz="3200" b="1">
-                <a:solidFill>
-                  <a:srgbClr val="C8A86B"/>
-                </a:solidFill>
-                <a:latin typeface="楷体"/>
-                <a:ea typeface="楷体"/>
-                <a:cs typeface="楷体"/>
-              </a:rPr>
-              <a:t>人物通讯的修改与提升</a:t>
+              <a:t>学习任务群：实用性阅读与交流    |    年级：高一</a:t>
             </a:r>
           </a:p>
         </p:txBody>
@@ -3369,88 +3387,6 @@
       <p:sp>
         <p:nvSpPr>
           <p:cNvPr id="9" name="TextBox 8"/>
-          <p:cNvSpPr txBox="1"/>
-          <p:nvPr/>
-        </p:nvSpPr>
-        <p:spPr>
-          <a:xfrm>
-            <a:off x="640080" y="4297680"/>
-            <a:ext cx="10972800" cy="1005840"/>
-          </a:xfrm>
-          <a:prstGeom prst="rect">
-            <a:avLst/>
-          </a:prstGeom>
-          <a:noFill/>
-        </p:spPr>
-        <p:txBody>
-          <a:bodyPr wrap="square" anchor="t" lIns="0" rIns="0" tIns="0" bIns="0">
-            <a:spAutoFit/>
-          </a:bodyPr>
-          <a:lstStyle/>
-          <a:p>
-            <a:pPr algn="l">
-              <a:lnSpc>
-                <a:spcPct val="140000"/>
-              </a:lnSpc>
-            </a:pPr>
-            <a:r>
-              <a:rPr sz="1700" b="0">
-                <a:solidFill>
-                  <a:srgbClr val="E7DFD2"/>
-                </a:solidFill>
-                <a:latin typeface="楷体"/>
-                <a:ea typeface="楷体"/>
-                <a:cs typeface="楷体"/>
-              </a:rPr>
-              <a:t>把"评价"改成"画面"——让事件自己说明"好"。</a:t>
-            </a:r>
-          </a:p>
-        </p:txBody>
-      </p:sp>
-      <p:sp>
-        <p:nvSpPr>
-          <p:cNvPr id="10" name="TextBox 9"/>
-          <p:cNvSpPr txBox="1"/>
-          <p:nvPr/>
-        </p:nvSpPr>
-        <p:spPr>
-          <a:xfrm>
-            <a:off x="640080" y="4937760"/>
-            <a:ext cx="10972800" cy="914400"/>
-          </a:xfrm>
-          <a:prstGeom prst="rect">
-            <a:avLst/>
-          </a:prstGeom>
-          <a:noFill/>
-        </p:spPr>
-        <p:txBody>
-          <a:bodyPr wrap="square" anchor="t" lIns="0" rIns="0" tIns="0" bIns="0">
-            <a:spAutoFit/>
-          </a:bodyPr>
-          <a:lstStyle/>
-          <a:p>
-            <a:pPr algn="l">
-              <a:lnSpc>
-                <a:spcPct val="140000"/>
-              </a:lnSpc>
-            </a:pPr>
-            <a:r>
-              <a:rPr sz="1700" b="0">
-                <a:solidFill>
-                  <a:srgbClr val="FFFFFF"/>
-                </a:solidFill>
-                <a:latin typeface="楷体"/>
-                <a:ea typeface="楷体"/>
-                <a:cs typeface="楷体"/>
-              </a:rPr>
-              <a:t>好通讯三标准：真实 · 典型 · 以事写人。</a:t>
-            </a:r>
-          </a:p>
-        </p:txBody>
-      </p:sp>
-      <p:sp>
-        <p:nvSpPr>
-          <p:cNvPr id="11" name="TextBox 10"/>
           <p:cNvSpPr txBox="1"/>
           <p:nvPr/>
         </p:nvSpPr>
@@ -3583,7 +3519,7 @@
                 <a:ea typeface="微软雅黑"/>
                 <a:cs typeface="微软雅黑"/>
               </a:rPr>
-              <a:t>本课目标</a:t>
+              <a:t>学习目标</a:t>
             </a:r>
           </a:p>
         </p:txBody>
@@ -3634,51 +3570,14 @@
       </p:sp>
       <p:sp>
         <p:nvSpPr>
-          <p:cNvPr id="5" name="TextBox 4"/>
-          <p:cNvSpPr txBox="1"/>
-          <p:nvPr/>
-        </p:nvSpPr>
-        <p:spPr>
-          <a:xfrm>
-            <a:off x="640080" y="1325880"/>
-            <a:ext cx="10058400" cy="640080"/>
-          </a:xfrm>
-          <a:prstGeom prst="rect">
-            <a:avLst/>
-          </a:prstGeom>
-          <a:noFill/>
-        </p:spPr>
-        <p:txBody>
-          <a:bodyPr wrap="square" anchor="t" lIns="0" rIns="0" tIns="0" bIns="0">
-            <a:spAutoFit/>
-          </a:bodyPr>
-          <a:lstStyle/>
-          <a:p>
-            <a:pPr algn="l"/>
-            <a:r>
-              <a:rPr sz="3200" b="1">
-                <a:solidFill>
-                  <a:srgbClr val="1C2A33"/>
-                </a:solidFill>
-                <a:latin typeface="楷体"/>
-                <a:ea typeface="楷体"/>
-                <a:cs typeface="楷体"/>
-              </a:rPr>
-              <a:t>四向学习目标</a:t>
-            </a:r>
-          </a:p>
-        </p:txBody>
-      </p:sp>
-      <p:sp>
-        <p:nvSpPr>
-          <p:cNvPr id="6" name="Rounded Rectangle 5"/>
+          <p:cNvPr id="5" name="Rounded Rectangle 4"/>
           <p:cNvSpPr/>
           <p:nvPr/>
         </p:nvSpPr>
         <p:spPr>
           <a:xfrm>
-            <a:off x="640080" y="2377440"/>
-            <a:ext cx="2453563" cy="3291840"/>
+            <a:off x="640080" y="1417320"/>
+            <a:ext cx="5349240" cy="2057400"/>
           </a:xfrm>
           <a:prstGeom prst="roundRect">
             <a:avLst/>
@@ -3686,7 +3585,7 @@
           <a:solidFill>
             <a:srgbClr val="FFFFFF"/>
           </a:solidFill>
-          <a:ln w="20320">
+          <a:ln w="22860">
             <a:solidFill>
               <a:srgbClr val="B23A2A"/>
             </a:solidFill>
@@ -3717,14 +3616,14 @@
       </p:sp>
       <p:sp>
         <p:nvSpPr>
-          <p:cNvPr id="7" name="Oval 6"/>
+          <p:cNvPr id="6" name="Oval 5"/>
           <p:cNvSpPr/>
           <p:nvPr/>
         </p:nvSpPr>
         <p:spPr>
           <a:xfrm>
-            <a:off x="1455381" y="2697480"/>
-            <a:ext cx="822960" cy="822960"/>
+            <a:off x="804672" y="1581912"/>
+            <a:ext cx="457200" cy="457200"/>
           </a:xfrm>
           <a:prstGeom prst="ellipse">
             <a:avLst/>
@@ -3761,14 +3660,14 @@
       </p:sp>
       <p:sp>
         <p:nvSpPr>
-          <p:cNvPr id="8" name="TextBox 7"/>
+          <p:cNvPr id="7" name="TextBox 6"/>
           <p:cNvSpPr txBox="1"/>
           <p:nvPr/>
         </p:nvSpPr>
         <p:spPr>
           <a:xfrm>
-            <a:off x="1455381" y="2880360"/>
-            <a:ext cx="822960" cy="457200"/>
+            <a:off x="804672" y="1636776"/>
+            <a:ext cx="457200" cy="384048"/>
           </a:xfrm>
           <a:prstGeom prst="rect">
             <a:avLst/>
@@ -3783,107 +3682,111 @@
           <a:p>
             <a:pPr algn="ctr"/>
             <a:r>
-              <a:rPr sz="2400" b="1">
+              <a:rPr sz="1600" b="1">
                 <a:solidFill>
                   <a:srgbClr val="FFFFFF"/>
+                </a:solidFill>
+                <a:latin typeface="微软雅黑"/>
+                <a:ea typeface="微软雅黑"/>
+                <a:cs typeface="微软雅黑"/>
+              </a:rPr>
+              <a:t>1</a:t>
+            </a:r>
+          </a:p>
+        </p:txBody>
+      </p:sp>
+      <p:sp>
+        <p:nvSpPr>
+          <p:cNvPr id="8" name="TextBox 7"/>
+          <p:cNvSpPr txBox="1"/>
+          <p:nvPr/>
+        </p:nvSpPr>
+        <p:spPr>
+          <a:xfrm>
+            <a:off x="1371600" y="1527048"/>
+            <a:ext cx="4434840" cy="457200"/>
+          </a:xfrm>
+          <a:prstGeom prst="rect">
+            <a:avLst/>
+          </a:prstGeom>
+          <a:noFill/>
+        </p:spPr>
+        <p:txBody>
+          <a:bodyPr wrap="square" anchor="t" lIns="0" rIns="0" tIns="0" bIns="0">
+            <a:spAutoFit/>
+          </a:bodyPr>
+          <a:lstStyle/>
+          <a:p>
+            <a:pPr algn="l">
+              <a:lnSpc>
+                <a:spcPct val="110000"/>
+              </a:lnSpc>
+            </a:pPr>
+            <a:r>
+              <a:rPr sz="1600" b="1">
+                <a:solidFill>
+                  <a:srgbClr val="1C2A33"/>
+                </a:solidFill>
+                <a:latin typeface="微软雅黑"/>
+                <a:ea typeface="微软雅黑"/>
+                <a:cs typeface="微软雅黑"/>
+              </a:rPr>
+              <a:t>目标</a:t>
+            </a:r>
+          </a:p>
+        </p:txBody>
+      </p:sp>
+      <p:sp>
+        <p:nvSpPr>
+          <p:cNvPr id="9" name="TextBox 8"/>
+          <p:cNvSpPr txBox="1"/>
+          <p:nvPr/>
+        </p:nvSpPr>
+        <p:spPr>
+          <a:xfrm>
+            <a:off x="1371600" y="1965960"/>
+            <a:ext cx="4434840" cy="1417320"/>
+          </a:xfrm>
+          <a:prstGeom prst="rect">
+            <a:avLst/>
+          </a:prstGeom>
+          <a:noFill/>
+        </p:spPr>
+        <p:txBody>
+          <a:bodyPr wrap="square" anchor="t" lIns="0" rIns="0" tIns="0" bIns="0">
+            <a:spAutoFit/>
+          </a:bodyPr>
+          <a:lstStyle/>
+          <a:p>
+            <a:pPr algn="l">
+              <a:lnSpc>
+                <a:spcPct val="128000"/>
+              </a:lnSpc>
+            </a:pPr>
+            <a:r>
+              <a:rPr sz="1200" b="0">
+                <a:solidFill>
+                  <a:srgbClr val="1C2A33"/>
                 </a:solidFill>
                 <a:latin typeface="楷体"/>
                 <a:ea typeface="楷体"/>
                 <a:cs typeface="楷体"/>
               </a:rPr>
-              <a:t>1</a:t>
-            </a:r>
-          </a:p>
-        </p:txBody>
-      </p:sp>
-      <p:sp>
-        <p:nvSpPr>
-          <p:cNvPr id="9" name="TextBox 8"/>
-          <p:cNvSpPr txBox="1"/>
-          <p:nvPr/>
-        </p:nvSpPr>
-        <p:spPr>
-          <a:xfrm>
-            <a:off x="822960" y="3749040"/>
-            <a:ext cx="2087803" cy="548640"/>
-          </a:xfrm>
-          <a:prstGeom prst="rect">
-            <a:avLst/>
-          </a:prstGeom>
-          <a:noFill/>
-        </p:spPr>
-        <p:txBody>
-          <a:bodyPr wrap="square" anchor="t" lIns="0" rIns="0" tIns="0" bIns="0">
-            <a:spAutoFit/>
-          </a:bodyPr>
-          <a:lstStyle/>
-          <a:p>
-            <a:pPr algn="ctr"/>
-            <a:r>
-              <a:rPr sz="1800" b="1">
-                <a:solidFill>
-                  <a:srgbClr val="B23A2A"/>
-                </a:solidFill>
-                <a:latin typeface="微软雅黑"/>
-                <a:ea typeface="微软雅黑"/>
-                <a:cs typeface="微软雅黑"/>
-              </a:rPr>
-              <a:t>语言能力</a:t>
-            </a:r>
-          </a:p>
-        </p:txBody>
-      </p:sp>
-      <p:sp>
-        <p:nvSpPr>
-          <p:cNvPr id="10" name="TextBox 9"/>
-          <p:cNvSpPr txBox="1"/>
-          <p:nvPr/>
-        </p:nvSpPr>
-        <p:spPr>
-          <a:xfrm>
-            <a:off x="841248" y="4343400"/>
-            <a:ext cx="2051227" cy="1188720"/>
-          </a:xfrm>
-          <a:prstGeom prst="rect">
-            <a:avLst/>
-          </a:prstGeom>
-          <a:noFill/>
-        </p:spPr>
-        <p:txBody>
-          <a:bodyPr wrap="square" anchor="t" lIns="0" rIns="0" tIns="0" bIns="0">
-            <a:spAutoFit/>
-          </a:bodyPr>
-          <a:lstStyle/>
-          <a:p>
-            <a:pPr algn="ctr">
-              <a:lnSpc>
-                <a:spcPct val="145000"/>
-              </a:lnSpc>
-            </a:pPr>
-            <a:r>
-              <a:rPr sz="1300" b="0">
-                <a:solidFill>
-                  <a:srgbClr val="1C2A33"/>
-                </a:solidFill>
-                <a:latin typeface="楷体"/>
-                <a:ea typeface="楷体"/>
-                <a:cs typeface="楷体"/>
-              </a:rPr>
-              <a:t>依据讲评反馈修改通讯终稿，做到选材典型、结构清晰、语言简洁、无评价词违规。</a:t>
-            </a:r>
-          </a:p>
-        </p:txBody>
-      </p:sp>
-      <p:sp>
-        <p:nvSpPr>
-          <p:cNvPr id="11" name="Rounded Rectangle 10"/>
+              <a:t>语言能力：根据讲评反馈修改人物通讯终稿，做到选材典型、结构清晰、语言简洁、无评价词违规。</a:t>
+            </a:r>
+          </a:p>
+        </p:txBody>
+      </p:sp>
+      <p:sp>
+        <p:nvSpPr>
+          <p:cNvPr id="10" name="Rounded Rectangle 9"/>
           <p:cNvSpPr/>
           <p:nvPr/>
         </p:nvSpPr>
         <p:spPr>
           <a:xfrm>
-            <a:off x="3459403" y="2377440"/>
-            <a:ext cx="2453563" cy="3291840"/>
+            <a:off x="6263640" y="1417320"/>
+            <a:ext cx="5349240" cy="2057400"/>
           </a:xfrm>
           <a:prstGeom prst="roundRect">
             <a:avLst/>
@@ -3891,9 +3794,9 @@
           <a:solidFill>
             <a:srgbClr val="FFFFFF"/>
           </a:solidFill>
-          <a:ln w="20320">
+          <a:ln w="22860">
             <a:solidFill>
-              <a:srgbClr val="2E7D6B"/>
+              <a:srgbClr val="B23A2A"/>
             </a:solidFill>
           </a:ln>
           <a:effectLst/>
@@ -3922,20 +3825,20 @@
       </p:sp>
       <p:sp>
         <p:nvSpPr>
-          <p:cNvPr id="12" name="Oval 11"/>
+          <p:cNvPr id="11" name="Oval 10"/>
           <p:cNvSpPr/>
           <p:nvPr/>
         </p:nvSpPr>
         <p:spPr>
           <a:xfrm>
-            <a:off x="4274705" y="2697480"/>
-            <a:ext cx="822960" cy="822960"/>
+            <a:off x="6428232" y="1581912"/>
+            <a:ext cx="457200" cy="457200"/>
           </a:xfrm>
           <a:prstGeom prst="ellipse">
             <a:avLst/>
           </a:prstGeom>
           <a:solidFill>
-            <a:srgbClr val="2E7D6B"/>
+            <a:srgbClr val="B23A2A"/>
           </a:solidFill>
           <a:ln>
             <a:noFill/>
@@ -3966,14 +3869,14 @@
       </p:sp>
       <p:sp>
         <p:nvSpPr>
-          <p:cNvPr id="13" name="TextBox 12"/>
+          <p:cNvPr id="12" name="TextBox 11"/>
           <p:cNvSpPr txBox="1"/>
           <p:nvPr/>
         </p:nvSpPr>
         <p:spPr>
           <a:xfrm>
-            <a:off x="4274705" y="2880360"/>
-            <a:ext cx="822960" cy="457200"/>
+            <a:off x="6428232" y="1636776"/>
+            <a:ext cx="457200" cy="384048"/>
           </a:xfrm>
           <a:prstGeom prst="rect">
             <a:avLst/>
@@ -3988,107 +3891,111 @@
           <a:p>
             <a:pPr algn="ctr"/>
             <a:r>
-              <a:rPr sz="2400" b="1">
+              <a:rPr sz="1600" b="1">
                 <a:solidFill>
                   <a:srgbClr val="FFFFFF"/>
+                </a:solidFill>
+                <a:latin typeface="微软雅黑"/>
+                <a:ea typeface="微软雅黑"/>
+                <a:cs typeface="微软雅黑"/>
+              </a:rPr>
+              <a:t>2</a:t>
+            </a:r>
+          </a:p>
+        </p:txBody>
+      </p:sp>
+      <p:sp>
+        <p:nvSpPr>
+          <p:cNvPr id="13" name="TextBox 12"/>
+          <p:cNvSpPr txBox="1"/>
+          <p:nvPr/>
+        </p:nvSpPr>
+        <p:spPr>
+          <a:xfrm>
+            <a:off x="6995160" y="1527048"/>
+            <a:ext cx="4434840" cy="457200"/>
+          </a:xfrm>
+          <a:prstGeom prst="rect">
+            <a:avLst/>
+          </a:prstGeom>
+          <a:noFill/>
+        </p:spPr>
+        <p:txBody>
+          <a:bodyPr wrap="square" anchor="t" lIns="0" rIns="0" tIns="0" bIns="0">
+            <a:spAutoFit/>
+          </a:bodyPr>
+          <a:lstStyle/>
+          <a:p>
+            <a:pPr algn="l">
+              <a:lnSpc>
+                <a:spcPct val="110000"/>
+              </a:lnSpc>
+            </a:pPr>
+            <a:r>
+              <a:rPr sz="1600" b="1">
+                <a:solidFill>
+                  <a:srgbClr val="1C2A33"/>
+                </a:solidFill>
+                <a:latin typeface="微软雅黑"/>
+                <a:ea typeface="微软雅黑"/>
+                <a:cs typeface="微软雅黑"/>
+              </a:rPr>
+              <a:t>目标</a:t>
+            </a:r>
+          </a:p>
+        </p:txBody>
+      </p:sp>
+      <p:sp>
+        <p:nvSpPr>
+          <p:cNvPr id="14" name="TextBox 13"/>
+          <p:cNvSpPr txBox="1"/>
+          <p:nvPr/>
+        </p:nvSpPr>
+        <p:spPr>
+          <a:xfrm>
+            <a:off x="6995160" y="1965960"/>
+            <a:ext cx="4434840" cy="1417320"/>
+          </a:xfrm>
+          <a:prstGeom prst="rect">
+            <a:avLst/>
+          </a:prstGeom>
+          <a:noFill/>
+        </p:spPr>
+        <p:txBody>
+          <a:bodyPr wrap="square" anchor="t" lIns="0" rIns="0" tIns="0" bIns="0">
+            <a:spAutoFit/>
+          </a:bodyPr>
+          <a:lstStyle/>
+          <a:p>
+            <a:pPr algn="l">
+              <a:lnSpc>
+                <a:spcPct val="128000"/>
+              </a:lnSpc>
+            </a:pPr>
+            <a:r>
+              <a:rPr sz="1200" b="0">
+                <a:solidFill>
+                  <a:srgbClr val="1C2A33"/>
                 </a:solidFill>
                 <a:latin typeface="楷体"/>
                 <a:ea typeface="楷体"/>
                 <a:cs typeface="楷体"/>
               </a:rPr>
-              <a:t>2</a:t>
-            </a:r>
-          </a:p>
-        </p:txBody>
-      </p:sp>
-      <p:sp>
-        <p:nvSpPr>
-          <p:cNvPr id="14" name="TextBox 13"/>
-          <p:cNvSpPr txBox="1"/>
-          <p:nvPr/>
-        </p:nvSpPr>
-        <p:spPr>
-          <a:xfrm>
-            <a:off x="3642283" y="3749040"/>
-            <a:ext cx="2087803" cy="548640"/>
-          </a:xfrm>
-          <a:prstGeom prst="rect">
-            <a:avLst/>
-          </a:prstGeom>
-          <a:noFill/>
-        </p:spPr>
-        <p:txBody>
-          <a:bodyPr wrap="square" anchor="t" lIns="0" rIns="0" tIns="0" bIns="0">
-            <a:spAutoFit/>
-          </a:bodyPr>
-          <a:lstStyle/>
-          <a:p>
-            <a:pPr algn="ctr"/>
-            <a:r>
-              <a:rPr sz="1800" b="1">
-                <a:solidFill>
-                  <a:srgbClr val="2E7D6B"/>
-                </a:solidFill>
-                <a:latin typeface="微软雅黑"/>
-                <a:ea typeface="微软雅黑"/>
-                <a:cs typeface="微软雅黑"/>
-              </a:rPr>
-              <a:t>文化意识</a:t>
-            </a:r>
-          </a:p>
-        </p:txBody>
-      </p:sp>
-      <p:sp>
-        <p:nvSpPr>
-          <p:cNvPr id="15" name="TextBox 14"/>
-          <p:cNvSpPr txBox="1"/>
-          <p:nvPr/>
-        </p:nvSpPr>
-        <p:spPr>
-          <a:xfrm>
-            <a:off x="3660571" y="4343400"/>
-            <a:ext cx="2051227" cy="1188720"/>
-          </a:xfrm>
-          <a:prstGeom prst="rect">
-            <a:avLst/>
-          </a:prstGeom>
-          <a:noFill/>
-        </p:spPr>
-        <p:txBody>
-          <a:bodyPr wrap="square" anchor="t" lIns="0" rIns="0" tIns="0" bIns="0">
-            <a:spAutoFit/>
-          </a:bodyPr>
-          <a:lstStyle/>
-          <a:p>
-            <a:pPr algn="ctr">
-              <a:lnSpc>
-                <a:spcPct val="145000"/>
-              </a:lnSpc>
-            </a:pPr>
-            <a:r>
-              <a:rPr sz="1300" b="0">
-                <a:solidFill>
-                  <a:srgbClr val="1C2A33"/>
-                </a:solidFill>
-                <a:latin typeface="楷体"/>
-                <a:ea typeface="楷体"/>
-                <a:cs typeface="楷体"/>
-              </a:rPr>
-              <a:t>在公开讲评中欣赏他人笔下的劳动者形象，涵养尊重普通劳动者的表达态度。</a:t>
-            </a:r>
-          </a:p>
-        </p:txBody>
-      </p:sp>
-      <p:sp>
-        <p:nvSpPr>
-          <p:cNvPr id="16" name="Rounded Rectangle 15"/>
+              <a:t>文化意识：在公开讲评中学会欣赏他人笔下的劳动者形象，培养尊重普通人的文学表达态度。</a:t>
+            </a:r>
+          </a:p>
+        </p:txBody>
+      </p:sp>
+      <p:sp>
+        <p:nvSpPr>
+          <p:cNvPr id="15" name="Rounded Rectangle 14"/>
           <p:cNvSpPr/>
           <p:nvPr/>
         </p:nvSpPr>
         <p:spPr>
           <a:xfrm>
-            <a:off x="6278727" y="2377440"/>
-            <a:ext cx="2453563" cy="3291840"/>
+            <a:off x="640080" y="3703320"/>
+            <a:ext cx="5349240" cy="2057400"/>
           </a:xfrm>
           <a:prstGeom prst="roundRect">
             <a:avLst/>
@@ -4096,9 +4003,9 @@
           <a:solidFill>
             <a:srgbClr val="FFFFFF"/>
           </a:solidFill>
-          <a:ln w="20320">
+          <a:ln w="22860">
             <a:solidFill>
-              <a:srgbClr val="C8A86B"/>
+              <a:srgbClr val="B23A2A"/>
             </a:solidFill>
           </a:ln>
           <a:effectLst/>
@@ -4127,20 +4034,20 @@
       </p:sp>
       <p:sp>
         <p:nvSpPr>
-          <p:cNvPr id="17" name="Oval 16"/>
+          <p:cNvPr id="16" name="Oval 15"/>
           <p:cNvSpPr/>
           <p:nvPr/>
         </p:nvSpPr>
         <p:spPr>
           <a:xfrm>
-            <a:off x="7094029" y="2697480"/>
-            <a:ext cx="822960" cy="822960"/>
+            <a:off x="804672" y="3867912"/>
+            <a:ext cx="457200" cy="457200"/>
           </a:xfrm>
           <a:prstGeom prst="ellipse">
             <a:avLst/>
           </a:prstGeom>
           <a:solidFill>
-            <a:srgbClr val="C8A86B"/>
+            <a:srgbClr val="B23A2A"/>
           </a:solidFill>
           <a:ln>
             <a:noFill/>
@@ -4171,14 +4078,14 @@
       </p:sp>
       <p:sp>
         <p:nvSpPr>
-          <p:cNvPr id="18" name="TextBox 17"/>
+          <p:cNvPr id="17" name="TextBox 16"/>
           <p:cNvSpPr txBox="1"/>
           <p:nvPr/>
         </p:nvSpPr>
         <p:spPr>
           <a:xfrm>
-            <a:off x="7094029" y="2880360"/>
-            <a:ext cx="822960" cy="457200"/>
+            <a:off x="804672" y="3922776"/>
+            <a:ext cx="457200" cy="384048"/>
           </a:xfrm>
           <a:prstGeom prst="rect">
             <a:avLst/>
@@ -4193,107 +4100,111 @@
           <a:p>
             <a:pPr algn="ctr"/>
             <a:r>
-              <a:rPr sz="2400" b="1">
+              <a:rPr sz="1600" b="1">
                 <a:solidFill>
                   <a:srgbClr val="FFFFFF"/>
+                </a:solidFill>
+                <a:latin typeface="微软雅黑"/>
+                <a:ea typeface="微软雅黑"/>
+                <a:cs typeface="微软雅黑"/>
+              </a:rPr>
+              <a:t>3</a:t>
+            </a:r>
+          </a:p>
+        </p:txBody>
+      </p:sp>
+      <p:sp>
+        <p:nvSpPr>
+          <p:cNvPr id="18" name="TextBox 17"/>
+          <p:cNvSpPr txBox="1"/>
+          <p:nvPr/>
+        </p:nvSpPr>
+        <p:spPr>
+          <a:xfrm>
+            <a:off x="1371600" y="3813048"/>
+            <a:ext cx="4434840" cy="457200"/>
+          </a:xfrm>
+          <a:prstGeom prst="rect">
+            <a:avLst/>
+          </a:prstGeom>
+          <a:noFill/>
+        </p:spPr>
+        <p:txBody>
+          <a:bodyPr wrap="square" anchor="t" lIns="0" rIns="0" tIns="0" bIns="0">
+            <a:spAutoFit/>
+          </a:bodyPr>
+          <a:lstStyle/>
+          <a:p>
+            <a:pPr algn="l">
+              <a:lnSpc>
+                <a:spcPct val="110000"/>
+              </a:lnSpc>
+            </a:pPr>
+            <a:r>
+              <a:rPr sz="1600" b="1">
+                <a:solidFill>
+                  <a:srgbClr val="1C2A33"/>
+                </a:solidFill>
+                <a:latin typeface="微软雅黑"/>
+                <a:ea typeface="微软雅黑"/>
+                <a:cs typeface="微软雅黑"/>
+              </a:rPr>
+              <a:t>目标</a:t>
+            </a:r>
+          </a:p>
+        </p:txBody>
+      </p:sp>
+      <p:sp>
+        <p:nvSpPr>
+          <p:cNvPr id="19" name="TextBox 18"/>
+          <p:cNvSpPr txBox="1"/>
+          <p:nvPr/>
+        </p:nvSpPr>
+        <p:spPr>
+          <a:xfrm>
+            <a:off x="1371600" y="4251960"/>
+            <a:ext cx="4434840" cy="1417320"/>
+          </a:xfrm>
+          <a:prstGeom prst="rect">
+            <a:avLst/>
+          </a:prstGeom>
+          <a:noFill/>
+        </p:spPr>
+        <p:txBody>
+          <a:bodyPr wrap="square" anchor="t" lIns="0" rIns="0" tIns="0" bIns="0">
+            <a:spAutoFit/>
+          </a:bodyPr>
+          <a:lstStyle/>
+          <a:p>
+            <a:pPr algn="l">
+              <a:lnSpc>
+                <a:spcPct val="128000"/>
+              </a:lnSpc>
+            </a:pPr>
+            <a:r>
+              <a:rPr sz="1400" b="0">
+                <a:solidFill>
+                  <a:srgbClr val="1C2A33"/>
                 </a:solidFill>
                 <a:latin typeface="楷体"/>
                 <a:ea typeface="楷体"/>
                 <a:cs typeface="楷体"/>
               </a:rPr>
-              <a:t>3</a:t>
-            </a:r>
-          </a:p>
-        </p:txBody>
-      </p:sp>
-      <p:sp>
-        <p:nvSpPr>
-          <p:cNvPr id="19" name="TextBox 18"/>
-          <p:cNvSpPr txBox="1"/>
-          <p:nvPr/>
-        </p:nvSpPr>
-        <p:spPr>
-          <a:xfrm>
-            <a:off x="6461607" y="3749040"/>
-            <a:ext cx="2087803" cy="548640"/>
-          </a:xfrm>
-          <a:prstGeom prst="rect">
-            <a:avLst/>
-          </a:prstGeom>
-          <a:noFill/>
-        </p:spPr>
-        <p:txBody>
-          <a:bodyPr wrap="square" anchor="t" lIns="0" rIns="0" tIns="0" bIns="0">
-            <a:spAutoFit/>
-          </a:bodyPr>
-          <a:lstStyle/>
-          <a:p>
-            <a:pPr algn="ctr"/>
-            <a:r>
-              <a:rPr sz="1800" b="1">
-                <a:solidFill>
-                  <a:srgbClr val="C8A86B"/>
-                </a:solidFill>
-                <a:latin typeface="微软雅黑"/>
-                <a:ea typeface="微软雅黑"/>
-                <a:cs typeface="微软雅黑"/>
-              </a:rPr>
-              <a:t>思维品质</a:t>
-            </a:r>
-          </a:p>
-        </p:txBody>
-      </p:sp>
-      <p:sp>
-        <p:nvSpPr>
-          <p:cNvPr id="20" name="TextBox 19"/>
-          <p:cNvSpPr txBox="1"/>
-          <p:nvPr/>
-        </p:nvSpPr>
-        <p:spPr>
-          <a:xfrm>
-            <a:off x="6479895" y="4343400"/>
-            <a:ext cx="2051227" cy="1188720"/>
-          </a:xfrm>
-          <a:prstGeom prst="rect">
-            <a:avLst/>
-          </a:prstGeom>
-          <a:noFill/>
-        </p:spPr>
-        <p:txBody>
-          <a:bodyPr wrap="square" anchor="t" lIns="0" rIns="0" tIns="0" bIns="0">
-            <a:spAutoFit/>
-          </a:bodyPr>
-          <a:lstStyle/>
-          <a:p>
-            <a:pPr algn="ctr">
-              <a:lnSpc>
-                <a:spcPct val="145000"/>
-              </a:lnSpc>
-            </a:pPr>
-            <a:r>
-              <a:rPr sz="1300" b="0">
-                <a:solidFill>
-                  <a:srgbClr val="1C2A33"/>
-                </a:solidFill>
-                <a:latin typeface="楷体"/>
-                <a:ea typeface="楷体"/>
-                <a:cs typeface="楷体"/>
-              </a:rPr>
-              <a:t>诊断三种典型习作的优缺点，发展评价意识与自我修订能力。</a:t>
-            </a:r>
-          </a:p>
-        </p:txBody>
-      </p:sp>
-      <p:sp>
-        <p:nvSpPr>
-          <p:cNvPr id="21" name="Rounded Rectangle 20"/>
+              <a:t>思维品质：通过分析3种典型习作的优缺点，培养评价思维与自我修订能力。</a:t>
+            </a:r>
+          </a:p>
+        </p:txBody>
+      </p:sp>
+      <p:sp>
+        <p:nvSpPr>
+          <p:cNvPr id="20" name="Rounded Rectangle 19"/>
           <p:cNvSpPr/>
           <p:nvPr/>
         </p:nvSpPr>
         <p:spPr>
           <a:xfrm>
-            <a:off x="9098051" y="2377440"/>
-            <a:ext cx="2453563" cy="3291840"/>
+            <a:off x="6263640" y="3703320"/>
+            <a:ext cx="5349240" cy="2057400"/>
           </a:xfrm>
           <a:prstGeom prst="roundRect">
             <a:avLst/>
@@ -4301,9 +4212,9 @@
           <a:solidFill>
             <a:srgbClr val="FFFFFF"/>
           </a:solidFill>
-          <a:ln w="20320">
+          <a:ln w="22860">
             <a:solidFill>
-              <a:srgbClr val="6B6258"/>
+              <a:srgbClr val="B23A2A"/>
             </a:solidFill>
           </a:ln>
           <a:effectLst/>
@@ -4332,20 +4243,20 @@
       </p:sp>
       <p:sp>
         <p:nvSpPr>
-          <p:cNvPr id="22" name="Oval 21"/>
+          <p:cNvPr id="21" name="Oval 20"/>
           <p:cNvSpPr/>
           <p:nvPr/>
         </p:nvSpPr>
         <p:spPr>
           <a:xfrm>
-            <a:off x="9913353" y="2697480"/>
-            <a:ext cx="822960" cy="822960"/>
+            <a:off x="6428232" y="3867912"/>
+            <a:ext cx="457200" cy="457200"/>
           </a:xfrm>
           <a:prstGeom prst="ellipse">
             <a:avLst/>
           </a:prstGeom>
           <a:solidFill>
-            <a:srgbClr val="6B6258"/>
+            <a:srgbClr val="B23A2A"/>
           </a:solidFill>
           <a:ln>
             <a:noFill/>
@@ -4376,14 +4287,14 @@
       </p:sp>
       <p:sp>
         <p:nvSpPr>
-          <p:cNvPr id="23" name="TextBox 22"/>
+          <p:cNvPr id="22" name="TextBox 21"/>
           <p:cNvSpPr txBox="1"/>
           <p:nvPr/>
         </p:nvSpPr>
         <p:spPr>
           <a:xfrm>
-            <a:off x="9913353" y="2880360"/>
-            <a:ext cx="822960" cy="457200"/>
+            <a:off x="6428232" y="3922776"/>
+            <a:ext cx="457200" cy="384048"/>
           </a:xfrm>
           <a:prstGeom prst="rect">
             <a:avLst/>
@@ -4398,52 +4309,97 @@
           <a:p>
             <a:pPr algn="ctr"/>
             <a:r>
-              <a:rPr sz="2400" b="1">
+              <a:rPr sz="1600" b="1">
                 <a:solidFill>
                   <a:srgbClr val="FFFFFF"/>
+                </a:solidFill>
+                <a:latin typeface="微软雅黑"/>
+                <a:ea typeface="微软雅黑"/>
+                <a:cs typeface="微软雅黑"/>
+              </a:rPr>
+              <a:t>4</a:t>
+            </a:r>
+          </a:p>
+        </p:txBody>
+      </p:sp>
+      <p:sp>
+        <p:nvSpPr>
+          <p:cNvPr id="23" name="TextBox 22"/>
+          <p:cNvSpPr txBox="1"/>
+          <p:nvPr/>
+        </p:nvSpPr>
+        <p:spPr>
+          <a:xfrm>
+            <a:off x="6995160" y="3813048"/>
+            <a:ext cx="4434840" cy="457200"/>
+          </a:xfrm>
+          <a:prstGeom prst="rect">
+            <a:avLst/>
+          </a:prstGeom>
+          <a:noFill/>
+        </p:spPr>
+        <p:txBody>
+          <a:bodyPr wrap="square" anchor="t" lIns="0" rIns="0" tIns="0" bIns="0">
+            <a:spAutoFit/>
+          </a:bodyPr>
+          <a:lstStyle/>
+          <a:p>
+            <a:pPr algn="l">
+              <a:lnSpc>
+                <a:spcPct val="110000"/>
+              </a:lnSpc>
+            </a:pPr>
+            <a:r>
+              <a:rPr sz="1600" b="1">
+                <a:solidFill>
+                  <a:srgbClr val="1C2A33"/>
+                </a:solidFill>
+                <a:latin typeface="微软雅黑"/>
+                <a:ea typeface="微软雅黑"/>
+                <a:cs typeface="微软雅黑"/>
+              </a:rPr>
+              <a:t>目标</a:t>
+            </a:r>
+          </a:p>
+        </p:txBody>
+      </p:sp>
+      <p:sp>
+        <p:nvSpPr>
+          <p:cNvPr id="24" name="TextBox 23"/>
+          <p:cNvSpPr txBox="1"/>
+          <p:nvPr/>
+        </p:nvSpPr>
+        <p:spPr>
+          <a:xfrm>
+            <a:off x="6995160" y="4251960"/>
+            <a:ext cx="4434840" cy="1417320"/>
+          </a:xfrm>
+          <a:prstGeom prst="rect">
+            <a:avLst/>
+          </a:prstGeom>
+          <a:noFill/>
+        </p:spPr>
+        <p:txBody>
+          <a:bodyPr wrap="square" anchor="t" lIns="0" rIns="0" tIns="0" bIns="0">
+            <a:spAutoFit/>
+          </a:bodyPr>
+          <a:lstStyle/>
+          <a:p>
+            <a:pPr algn="l">
+              <a:lnSpc>
+                <a:spcPct val="128000"/>
+              </a:lnSpc>
+            </a:pPr>
+            <a:r>
+              <a:rPr sz="1400" b="0">
+                <a:solidFill>
+                  <a:srgbClr val="1C2A33"/>
                 </a:solidFill>
                 <a:latin typeface="楷体"/>
                 <a:ea typeface="楷体"/>
                 <a:cs typeface="楷体"/>
               </a:rPr>
-              <a:t>4</a:t>
-            </a:r>
-          </a:p>
-        </p:txBody>
-      </p:sp>
-      <p:sp>
-        <p:nvSpPr>
-          <p:cNvPr id="24" name="TextBox 23"/>
-          <p:cNvSpPr txBox="1"/>
-          <p:nvPr/>
-        </p:nvSpPr>
-        <p:spPr>
-          <a:xfrm>
-            <a:off x="9280931" y="3749040"/>
-            <a:ext cx="2087803" cy="548640"/>
-          </a:xfrm>
-          <a:prstGeom prst="rect">
-            <a:avLst/>
-          </a:prstGeom>
-          <a:noFill/>
-        </p:spPr>
-        <p:txBody>
-          <a:bodyPr wrap="square" anchor="t" lIns="0" rIns="0" tIns="0" bIns="0">
-            <a:spAutoFit/>
-          </a:bodyPr>
-          <a:lstStyle/>
-          <a:p>
-            <a:pPr algn="ctr"/>
-            <a:r>
-              <a:rPr sz="1800" b="1">
-                <a:solidFill>
-                  <a:srgbClr val="6B6258"/>
-                </a:solidFill>
-                <a:latin typeface="微软雅黑"/>
-                <a:ea typeface="微软雅黑"/>
-                <a:cs typeface="微软雅黑"/>
-              </a:rPr>
-              <a:t>学习能力</a:t>
+              <a:t>学习能力：内化「好通讯三标准」（真实·典型·以事写人），能独立评价和修改通讯。</a:t>
             </a:r>
           </a:p>
         </p:txBody>
@@ -4451,47 +4407,6 @@
       <p:sp>
         <p:nvSpPr>
           <p:cNvPr id="25" name="TextBox 24"/>
-          <p:cNvSpPr txBox="1"/>
-          <p:nvPr/>
-        </p:nvSpPr>
-        <p:spPr>
-          <a:xfrm>
-            <a:off x="9299219" y="4343400"/>
-            <a:ext cx="2051227" cy="1188720"/>
-          </a:xfrm>
-          <a:prstGeom prst="rect">
-            <a:avLst/>
-          </a:prstGeom>
-          <a:noFill/>
-        </p:spPr>
-        <p:txBody>
-          <a:bodyPr wrap="square" anchor="t" lIns="0" rIns="0" tIns="0" bIns="0">
-            <a:spAutoFit/>
-          </a:bodyPr>
-          <a:lstStyle/>
-          <a:p>
-            <a:pPr algn="ctr">
-              <a:lnSpc>
-                <a:spcPct val="145000"/>
-              </a:lnSpc>
-            </a:pPr>
-            <a:r>
-              <a:rPr sz="1300" b="0">
-                <a:solidFill>
-                  <a:srgbClr val="1C2A33"/>
-                </a:solidFill>
-                <a:latin typeface="楷体"/>
-                <a:ea typeface="楷体"/>
-                <a:cs typeface="楷体"/>
-              </a:rPr>
-              <a:t>内化"好通讯三标准"（真实·典型·以事写人），能独立评价并修改通讯。</a:t>
-            </a:r>
-          </a:p>
-        </p:txBody>
-      </p:sp>
-      <p:sp>
-        <p:nvSpPr>
-          <p:cNvPr id="26" name="TextBox 25"/>
           <p:cNvSpPr txBox="1"/>
           <p:nvPr/>
         </p:nvSpPr>
@@ -4618,13 +4533,13 @@
             <a:r>
               <a:rPr sz="1300" b="1">
                 <a:solidFill>
-                  <a:srgbClr val="B23A2A"/>
+                  <a:srgbClr val="2E7D6B"/>
                 </a:solidFill>
                 <a:latin typeface="微软雅黑"/>
                 <a:ea typeface="微软雅黑"/>
                 <a:cs typeface="微软雅黑"/>
               </a:rPr>
-              <a:t>承前启后 · 从写到改</a:t>
+              <a:t>课文背景</a:t>
             </a:r>
           </a:p>
         </p:txBody>
@@ -4644,7 +4559,7 @@
             <a:avLst/>
           </a:prstGeom>
           <a:solidFill>
-            <a:srgbClr val="B23A2A"/>
+            <a:srgbClr val="2E7D6B"/>
           </a:solidFill>
           <a:ln>
             <a:noFill/>
@@ -4681,49 +4596,8 @@
         </p:nvSpPr>
         <p:spPr>
           <a:xfrm>
-            <a:off x="640080" y="1783080"/>
-            <a:ext cx="5227167" cy="548640"/>
-          </a:xfrm>
-          <a:prstGeom prst="rect">
-            <a:avLst/>
-          </a:prstGeom>
-          <a:noFill/>
-        </p:spPr>
-        <p:txBody>
-          <a:bodyPr wrap="square" anchor="t" lIns="0" rIns="0" tIns="0" bIns="0">
-            <a:spAutoFit/>
-          </a:bodyPr>
-          <a:lstStyle/>
-          <a:p>
-            <a:pPr algn="l">
-              <a:spcAft>
-                <a:spcPts val="600"/>
-              </a:spcAft>
-            </a:pPr>
-            <a:r>
-              <a:rPr sz="2000" b="1">
-                <a:solidFill>
-                  <a:srgbClr val="B23A2A"/>
-                </a:solidFill>
-                <a:latin typeface="楷体"/>
-                <a:ea typeface="楷体"/>
-                <a:cs typeface="楷体"/>
-              </a:rPr>
-              <a:t>从"写出来"到"改得好"</a:t>
-            </a:r>
-          </a:p>
-        </p:txBody>
-      </p:sp>
-      <p:sp>
-        <p:nvSpPr>
-          <p:cNvPr id="6" name="TextBox 5"/>
-          <p:cNvSpPr txBox="1"/>
-          <p:nvPr/>
-        </p:nvSpPr>
-        <p:spPr>
-          <a:xfrm>
-            <a:off x="640080" y="2423160"/>
-            <a:ext cx="5227167" cy="4206240"/>
+            <a:off x="640080" y="1508760"/>
+            <a:ext cx="6766560" cy="4572000"/>
           </a:xfrm>
           <a:prstGeom prst="rect">
             <a:avLst/>
@@ -4741,11 +4615,11 @@
                 <a:spcPct val="150000"/>
               </a:lnSpc>
               <a:spcAft>
-                <a:spcPts val="800"/>
+                <a:spcPts val="600"/>
               </a:spcAft>
             </a:pPr>
             <a:r>
-              <a:rPr sz="1450" b="0">
+              <a:rPr sz="1600" b="0">
                 <a:solidFill>
                   <a:srgbClr val="1C2A33"/>
                 </a:solidFill>
@@ -4753,95 +4627,14 @@
                 <a:ea typeface="楷体"/>
                 <a:cs typeface="楷体"/>
               </a:rPr>
-              <a:t>上一课完成了人物通讯初稿，并做了一轮互评——</a:t>
-            </a:r>
-          </a:p>
-          <a:p>
-            <a:pPr algn="l">
-              <a:lnSpc>
-                <a:spcPct val="150000"/>
-              </a:lnSpc>
-              <a:spcAft>
-                <a:spcPts val="800"/>
-              </a:spcAft>
-            </a:pPr>
-            <a:r>
-              <a:rPr sz="1500" b="1">
-                <a:solidFill>
-                  <a:srgbClr val="B23A2A"/>
-                </a:solidFill>
-                <a:latin typeface="楷体"/>
-                <a:ea typeface="楷体"/>
-                <a:cs typeface="楷体"/>
-              </a:rPr>
-              <a:t>本课进入修改提升与公开讲评。</a:t>
-            </a:r>
-          </a:p>
-          <a:p>
-            <a:pPr algn="l">
-              <a:lnSpc>
-                <a:spcPct val="150000"/>
-              </a:lnSpc>
-              <a:spcAft>
-                <a:spcPts val="1000"/>
-              </a:spcAft>
-            </a:pPr>
-            <a:r>
-              <a:rPr sz="1350" b="0">
-                <a:solidFill>
-                  <a:srgbClr val="6B6258"/>
-                </a:solidFill>
-                <a:latin typeface="楷体"/>
-                <a:ea typeface="楷体"/>
-                <a:cs typeface="楷体"/>
-              </a:rPr>
-              <a:t>依据课标"实用性阅读与交流"：写作须真实·得体·清晰。</a:t>
-            </a:r>
-          </a:p>
-          <a:p>
-            <a:pPr algn="l">
-              <a:lnSpc>
-                <a:spcPct val="140000"/>
-              </a:lnSpc>
-              <a:spcAft>
-                <a:spcPts val="300"/>
-              </a:spcAft>
-            </a:pPr>
-            <a:r>
-              <a:rPr sz="1400" b="0">
-                <a:solidFill>
-                  <a:srgbClr val="1C2A33"/>
-                </a:solidFill>
-                <a:latin typeface="楷体"/>
-                <a:ea typeface="楷体"/>
-                <a:cs typeface="楷体"/>
-              </a:rPr>
-              <a:t>通讯的生命是真实：不添枝加叶、不随意拔高；</a:t>
-            </a:r>
-          </a:p>
-          <a:p>
-            <a:pPr algn="l">
-              <a:lnSpc>
-                <a:spcPct val="140000"/>
-              </a:lnSpc>
-            </a:pPr>
-            <a:r>
-              <a:rPr sz="1400" b="0">
-                <a:solidFill>
-                  <a:srgbClr val="1C2A33"/>
-                </a:solidFill>
-                <a:latin typeface="楷体"/>
-                <a:ea typeface="楷体"/>
-                <a:cs typeface="楷体"/>
-              </a:rPr>
-              <a:t>改稿不是改对错，而是把"评价"改成"画面"。</a:t>
+              <a:t>本课为第二单元第七课时，承接第六课时「学写人物通讯」的初稿与互评，进入修改提升与公开讲评环节。讲评选取3种典型习作：①评价词违规型（还在用「伟大无私」等空话）；②选材不准型（事件不典型或流水账）；③以事写人优秀型（细节生动·结构清晰·无评价词）。通过对比讲评，让学生在「看别人的通讯改自己的通讯」中提升写作意识。同时为第八课时单元活动做准备。</a:t>
             </a:r>
           </a:p>
         </p:txBody>
       </p:sp>
       <p:pic>
         <p:nvPicPr>
-          <p:cNvPr id="7" name="Picture 6" descr="typewriter.jpg"/>
+          <p:cNvPr id="6" name="Picture 5" descr="typewriter.jpg"/>
           <p:cNvPicPr>
             <a:picLocks noChangeAspect="1"/>
           </p:cNvPicPr>
@@ -4849,15 +4642,15 @@
         </p:nvPicPr>
         <p:blipFill>
           <a:blip r:embed="rId2"/>
-          <a:srcRect t="17200" b="17200"/>
+          <a:srcRect l="5860" r="5860"/>
           <a:stretch>
             <a:fillRect/>
           </a:stretch>
         </p:blipFill>
         <p:spPr>
           <a:xfrm>
-            <a:off x="6324447" y="1783080"/>
-            <a:ext cx="5227167" cy="2286000"/>
+            <a:off x="8046720" y="1508760"/>
+            <a:ext cx="4114800" cy="3108960"/>
           </a:xfrm>
           <a:prstGeom prst="rect">
             <a:avLst/>
@@ -4866,14 +4659,14 @@
       </p:pic>
       <p:sp>
         <p:nvSpPr>
-          <p:cNvPr id="8" name="TextBox 7"/>
+          <p:cNvPr id="7" name="TextBox 6"/>
           <p:cNvSpPr txBox="1"/>
           <p:nvPr/>
         </p:nvSpPr>
         <p:spPr>
           <a:xfrm>
-            <a:off x="6324447" y="4160520"/>
-            <a:ext cx="5227167" cy="365760"/>
+            <a:off x="8046720" y="4663440"/>
+            <a:ext cx="4114800" cy="365760"/>
           </a:xfrm>
           <a:prstGeom prst="rect">
             <a:avLst/>
@@ -4896,175 +4689,14 @@
                 <a:ea typeface="微软雅黑"/>
                 <a:cs typeface="微软雅黑"/>
               </a:rPr>
-              <a:t>经典打字机（CC BY 4.0）· 写作与修改工具的见证</a:t>
-            </a:r>
-          </a:p>
-        </p:txBody>
-      </p:sp>
-      <p:sp>
-        <p:nvSpPr>
-          <p:cNvPr id="9" name="Rounded Rectangle 8"/>
-          <p:cNvSpPr/>
-          <p:nvPr/>
-        </p:nvSpPr>
-        <p:spPr>
-          <a:xfrm>
-            <a:off x="6324447" y="4572000"/>
-            <a:ext cx="5227167" cy="2011680"/>
-          </a:xfrm>
-          <a:prstGeom prst="roundRect">
-            <a:avLst/>
-          </a:prstGeom>
-          <a:solidFill>
-            <a:srgbClr val="1C2A33"/>
-          </a:solidFill>
-          <a:effectLst/>
-        </p:spPr>
-        <p:style>
-          <a:lnRef idx="1">
-            <a:schemeClr val="accent1"/>
-          </a:lnRef>
-          <a:fillRef idx="3">
-            <a:schemeClr val="accent1"/>
-          </a:fillRef>
-          <a:effectRef idx="2">
-            <a:schemeClr val="accent1"/>
-          </a:effectRef>
-          <a:fontRef idx="minor">
-            <a:schemeClr val="lt1"/>
-          </a:fontRef>
-        </p:style>
-        <p:txBody>
-          <a:bodyPr rtlCol="0" anchor="ctr"/>
-          <a:lstStyle/>
-          <a:p>
-            <a:pPr algn="ctr"/>
-          </a:p>
-        </p:txBody>
-      </p:sp>
-      <p:sp>
-        <p:nvSpPr>
-          <p:cNvPr id="10" name="TextBox 9"/>
-          <p:cNvSpPr txBox="1"/>
-          <p:nvPr/>
-        </p:nvSpPr>
-        <p:spPr>
-          <a:xfrm>
-            <a:off x="6598767" y="4709160"/>
-            <a:ext cx="4678527" cy="457200"/>
-          </a:xfrm>
-          <a:prstGeom prst="rect">
-            <a:avLst/>
-          </a:prstGeom>
-          <a:noFill/>
-        </p:spPr>
-        <p:txBody>
-          <a:bodyPr wrap="square" anchor="t" lIns="0" rIns="0" tIns="0" bIns="0">
-            <a:spAutoFit/>
-          </a:bodyPr>
-          <a:lstStyle/>
-          <a:p>
-            <a:pPr algn="l"/>
-            <a:r>
-              <a:rPr sz="1600" b="1">
-                <a:solidFill>
-                  <a:srgbClr val="C8A86B"/>
-                </a:solidFill>
-                <a:latin typeface="楷体"/>
-                <a:ea typeface="楷体"/>
-                <a:cs typeface="楷体"/>
-              </a:rPr>
-              <a:t>好通讯三标准</a:t>
-            </a:r>
-          </a:p>
-        </p:txBody>
-      </p:sp>
-      <p:sp>
-        <p:nvSpPr>
-          <p:cNvPr id="11" name="TextBox 10"/>
-          <p:cNvSpPr txBox="1"/>
-          <p:nvPr/>
-        </p:nvSpPr>
-        <p:spPr>
-          <a:xfrm>
-            <a:off x="6598767" y="5212080"/>
-            <a:ext cx="4678527" cy="1280160"/>
-          </a:xfrm>
-          <a:prstGeom prst="rect">
-            <a:avLst/>
-          </a:prstGeom>
-          <a:noFill/>
-        </p:spPr>
-        <p:txBody>
-          <a:bodyPr wrap="square" anchor="t" lIns="0" rIns="0" tIns="0" bIns="0">
-            <a:spAutoFit/>
-          </a:bodyPr>
-          <a:lstStyle/>
-          <a:p>
-            <a:pPr algn="l">
-              <a:lnSpc>
-                <a:spcPct val="145000"/>
-              </a:lnSpc>
-              <a:spcAft>
-                <a:spcPts val="300"/>
-              </a:spcAft>
-            </a:pPr>
-            <a:r>
-              <a:rPr sz="1350" b="0">
-                <a:solidFill>
-                  <a:srgbClr val="FFFFFF"/>
-                </a:solidFill>
-                <a:latin typeface="楷体"/>
-                <a:ea typeface="楷体"/>
-                <a:cs typeface="楷体"/>
-              </a:rPr>
-              <a:t>· 真实：实事求是，不虚构、不拔高</a:t>
-            </a:r>
-          </a:p>
-          <a:p>
-            <a:pPr algn="l">
-              <a:lnSpc>
-                <a:spcPct val="145000"/>
-              </a:lnSpc>
-              <a:spcAft>
-                <a:spcPts val="300"/>
-              </a:spcAft>
-            </a:pPr>
-            <a:r>
-              <a:rPr sz="1350" b="0">
-                <a:solidFill>
-                  <a:srgbClr val="FFFFFF"/>
-                </a:solidFill>
-                <a:latin typeface="楷体"/>
-                <a:ea typeface="楷体"/>
-                <a:cs typeface="楷体"/>
-              </a:rPr>
-              <a:t>· 典型：事件精当，删掉它形象会变</a:t>
-            </a:r>
-          </a:p>
-          <a:p>
-            <a:pPr algn="l">
-              <a:lnSpc>
-                <a:spcPct val="145000"/>
-              </a:lnSpc>
-            </a:pPr>
-            <a:r>
-              <a:rPr sz="1350" b="0">
-                <a:solidFill>
-                  <a:srgbClr val="FFFFFF"/>
-                </a:solidFill>
-                <a:latin typeface="楷体"/>
-                <a:ea typeface="楷体"/>
-                <a:cs typeface="楷体"/>
-              </a:rPr>
-              <a:t>· 以事写人：不说"好"，让事实说话</a:t>
-            </a:r>
-          </a:p>
-        </p:txBody>
-      </p:sp>
-      <p:sp>
-        <p:nvSpPr>
-          <p:cNvPr id="12" name="TextBox 11"/>
+              <a:t>资料图（自由授权，复用 typewriter.jpg）</a:t>
+            </a:r>
+          </a:p>
+        </p:txBody>
+      </p:sp>
+      <p:sp>
+        <p:nvSpPr>
+          <p:cNvPr id="8" name="TextBox 7"/>
           <p:cNvSpPr txBox="1"/>
           <p:nvPr/>
         </p:nvSpPr>
@@ -5197,7 +4829,7 @@
                 <a:ea typeface="微软雅黑"/>
                 <a:cs typeface="微软雅黑"/>
               </a:rPr>
-              <a:t>重点 · 三种典型诊断</a:t>
+              <a:t>学习重点</a:t>
             </a:r>
           </a:p>
         </p:txBody>
@@ -5248,51 +4880,14 @@
       </p:sp>
       <p:sp>
         <p:nvSpPr>
-          <p:cNvPr id="5" name="TextBox 4"/>
-          <p:cNvSpPr txBox="1"/>
-          <p:nvPr/>
-        </p:nvSpPr>
-        <p:spPr>
-          <a:xfrm>
-            <a:off x="640080" y="1325880"/>
-            <a:ext cx="10515600" cy="548640"/>
-          </a:xfrm>
-          <a:prstGeom prst="rect">
-            <a:avLst/>
-          </a:prstGeom>
-          <a:noFill/>
-        </p:spPr>
-        <p:txBody>
-          <a:bodyPr wrap="square" anchor="t" lIns="0" rIns="0" tIns="0" bIns="0">
-            <a:spAutoFit/>
-          </a:bodyPr>
-          <a:lstStyle/>
-          <a:p>
-            <a:pPr algn="l"/>
-            <a:r>
-              <a:rPr sz="2400" b="1">
-                <a:solidFill>
-                  <a:srgbClr val="1C2A33"/>
-                </a:solidFill>
-                <a:latin typeface="楷体"/>
-                <a:ea typeface="楷体"/>
-                <a:cs typeface="楷体"/>
-              </a:rPr>
-              <a:t>在"别人的通讯"里看见自己的问题</a:t>
-            </a:r>
-          </a:p>
-        </p:txBody>
-      </p:sp>
-      <p:sp>
-        <p:nvSpPr>
-          <p:cNvPr id="6" name="Rounded Rectangle 5"/>
+          <p:cNvPr id="5" name="Rounded Rectangle 4"/>
           <p:cNvSpPr/>
           <p:nvPr/>
         </p:nvSpPr>
         <p:spPr>
           <a:xfrm>
-            <a:off x="640080" y="2194560"/>
-            <a:ext cx="3393338" cy="3840480"/>
+            <a:off x="640080" y="1371600"/>
+            <a:ext cx="10911535" cy="1597152"/>
           </a:xfrm>
           <a:prstGeom prst="roundRect">
             <a:avLst/>
@@ -5300,9 +4895,9 @@
           <a:solidFill>
             <a:srgbClr val="FFFFFF"/>
           </a:solidFill>
-          <a:ln w="20320">
+          <a:ln w="22860">
             <a:solidFill>
-              <a:srgbClr val="B23A2A"/>
+              <a:srgbClr val="C8A86B"/>
             </a:solidFill>
           </a:ln>
           <a:effectLst/>
@@ -5331,23 +4926,107 @@
       </p:sp>
       <p:sp>
         <p:nvSpPr>
-          <p:cNvPr id="7" name="Rectangle 6"/>
+          <p:cNvPr id="6" name="TextBox 5"/>
+          <p:cNvSpPr txBox="1"/>
+          <p:nvPr/>
+        </p:nvSpPr>
+        <p:spPr>
+          <a:xfrm>
+            <a:off x="1371600" y="1481328"/>
+            <a:ext cx="9997135" cy="457200"/>
+          </a:xfrm>
+          <a:prstGeom prst="rect">
+            <a:avLst/>
+          </a:prstGeom>
+          <a:noFill/>
+        </p:spPr>
+        <p:txBody>
+          <a:bodyPr wrap="square" anchor="t" lIns="0" rIns="0" tIns="0" bIns="0">
+            <a:spAutoFit/>
+          </a:bodyPr>
+          <a:lstStyle/>
+          <a:p>
+            <a:pPr algn="l">
+              <a:lnSpc>
+                <a:spcPct val="110000"/>
+              </a:lnSpc>
+            </a:pPr>
+            <a:r>
+              <a:rPr sz="1600" b="1">
+                <a:solidFill>
+                  <a:srgbClr val="1C2A33"/>
+                </a:solidFill>
+                <a:latin typeface="微软雅黑"/>
+                <a:ea typeface="微软雅黑"/>
+                <a:cs typeface="微软雅黑"/>
+              </a:rPr>
+              <a:t/>
+            </a:r>
+          </a:p>
+        </p:txBody>
+      </p:sp>
+      <p:sp>
+        <p:nvSpPr>
+          <p:cNvPr id="7" name="TextBox 6"/>
+          <p:cNvSpPr txBox="1"/>
+          <p:nvPr/>
+        </p:nvSpPr>
+        <p:spPr>
+          <a:xfrm>
+            <a:off x="1371600" y="1920240"/>
+            <a:ext cx="9997135" cy="957072"/>
+          </a:xfrm>
+          <a:prstGeom prst="rect">
+            <a:avLst/>
+          </a:prstGeom>
+          <a:noFill/>
+        </p:spPr>
+        <p:txBody>
+          <a:bodyPr wrap="square" anchor="t" lIns="0" rIns="0" tIns="0" bIns="0">
+            <a:spAutoFit/>
+          </a:bodyPr>
+          <a:lstStyle/>
+          <a:p>
+            <a:pPr algn="l">
+              <a:lnSpc>
+                <a:spcPct val="128000"/>
+              </a:lnSpc>
+            </a:pPr>
+            <a:r>
+              <a:rPr sz="1300" b="0">
+                <a:solidFill>
+                  <a:srgbClr val="1C2A33"/>
+                </a:solidFill>
+                <a:latin typeface="楷体"/>
+                <a:ea typeface="楷体"/>
+                <a:cs typeface="楷体"/>
+              </a:rPr>
+              <a:t>① 讲评三种典型：评价词违规型 / 选材不准型 / 以事写人优秀型。</a:t>
+            </a:r>
+          </a:p>
+        </p:txBody>
+      </p:sp>
+      <p:sp>
+        <p:nvSpPr>
+          <p:cNvPr id="8" name="Rounded Rectangle 7"/>
           <p:cNvSpPr/>
           <p:nvPr/>
         </p:nvSpPr>
         <p:spPr>
           <a:xfrm>
-            <a:off x="640080" y="2194560"/>
-            <a:ext cx="3393338" cy="548640"/>
-          </a:xfrm>
-          <a:prstGeom prst="rect">
+            <a:off x="640080" y="3078480"/>
+            <a:ext cx="10911535" cy="1597152"/>
+          </a:xfrm>
+          <a:prstGeom prst="roundRect">
             <a:avLst/>
           </a:prstGeom>
           <a:solidFill>
-            <a:srgbClr val="B23A2A"/>
+            <a:srgbClr val="FFFFFF"/>
           </a:solidFill>
-          <a:ln>
-            <a:noFill/>
+          <a:ln w="22860">
+            <a:solidFill>
+              <a:srgbClr val="C8A86B"/>
+            </a:solidFill>
           </a:ln>
           <a:effectLst/>
         </p:spPr>
@@ -5375,14 +5054,14 @@
       </p:sp>
       <p:sp>
         <p:nvSpPr>
-          <p:cNvPr id="8" name="TextBox 7"/>
+          <p:cNvPr id="9" name="TextBox 8"/>
           <p:cNvSpPr txBox="1"/>
           <p:nvPr/>
         </p:nvSpPr>
         <p:spPr>
           <a:xfrm>
-            <a:off x="640080" y="2304288"/>
-            <a:ext cx="3393338" cy="365760"/>
+            <a:off x="1371600" y="3188208"/>
+            <a:ext cx="9997135" cy="457200"/>
           </a:xfrm>
           <a:prstGeom prst="rect">
             <a:avLst/>
@@ -5395,31 +5074,35 @@
           </a:bodyPr>
           <a:lstStyle/>
           <a:p>
-            <a:pPr algn="ctr"/>
-            <a:r>
-              <a:rPr sz="1500" b="1">
-                <a:solidFill>
-                  <a:srgbClr val="FFFFFF"/>
+            <a:pPr algn="l">
+              <a:lnSpc>
+                <a:spcPct val="110000"/>
+              </a:lnSpc>
+            </a:pPr>
+            <a:r>
+              <a:rPr sz="1600" b="1">
+                <a:solidFill>
+                  <a:srgbClr val="1C2A33"/>
                 </a:solidFill>
                 <a:latin typeface="微软雅黑"/>
                 <a:ea typeface="微软雅黑"/>
                 <a:cs typeface="微软雅黑"/>
               </a:rPr>
-              <a:t>A｜评价词违规</a:t>
-            </a:r>
-          </a:p>
-        </p:txBody>
-      </p:sp>
-      <p:sp>
-        <p:nvSpPr>
-          <p:cNvPr id="9" name="TextBox 8"/>
+              <a:t/>
+            </a:r>
+          </a:p>
+        </p:txBody>
+      </p:sp>
+      <p:sp>
+        <p:nvSpPr>
+          <p:cNvPr id="10" name="TextBox 9"/>
           <p:cNvSpPr txBox="1"/>
           <p:nvPr/>
         </p:nvSpPr>
         <p:spPr>
           <a:xfrm>
-            <a:off x="914400" y="2971800"/>
-            <a:ext cx="2844698" cy="2103120"/>
+            <a:off x="1371600" y="3627120"/>
+            <a:ext cx="9997135" cy="957072"/>
           </a:xfrm>
           <a:prstGeom prst="rect">
             <a:avLst/>
@@ -5434,11 +5117,11 @@
           <a:p>
             <a:pPr algn="l">
               <a:lnSpc>
-                <a:spcPct val="155000"/>
+                <a:spcPct val="128000"/>
               </a:lnSpc>
             </a:pPr>
             <a:r>
-              <a:rPr sz="1350" b="0">
+              <a:rPr sz="1300" b="0">
                 <a:solidFill>
                   <a:srgbClr val="1C2A33"/>
                 </a:solidFill>
@@ -5446,48 +5129,7 @@
                 <a:ea typeface="楷体"/>
                 <a:cs typeface="楷体"/>
               </a:rPr>
-              <a:t>通篇"伟大·无私·默默奉献"，只有评价、没有事实。</a:t>
-            </a:r>
-          </a:p>
-        </p:txBody>
-      </p:sp>
-      <p:sp>
-        <p:nvSpPr>
-          <p:cNvPr id="10" name="TextBox 9"/>
-          <p:cNvSpPr txBox="1"/>
-          <p:nvPr/>
-        </p:nvSpPr>
-        <p:spPr>
-          <a:xfrm>
-            <a:off x="914400" y="5120640"/>
-            <a:ext cx="2844698" cy="822960"/>
-          </a:xfrm>
-          <a:prstGeom prst="rect">
-            <a:avLst/>
-          </a:prstGeom>
-          <a:noFill/>
-        </p:spPr>
-        <p:txBody>
-          <a:bodyPr wrap="square" anchor="t" lIns="0" rIns="0" tIns="0" bIns="0">
-            <a:spAutoFit/>
-          </a:bodyPr>
-          <a:lstStyle/>
-          <a:p>
-            <a:pPr algn="l">
-              <a:lnSpc>
-                <a:spcPct val="145000"/>
-              </a:lnSpc>
-            </a:pPr>
-            <a:r>
-              <a:rPr sz="1250" b="1">
-                <a:solidFill>
-                  <a:srgbClr val="B23A2A"/>
-                </a:solidFill>
-                <a:latin typeface="楷体"/>
-                <a:ea typeface="楷体"/>
-                <a:cs typeface="楷体"/>
-              </a:rPr>
-              <a:t>诊断：全是空话标签，读完记不住这个人。</a:t>
+              <a:t>② 修改三方向：换素材（更典型）/调结构（更清晰）/改语言（删评价词加细节）。</a:t>
             </a:r>
           </a:p>
         </p:txBody>
@@ -5500,8 +5142,8 @@
         </p:nvSpPr>
         <p:spPr>
           <a:xfrm>
-            <a:off x="4399178" y="2194560"/>
-            <a:ext cx="3393338" cy="3840480"/>
+            <a:off x="640080" y="4785360"/>
+            <a:ext cx="10911535" cy="1597152"/>
           </a:xfrm>
           <a:prstGeom prst="roundRect">
             <a:avLst/>
@@ -5509,9 +5151,9 @@
           <a:solidFill>
             <a:srgbClr val="FFFFFF"/>
           </a:solidFill>
-          <a:ln w="20320">
+          <a:ln w="22860">
             <a:solidFill>
-              <a:srgbClr val="2E7D6B"/>
+              <a:srgbClr val="C8A86B"/>
             </a:solidFill>
           </a:ln>
           <a:effectLst/>
@@ -5540,58 +5182,14 @@
       </p:sp>
       <p:sp>
         <p:nvSpPr>
-          <p:cNvPr id="12" name="Rectangle 11"/>
-          <p:cNvSpPr/>
-          <p:nvPr/>
-        </p:nvSpPr>
-        <p:spPr>
-          <a:xfrm>
-            <a:off x="4399178" y="2194560"/>
-            <a:ext cx="3393338" cy="548640"/>
-          </a:xfrm>
-          <a:prstGeom prst="rect">
-            <a:avLst/>
-          </a:prstGeom>
-          <a:solidFill>
-            <a:srgbClr val="2E7D6B"/>
-          </a:solidFill>
-          <a:ln>
-            <a:noFill/>
-          </a:ln>
-          <a:effectLst/>
-        </p:spPr>
-        <p:style>
-          <a:lnRef idx="1">
-            <a:schemeClr val="accent1"/>
-          </a:lnRef>
-          <a:fillRef idx="3">
-            <a:schemeClr val="accent1"/>
-          </a:fillRef>
-          <a:effectRef idx="2">
-            <a:schemeClr val="accent1"/>
-          </a:effectRef>
-          <a:fontRef idx="minor">
-            <a:schemeClr val="lt1"/>
-          </a:fontRef>
-        </p:style>
-        <p:txBody>
-          <a:bodyPr rtlCol="0" anchor="ctr"/>
-          <a:lstStyle/>
-          <a:p>
-            <a:pPr algn="ctr"/>
-          </a:p>
-        </p:txBody>
-      </p:sp>
-      <p:sp>
-        <p:nvSpPr>
-          <p:cNvPr id="13" name="TextBox 12"/>
+          <p:cNvPr id="12" name="TextBox 11"/>
           <p:cNvSpPr txBox="1"/>
           <p:nvPr/>
         </p:nvSpPr>
         <p:spPr>
           <a:xfrm>
-            <a:off x="4399178" y="2304288"/>
-            <a:ext cx="3393338" cy="365760"/>
+            <a:off x="1371600" y="4895088"/>
+            <a:ext cx="9997135" cy="457200"/>
           </a:xfrm>
           <a:prstGeom prst="rect">
             <a:avLst/>
@@ -5604,31 +5202,35 @@
           </a:bodyPr>
           <a:lstStyle/>
           <a:p>
-            <a:pPr algn="ctr"/>
-            <a:r>
-              <a:rPr sz="1500" b="1">
-                <a:solidFill>
-                  <a:srgbClr val="FFFFFF"/>
+            <a:pPr algn="l">
+              <a:lnSpc>
+                <a:spcPct val="110000"/>
+              </a:lnSpc>
+            </a:pPr>
+            <a:r>
+              <a:rPr sz="1600" b="1">
+                <a:solidFill>
+                  <a:srgbClr val="1C2A33"/>
                 </a:solidFill>
                 <a:latin typeface="微软雅黑"/>
                 <a:ea typeface="微软雅黑"/>
                 <a:cs typeface="微软雅黑"/>
               </a:rPr>
-              <a:t>B｜选材不准</a:t>
-            </a:r>
-          </a:p>
-        </p:txBody>
-      </p:sp>
-      <p:sp>
-        <p:nvSpPr>
-          <p:cNvPr id="14" name="TextBox 13"/>
+              <a:t/>
+            </a:r>
+          </a:p>
+        </p:txBody>
+      </p:sp>
+      <p:sp>
+        <p:nvSpPr>
+          <p:cNvPr id="13" name="TextBox 12"/>
           <p:cNvSpPr txBox="1"/>
           <p:nvPr/>
         </p:nvSpPr>
         <p:spPr>
           <a:xfrm>
-            <a:off x="4673498" y="2971800"/>
-            <a:ext cx="2844698" cy="2103120"/>
+            <a:off x="1371600" y="5334000"/>
+            <a:ext cx="9997135" cy="957072"/>
           </a:xfrm>
           <a:prstGeom prst="rect">
             <a:avLst/>
@@ -5643,11 +5245,11 @@
           <a:p>
             <a:pPr algn="l">
               <a:lnSpc>
-                <a:spcPct val="155000"/>
+                <a:spcPct val="128000"/>
               </a:lnSpc>
             </a:pPr>
             <a:r>
-              <a:rPr sz="1350" b="0">
+              <a:rPr sz="1300" b="0">
                 <a:solidFill>
                   <a:srgbClr val="1C2A33"/>
                 </a:solidFill>
@@ -5655,264 +5257,14 @@
                 <a:ea typeface="楷体"/>
                 <a:cs typeface="楷体"/>
               </a:rPr>
-              <a:t>门卫的一天写成流水账：穿制服、看学生、传达室吃饭——都是"这一类"的共性。</a:t>
-            </a:r>
-          </a:p>
-        </p:txBody>
-      </p:sp>
-      <p:sp>
-        <p:nvSpPr>
-          <p:cNvPr id="15" name="TextBox 14"/>
-          <p:cNvSpPr txBox="1"/>
-          <p:nvPr/>
-        </p:nvSpPr>
-        <p:spPr>
-          <a:xfrm>
-            <a:off x="4673498" y="5120640"/>
-            <a:ext cx="2844698" cy="822960"/>
-          </a:xfrm>
-          <a:prstGeom prst="rect">
-            <a:avLst/>
-          </a:prstGeom>
-          <a:noFill/>
-        </p:spPr>
-        <p:txBody>
-          <a:bodyPr wrap="square" anchor="t" lIns="0" rIns="0" tIns="0" bIns="0">
-            <a:spAutoFit/>
-          </a:bodyPr>
-          <a:lstStyle/>
-          <a:p>
-            <a:pPr algn="l">
-              <a:lnSpc>
-                <a:spcPct val="145000"/>
-              </a:lnSpc>
-            </a:pPr>
-            <a:r>
-              <a:rPr sz="1250" b="1">
-                <a:solidFill>
-                  <a:srgbClr val="2E7D6B"/>
-                </a:solidFill>
-                <a:latin typeface="楷体"/>
-                <a:ea typeface="楷体"/>
-                <a:cs typeface="楷体"/>
-              </a:rPr>
-              <a:t>诊断：删掉任一句形象都不变 = 不典型。</a:t>
-            </a:r>
-          </a:p>
-        </p:txBody>
-      </p:sp>
-      <p:sp>
-        <p:nvSpPr>
-          <p:cNvPr id="16" name="Rounded Rectangle 15"/>
-          <p:cNvSpPr/>
-          <p:nvPr/>
-        </p:nvSpPr>
-        <p:spPr>
-          <a:xfrm>
-            <a:off x="8158276" y="2194560"/>
-            <a:ext cx="3393338" cy="3840480"/>
-          </a:xfrm>
-          <a:prstGeom prst="roundRect">
-            <a:avLst/>
-          </a:prstGeom>
-          <a:solidFill>
-            <a:srgbClr val="FFFFFF"/>
-          </a:solidFill>
-          <a:ln w="20320">
-            <a:solidFill>
-              <a:srgbClr val="C8A86B"/>
-            </a:solidFill>
-          </a:ln>
-          <a:effectLst/>
-        </p:spPr>
-        <p:style>
-          <a:lnRef idx="1">
-            <a:schemeClr val="accent1"/>
-          </a:lnRef>
-          <a:fillRef idx="3">
-            <a:schemeClr val="accent1"/>
-          </a:fillRef>
-          <a:effectRef idx="2">
-            <a:schemeClr val="accent1"/>
-          </a:effectRef>
-          <a:fontRef idx="minor">
-            <a:schemeClr val="lt1"/>
-          </a:fontRef>
-        </p:style>
-        <p:txBody>
-          <a:bodyPr rtlCol="0" anchor="ctr"/>
-          <a:lstStyle/>
-          <a:p>
-            <a:pPr algn="ctr"/>
-          </a:p>
-        </p:txBody>
-      </p:sp>
-      <p:sp>
-        <p:nvSpPr>
-          <p:cNvPr id="17" name="Rectangle 16"/>
-          <p:cNvSpPr/>
-          <p:nvPr/>
-        </p:nvSpPr>
-        <p:spPr>
-          <a:xfrm>
-            <a:off x="8158276" y="2194560"/>
-            <a:ext cx="3393338" cy="548640"/>
-          </a:xfrm>
-          <a:prstGeom prst="rect">
-            <a:avLst/>
-          </a:prstGeom>
-          <a:solidFill>
-            <a:srgbClr val="C8A86B"/>
-          </a:solidFill>
-          <a:ln>
-            <a:noFill/>
-          </a:ln>
-          <a:effectLst/>
-        </p:spPr>
-        <p:style>
-          <a:lnRef idx="1">
-            <a:schemeClr val="accent1"/>
-          </a:lnRef>
-          <a:fillRef idx="3">
-            <a:schemeClr val="accent1"/>
-          </a:fillRef>
-          <a:effectRef idx="2">
-            <a:schemeClr val="accent1"/>
-          </a:effectRef>
-          <a:fontRef idx="minor">
-            <a:schemeClr val="lt1"/>
-          </a:fontRef>
-        </p:style>
-        <p:txBody>
-          <a:bodyPr rtlCol="0" anchor="ctr"/>
-          <a:lstStyle/>
-          <a:p>
-            <a:pPr algn="ctr"/>
-          </a:p>
-        </p:txBody>
-      </p:sp>
-      <p:sp>
-        <p:nvSpPr>
-          <p:cNvPr id="18" name="TextBox 17"/>
-          <p:cNvSpPr txBox="1"/>
-          <p:nvPr/>
-        </p:nvSpPr>
-        <p:spPr>
-          <a:xfrm>
-            <a:off x="8158276" y="2304288"/>
-            <a:ext cx="3393338" cy="365760"/>
-          </a:xfrm>
-          <a:prstGeom prst="rect">
-            <a:avLst/>
-          </a:prstGeom>
-          <a:noFill/>
-        </p:spPr>
-        <p:txBody>
-          <a:bodyPr wrap="square" anchor="t" lIns="0" rIns="0" tIns="0" bIns="0">
-            <a:spAutoFit/>
-          </a:bodyPr>
-          <a:lstStyle/>
-          <a:p>
-            <a:pPr algn="ctr"/>
-            <a:r>
-              <a:rPr sz="1500" b="1">
-                <a:solidFill>
-                  <a:srgbClr val="FFFFFF"/>
-                </a:solidFill>
-                <a:latin typeface="微软雅黑"/>
-                <a:ea typeface="微软雅黑"/>
-                <a:cs typeface="微软雅黑"/>
-              </a:rPr>
-              <a:t>C｜以事写人 ✓</a:t>
-            </a:r>
-          </a:p>
-        </p:txBody>
-      </p:sp>
-      <p:sp>
-        <p:nvSpPr>
-          <p:cNvPr id="19" name="TextBox 18"/>
-          <p:cNvSpPr txBox="1"/>
-          <p:nvPr/>
-        </p:nvSpPr>
-        <p:spPr>
-          <a:xfrm>
-            <a:off x="8432596" y="2971800"/>
-            <a:ext cx="2844698" cy="2103120"/>
-          </a:xfrm>
-          <a:prstGeom prst="rect">
-            <a:avLst/>
-          </a:prstGeom>
-          <a:noFill/>
-        </p:spPr>
-        <p:txBody>
-          <a:bodyPr wrap="square" anchor="t" lIns="0" rIns="0" tIns="0" bIns="0">
-            <a:spAutoFit/>
-          </a:bodyPr>
-          <a:lstStyle/>
-          <a:p>
-            <a:pPr algn="l">
-              <a:lnSpc>
-                <a:spcPct val="155000"/>
-              </a:lnSpc>
-            </a:pPr>
-            <a:r>
-              <a:rPr sz="1350" b="0">
-                <a:solidFill>
-                  <a:srgbClr val="1C2A33"/>
-                </a:solidFill>
-                <a:latin typeface="楷体"/>
-                <a:ea typeface="楷体"/>
-                <a:cs typeface="楷体"/>
-              </a:rPr>
-              <a:t>打饭时张阿姨的手总在抖——一勺红烧肉抖掉两块，又偷偷补上三块。"勺子替她说了。"</a:t>
-            </a:r>
-          </a:p>
-        </p:txBody>
-      </p:sp>
-      <p:sp>
-        <p:nvSpPr>
-          <p:cNvPr id="20" name="TextBox 19"/>
-          <p:cNvSpPr txBox="1"/>
-          <p:nvPr/>
-        </p:nvSpPr>
-        <p:spPr>
-          <a:xfrm>
-            <a:off x="8432596" y="5120640"/>
-            <a:ext cx="2844698" cy="822960"/>
-          </a:xfrm>
-          <a:prstGeom prst="rect">
-            <a:avLst/>
-          </a:prstGeom>
-          <a:noFill/>
-        </p:spPr>
-        <p:txBody>
-          <a:bodyPr wrap="square" anchor="t" lIns="0" rIns="0" tIns="0" bIns="0">
-            <a:spAutoFit/>
-          </a:bodyPr>
-          <a:lstStyle/>
-          <a:p>
-            <a:pPr algn="l">
-              <a:lnSpc>
-                <a:spcPct val="145000"/>
-              </a:lnSpc>
-            </a:pPr>
-            <a:r>
-              <a:rPr sz="1250" b="1">
-                <a:solidFill>
-                  <a:srgbClr val="C8A86B"/>
-                </a:solidFill>
-                <a:latin typeface="楷体"/>
-                <a:ea typeface="楷体"/>
-                <a:cs typeface="楷体"/>
-              </a:rPr>
-              <a:t>赏析：不说"善良"，借物代言，好自现。</a:t>
-            </a:r>
-          </a:p>
-        </p:txBody>
-      </p:sp>
-      <p:sp>
-        <p:nvSpPr>
-          <p:cNvPr id="21" name="TextBox 20"/>
+              <a:t>③ 好通讯三标准：真实（不虚构）·典型（事件精当）·以事写人（不说好而好自现）。</a:t>
+            </a:r>
+          </a:p>
+        </p:txBody>
+      </p:sp>
+      <p:sp>
+        <p:nvSpPr>
+          <p:cNvPr id="14" name="TextBox 13"/>
           <p:cNvSpPr txBox="1"/>
           <p:nvPr/>
         </p:nvSpPr>
@@ -6039,13 +5391,13 @@
             <a:r>
               <a:rPr sz="1300" b="1">
                 <a:solidFill>
-                  <a:srgbClr val="B23A2A"/>
+                  <a:srgbClr val="2E7D6B"/>
                 </a:solidFill>
                 <a:latin typeface="微软雅黑"/>
                 <a:ea typeface="微软雅黑"/>
                 <a:cs typeface="微软雅黑"/>
               </a:rPr>
-              <a:t>重点 · 修改三方向</a:t>
+              <a:t>学习路径</a:t>
             </a:r>
           </a:p>
         </p:txBody>
@@ -6065,7 +5417,7 @@
             <a:avLst/>
           </a:prstGeom>
           <a:solidFill>
-            <a:srgbClr val="B23A2A"/>
+            <a:srgbClr val="2E7D6B"/>
           </a:solidFill>
           <a:ln>
             <a:noFill/>
@@ -6096,212 +5448,14 @@
       </p:sp>
       <p:sp>
         <p:nvSpPr>
-          <p:cNvPr id="5" name="TextBox 4"/>
-          <p:cNvSpPr txBox="1"/>
-          <p:nvPr/>
-        </p:nvSpPr>
-        <p:spPr>
-          <a:xfrm>
-            <a:off x="640080" y="1325880"/>
-            <a:ext cx="10515600" cy="548640"/>
-          </a:xfrm>
-          <a:prstGeom prst="rect">
-            <a:avLst/>
-          </a:prstGeom>
-          <a:noFill/>
-        </p:spPr>
-        <p:txBody>
-          <a:bodyPr wrap="square" anchor="t" lIns="0" rIns="0" tIns="0" bIns="0">
-            <a:spAutoFit/>
-          </a:bodyPr>
-          <a:lstStyle/>
-          <a:p>
-            <a:pPr algn="l"/>
-            <a:r>
-              <a:rPr sz="2600" b="1">
-                <a:solidFill>
-                  <a:srgbClr val="1C2A33"/>
-                </a:solidFill>
-                <a:latin typeface="楷体"/>
-                <a:ea typeface="楷体"/>
-                <a:cs typeface="楷体"/>
-              </a:rPr>
-              <a:t>换素材 → 调结构 → 改语言</a:t>
-            </a:r>
-          </a:p>
-        </p:txBody>
-      </p:sp>
-      <p:sp>
-        <p:nvSpPr>
-          <p:cNvPr id="6" name="Rounded Rectangle 5"/>
+          <p:cNvPr id="5" name="Rounded Rectangle 4"/>
           <p:cNvSpPr/>
           <p:nvPr/>
         </p:nvSpPr>
         <p:spPr>
           <a:xfrm>
-            <a:off x="640080" y="2194560"/>
-            <a:ext cx="3393338" cy="3840480"/>
-          </a:xfrm>
-          <a:prstGeom prst="roundRect">
-            <a:avLst/>
-          </a:prstGeom>
-          <a:solidFill>
-            <a:srgbClr val="FFFFFF"/>
-          </a:solidFill>
-          <a:ln w="22860">
-            <a:solidFill>
-              <a:srgbClr val="B23A2A"/>
-            </a:solidFill>
-          </a:ln>
-          <a:effectLst/>
-        </p:spPr>
-        <p:style>
-          <a:lnRef idx="1">
-            <a:schemeClr val="accent1"/>
-          </a:lnRef>
-          <a:fillRef idx="3">
-            <a:schemeClr val="accent1"/>
-          </a:fillRef>
-          <a:effectRef idx="2">
-            <a:schemeClr val="accent1"/>
-          </a:effectRef>
-          <a:fontRef idx="minor">
-            <a:schemeClr val="lt1"/>
-          </a:fontRef>
-        </p:style>
-        <p:txBody>
-          <a:bodyPr rtlCol="0" anchor="ctr"/>
-          <a:lstStyle/>
-          <a:p>
-            <a:pPr algn="ctr"/>
-          </a:p>
-        </p:txBody>
-      </p:sp>
-      <p:sp>
-        <p:nvSpPr>
-          <p:cNvPr id="7" name="TextBox 6"/>
-          <p:cNvSpPr txBox="1"/>
-          <p:nvPr/>
-        </p:nvSpPr>
-        <p:spPr>
-          <a:xfrm>
-            <a:off x="914400" y="2468880"/>
-            <a:ext cx="2844698" cy="548640"/>
-          </a:xfrm>
-          <a:prstGeom prst="rect">
-            <a:avLst/>
-          </a:prstGeom>
-          <a:noFill/>
-        </p:spPr>
-        <p:txBody>
-          <a:bodyPr wrap="square" anchor="t" lIns="0" rIns="0" tIns="0" bIns="0">
-            <a:spAutoFit/>
-          </a:bodyPr>
-          <a:lstStyle/>
-          <a:p>
-            <a:pPr algn="l"/>
-            <a:r>
-              <a:rPr sz="2200" b="1">
-                <a:solidFill>
-                  <a:srgbClr val="B23A2A"/>
-                </a:solidFill>
-                <a:latin typeface="楷体"/>
-                <a:ea typeface="楷体"/>
-                <a:cs typeface="楷体"/>
-              </a:rPr>
-              <a:t>① 换素材</a:t>
-            </a:r>
-          </a:p>
-        </p:txBody>
-      </p:sp>
-      <p:sp>
-        <p:nvSpPr>
-          <p:cNvPr id="8" name="TextBox 7"/>
-          <p:cNvSpPr txBox="1"/>
-          <p:nvPr/>
-        </p:nvSpPr>
-        <p:spPr>
-          <a:xfrm>
-            <a:off x="914400" y="3154680"/>
-            <a:ext cx="2844698" cy="457200"/>
-          </a:xfrm>
-          <a:prstGeom prst="rect">
-            <a:avLst/>
-          </a:prstGeom>
-          <a:noFill/>
-        </p:spPr>
-        <p:txBody>
-          <a:bodyPr wrap="square" anchor="t" lIns="0" rIns="0" tIns="0" bIns="0">
-            <a:spAutoFit/>
-          </a:bodyPr>
-          <a:lstStyle/>
-          <a:p>
-            <a:pPr algn="l"/>
-            <a:r>
-              <a:rPr sz="1500" b="1">
-                <a:solidFill>
-                  <a:srgbClr val="6B6258"/>
-                </a:solidFill>
-                <a:latin typeface="微软雅黑"/>
-                <a:ea typeface="微软雅黑"/>
-                <a:cs typeface="微软雅黑"/>
-              </a:rPr>
-              <a:t>更典型</a:t>
-            </a:r>
-          </a:p>
-        </p:txBody>
-      </p:sp>
-      <p:sp>
-        <p:nvSpPr>
-          <p:cNvPr id="9" name="TextBox 8"/>
-          <p:cNvSpPr txBox="1"/>
-          <p:nvPr/>
-        </p:nvSpPr>
-        <p:spPr>
-          <a:xfrm>
-            <a:off x="914400" y="3794760"/>
-            <a:ext cx="2844698" cy="2011680"/>
-          </a:xfrm>
-          <a:prstGeom prst="rect">
-            <a:avLst/>
-          </a:prstGeom>
-          <a:noFill/>
-        </p:spPr>
-        <p:txBody>
-          <a:bodyPr wrap="square" anchor="t" lIns="0" rIns="0" tIns="0" bIns="0">
-            <a:spAutoFit/>
-          </a:bodyPr>
-          <a:lstStyle/>
-          <a:p>
-            <a:pPr algn="l">
-              <a:lnSpc>
-                <a:spcPct val="155000"/>
-              </a:lnSpc>
-            </a:pPr>
-            <a:r>
-              <a:rPr sz="1350" b="0">
-                <a:solidFill>
-                  <a:srgbClr val="1C2A33"/>
-                </a:solidFill>
-                <a:latin typeface="楷体"/>
-                <a:ea typeface="楷体"/>
-                <a:cs typeface="楷体"/>
-              </a:rPr>
-              <a:t>删掉流水账与共性事件，选 1–2 个体现精神的独有细节。检测尺：删掉它，形象变不变？</a:t>
-            </a:r>
-          </a:p>
-        </p:txBody>
-      </p:sp>
-      <p:sp>
-        <p:nvSpPr>
-          <p:cNvPr id="10" name="Rounded Rectangle 9"/>
-          <p:cNvSpPr/>
-          <p:nvPr/>
-        </p:nvSpPr>
-        <p:spPr>
-          <a:xfrm>
-            <a:off x="4399178" y="2194560"/>
-            <a:ext cx="3393338" cy="3840480"/>
+            <a:off x="640080" y="1371600"/>
+            <a:ext cx="10911535" cy="685800"/>
           </a:xfrm>
           <a:prstGeom prst="roundRect">
             <a:avLst/>
@@ -6340,14 +5494,58 @@
       </p:sp>
       <p:sp>
         <p:nvSpPr>
-          <p:cNvPr id="11" name="TextBox 10"/>
+          <p:cNvPr id="6" name="Oval 5"/>
+          <p:cNvSpPr/>
+          <p:nvPr/>
+        </p:nvSpPr>
+        <p:spPr>
+          <a:xfrm>
+            <a:off x="804672" y="1536192"/>
+            <a:ext cx="457200" cy="457200"/>
+          </a:xfrm>
+          <a:prstGeom prst="ellipse">
+            <a:avLst/>
+          </a:prstGeom>
+          <a:solidFill>
+            <a:srgbClr val="2E7D6B"/>
+          </a:solidFill>
+          <a:ln>
+            <a:noFill/>
+          </a:ln>
+          <a:effectLst/>
+        </p:spPr>
+        <p:style>
+          <a:lnRef idx="1">
+            <a:schemeClr val="accent1"/>
+          </a:lnRef>
+          <a:fillRef idx="3">
+            <a:schemeClr val="accent1"/>
+          </a:fillRef>
+          <a:effectRef idx="2">
+            <a:schemeClr val="accent1"/>
+          </a:effectRef>
+          <a:fontRef idx="minor">
+            <a:schemeClr val="lt1"/>
+          </a:fontRef>
+        </p:style>
+        <p:txBody>
+          <a:bodyPr rtlCol="0" anchor="ctr"/>
+          <a:lstStyle/>
+          <a:p>
+            <a:pPr algn="ctr"/>
+          </a:p>
+        </p:txBody>
+      </p:sp>
+      <p:sp>
+        <p:nvSpPr>
+          <p:cNvPr id="7" name="TextBox 6"/>
           <p:cNvSpPr txBox="1"/>
           <p:nvPr/>
         </p:nvSpPr>
         <p:spPr>
           <a:xfrm>
-            <a:off x="4673498" y="2468880"/>
-            <a:ext cx="2844698" cy="548640"/>
+            <a:off x="804672" y="1591056"/>
+            <a:ext cx="457200" cy="384048"/>
           </a:xfrm>
           <a:prstGeom prst="rect">
             <a:avLst/>
@@ -6360,68 +5558,31 @@
           </a:bodyPr>
           <a:lstStyle/>
           <a:p>
-            <a:pPr algn="l"/>
-            <a:r>
-              <a:rPr sz="2200" b="1">
-                <a:solidFill>
-                  <a:srgbClr val="2E7D6B"/>
-                </a:solidFill>
-                <a:latin typeface="楷体"/>
-                <a:ea typeface="楷体"/>
-                <a:cs typeface="楷体"/>
-              </a:rPr>
-              <a:t>② 调结构</a:t>
-            </a:r>
-          </a:p>
-        </p:txBody>
-      </p:sp>
-      <p:sp>
-        <p:nvSpPr>
-          <p:cNvPr id="12" name="TextBox 11"/>
-          <p:cNvSpPr txBox="1"/>
-          <p:nvPr/>
-        </p:nvSpPr>
-        <p:spPr>
-          <a:xfrm>
-            <a:off x="4673498" y="3154680"/>
-            <a:ext cx="2844698" cy="457200"/>
-          </a:xfrm>
-          <a:prstGeom prst="rect">
-            <a:avLst/>
-          </a:prstGeom>
-          <a:noFill/>
-        </p:spPr>
-        <p:txBody>
-          <a:bodyPr wrap="square" anchor="t" lIns="0" rIns="0" tIns="0" bIns="0">
-            <a:spAutoFit/>
-          </a:bodyPr>
-          <a:lstStyle/>
-          <a:p>
-            <a:pPr algn="l"/>
-            <a:r>
-              <a:rPr sz="1500" b="1">
-                <a:solidFill>
-                  <a:srgbClr val="6B6258"/>
+            <a:pPr algn="ctr"/>
+            <a:r>
+              <a:rPr sz="1600" b="1">
+                <a:solidFill>
+                  <a:srgbClr val="FFFFFF"/>
                 </a:solidFill>
                 <a:latin typeface="微软雅黑"/>
                 <a:ea typeface="微软雅黑"/>
                 <a:cs typeface="微软雅黑"/>
               </a:rPr>
-              <a:t>更清晰</a:t>
-            </a:r>
-          </a:p>
-        </p:txBody>
-      </p:sp>
-      <p:sp>
-        <p:nvSpPr>
-          <p:cNvPr id="13" name="TextBox 12"/>
+              <a:t>1</a:t>
+            </a:r>
+          </a:p>
+        </p:txBody>
+      </p:sp>
+      <p:sp>
+        <p:nvSpPr>
+          <p:cNvPr id="8" name="TextBox 7"/>
           <p:cNvSpPr txBox="1"/>
           <p:nvPr/>
         </p:nvSpPr>
         <p:spPr>
           <a:xfrm>
-            <a:off x="4673498" y="3794760"/>
-            <a:ext cx="2844698" cy="2011680"/>
+            <a:off x="1371600" y="1481328"/>
+            <a:ext cx="9997135" cy="484632"/>
           </a:xfrm>
           <a:prstGeom prst="rect">
             <a:avLst/>
@@ -6436,33 +5597,33 @@
           <a:p>
             <a:pPr algn="l">
               <a:lnSpc>
-                <a:spcPct val="155000"/>
+                <a:spcPct val="110000"/>
               </a:lnSpc>
             </a:pPr>
             <a:r>
-              <a:rPr sz="1350" b="0">
+              <a:rPr sz="1600" b="1">
                 <a:solidFill>
                   <a:srgbClr val="1C2A33"/>
                 </a:solidFill>
-                <a:latin typeface="楷体"/>
-                <a:ea typeface="楷体"/>
-                <a:cs typeface="楷体"/>
+                <a:latin typeface="微软雅黑"/>
+                <a:ea typeface="微软雅黑"/>
+                <a:cs typeface="微软雅黑"/>
               </a:rPr>
-              <a:t>三选一定线索：时间线 / 细节聚焦 / 时间跨度，先搭骨架再落笔。</a:t>
-            </a:r>
-          </a:p>
-        </p:txBody>
-      </p:sp>
-      <p:sp>
-        <p:nvSpPr>
-          <p:cNvPr id="14" name="Rounded Rectangle 13"/>
+              <a:t>Step 1 回顾标准</a:t>
+            </a:r>
+          </a:p>
+        </p:txBody>
+      </p:sp>
+      <p:sp>
+        <p:nvSpPr>
+          <p:cNvPr id="9" name="Rounded Rectangle 8"/>
           <p:cNvSpPr/>
           <p:nvPr/>
         </p:nvSpPr>
         <p:spPr>
           <a:xfrm>
-            <a:off x="8158276" y="2194560"/>
-            <a:ext cx="3393338" cy="3840480"/>
+            <a:off x="640080" y="2194560"/>
+            <a:ext cx="10911535" cy="685800"/>
           </a:xfrm>
           <a:prstGeom prst="roundRect">
             <a:avLst/>
@@ -6472,7 +5633,7 @@
           </a:solidFill>
           <a:ln w="22860">
             <a:solidFill>
-              <a:srgbClr val="C8A86B"/>
+              <a:srgbClr val="2E7D6B"/>
             </a:solidFill>
           </a:ln>
           <a:effectLst/>
@@ -6501,14 +5662,58 @@
       </p:sp>
       <p:sp>
         <p:nvSpPr>
-          <p:cNvPr id="15" name="TextBox 14"/>
+          <p:cNvPr id="10" name="Oval 9"/>
+          <p:cNvSpPr/>
+          <p:nvPr/>
+        </p:nvSpPr>
+        <p:spPr>
+          <a:xfrm>
+            <a:off x="804672" y="2359152"/>
+            <a:ext cx="457200" cy="457200"/>
+          </a:xfrm>
+          <a:prstGeom prst="ellipse">
+            <a:avLst/>
+          </a:prstGeom>
+          <a:solidFill>
+            <a:srgbClr val="2E7D6B"/>
+          </a:solidFill>
+          <a:ln>
+            <a:noFill/>
+          </a:ln>
+          <a:effectLst/>
+        </p:spPr>
+        <p:style>
+          <a:lnRef idx="1">
+            <a:schemeClr val="accent1"/>
+          </a:lnRef>
+          <a:fillRef idx="3">
+            <a:schemeClr val="accent1"/>
+          </a:fillRef>
+          <a:effectRef idx="2">
+            <a:schemeClr val="accent1"/>
+          </a:effectRef>
+          <a:fontRef idx="minor">
+            <a:schemeClr val="lt1"/>
+          </a:fontRef>
+        </p:style>
+        <p:txBody>
+          <a:bodyPr rtlCol="0" anchor="ctr"/>
+          <a:lstStyle/>
+          <a:p>
+            <a:pPr algn="ctr"/>
+          </a:p>
+        </p:txBody>
+      </p:sp>
+      <p:sp>
+        <p:nvSpPr>
+          <p:cNvPr id="11" name="TextBox 10"/>
           <p:cNvSpPr txBox="1"/>
           <p:nvPr/>
         </p:nvSpPr>
         <p:spPr>
           <a:xfrm>
-            <a:off x="8432596" y="2468880"/>
-            <a:ext cx="2844698" cy="548640"/>
+            <a:off x="804672" y="2414016"/>
+            <a:ext cx="457200" cy="384048"/>
           </a:xfrm>
           <a:prstGeom prst="rect">
             <a:avLst/>
@@ -6521,68 +5726,31 @@
           </a:bodyPr>
           <a:lstStyle/>
           <a:p>
-            <a:pPr algn="l"/>
-            <a:r>
-              <a:rPr sz="2200" b="1">
-                <a:solidFill>
-                  <a:srgbClr val="C8A86B"/>
-                </a:solidFill>
-                <a:latin typeface="楷体"/>
-                <a:ea typeface="楷体"/>
-                <a:cs typeface="楷体"/>
-              </a:rPr>
-              <a:t>③ 改语言</a:t>
-            </a:r>
-          </a:p>
-        </p:txBody>
-      </p:sp>
-      <p:sp>
-        <p:nvSpPr>
-          <p:cNvPr id="16" name="TextBox 15"/>
-          <p:cNvSpPr txBox="1"/>
-          <p:nvPr/>
-        </p:nvSpPr>
-        <p:spPr>
-          <a:xfrm>
-            <a:off x="8432596" y="3154680"/>
-            <a:ext cx="2844698" cy="457200"/>
-          </a:xfrm>
-          <a:prstGeom prst="rect">
-            <a:avLst/>
-          </a:prstGeom>
-          <a:noFill/>
-        </p:spPr>
-        <p:txBody>
-          <a:bodyPr wrap="square" anchor="t" lIns="0" rIns="0" tIns="0" bIns="0">
-            <a:spAutoFit/>
-          </a:bodyPr>
-          <a:lstStyle/>
-          <a:p>
-            <a:pPr algn="l"/>
-            <a:r>
-              <a:rPr sz="1500" b="1">
-                <a:solidFill>
-                  <a:srgbClr val="6B6258"/>
+            <a:pPr algn="ctr"/>
+            <a:r>
+              <a:rPr sz="1600" b="1">
+                <a:solidFill>
+                  <a:srgbClr val="FFFFFF"/>
                 </a:solidFill>
                 <a:latin typeface="微软雅黑"/>
                 <a:ea typeface="微软雅黑"/>
                 <a:cs typeface="微软雅黑"/>
               </a:rPr>
-              <a:t>评价→画面</a:t>
-            </a:r>
-          </a:p>
-        </p:txBody>
-      </p:sp>
-      <p:sp>
-        <p:nvSpPr>
-          <p:cNvPr id="17" name="TextBox 16"/>
+              <a:t>2</a:t>
+            </a:r>
+          </a:p>
+        </p:txBody>
+      </p:sp>
+      <p:sp>
+        <p:nvSpPr>
+          <p:cNvPr id="12" name="TextBox 11"/>
           <p:cNvSpPr txBox="1"/>
           <p:nvPr/>
         </p:nvSpPr>
         <p:spPr>
           <a:xfrm>
-            <a:off x="8432596" y="3794760"/>
-            <a:ext cx="2844698" cy="2011680"/>
+            <a:off x="1371600" y="2304288"/>
+            <a:ext cx="9997135" cy="484632"/>
           </a:xfrm>
           <a:prstGeom prst="rect">
             <a:avLst/>
@@ -6597,26 +5765,698 @@
           <a:p>
             <a:pPr algn="l">
               <a:lnSpc>
-                <a:spcPct val="155000"/>
+                <a:spcPct val="110000"/>
               </a:lnSpc>
             </a:pPr>
             <a:r>
-              <a:rPr sz="1350" b="0">
+              <a:rPr sz="1600" b="1">
                 <a:solidFill>
                   <a:srgbClr val="1C2A33"/>
                 </a:solidFill>
-                <a:latin typeface="楷体"/>
-                <a:ea typeface="楷体"/>
-                <a:cs typeface="楷体"/>
+                <a:latin typeface="微软雅黑"/>
+                <a:ea typeface="微软雅黑"/>
+                <a:cs typeface="微软雅黑"/>
               </a:rPr>
-              <a:t>全文检索评价词，逐句换成具体事件。"伟大"→"亮着灯"，"无私"→"感冒药"。</a:t>
-            </a:r>
-          </a:p>
-        </p:txBody>
-      </p:sp>
-      <p:sp>
-        <p:nvSpPr>
-          <p:cNvPr id="18" name="TextBox 17"/>
+              <a:t>Step 2 讲评典型A</a:t>
+            </a:r>
+          </a:p>
+        </p:txBody>
+      </p:sp>
+      <p:sp>
+        <p:nvSpPr>
+          <p:cNvPr id="13" name="Rounded Rectangle 12"/>
+          <p:cNvSpPr/>
+          <p:nvPr/>
+        </p:nvSpPr>
+        <p:spPr>
+          <a:xfrm>
+            <a:off x="640080" y="3017520"/>
+            <a:ext cx="10911535" cy="685800"/>
+          </a:xfrm>
+          <a:prstGeom prst="roundRect">
+            <a:avLst/>
+          </a:prstGeom>
+          <a:solidFill>
+            <a:srgbClr val="FFFFFF"/>
+          </a:solidFill>
+          <a:ln w="22860">
+            <a:solidFill>
+              <a:srgbClr val="2E7D6B"/>
+            </a:solidFill>
+          </a:ln>
+          <a:effectLst/>
+        </p:spPr>
+        <p:style>
+          <a:lnRef idx="1">
+            <a:schemeClr val="accent1"/>
+          </a:lnRef>
+          <a:fillRef idx="3">
+            <a:schemeClr val="accent1"/>
+          </a:fillRef>
+          <a:effectRef idx="2">
+            <a:schemeClr val="accent1"/>
+          </a:effectRef>
+          <a:fontRef idx="minor">
+            <a:schemeClr val="lt1"/>
+          </a:fontRef>
+        </p:style>
+        <p:txBody>
+          <a:bodyPr rtlCol="0" anchor="ctr"/>
+          <a:lstStyle/>
+          <a:p>
+            <a:pPr algn="ctr"/>
+          </a:p>
+        </p:txBody>
+      </p:sp>
+      <p:sp>
+        <p:nvSpPr>
+          <p:cNvPr id="14" name="Oval 13"/>
+          <p:cNvSpPr/>
+          <p:nvPr/>
+        </p:nvSpPr>
+        <p:spPr>
+          <a:xfrm>
+            <a:off x="804672" y="3182112"/>
+            <a:ext cx="457200" cy="457200"/>
+          </a:xfrm>
+          <a:prstGeom prst="ellipse">
+            <a:avLst/>
+          </a:prstGeom>
+          <a:solidFill>
+            <a:srgbClr val="2E7D6B"/>
+          </a:solidFill>
+          <a:ln>
+            <a:noFill/>
+          </a:ln>
+          <a:effectLst/>
+        </p:spPr>
+        <p:style>
+          <a:lnRef idx="1">
+            <a:schemeClr val="accent1"/>
+          </a:lnRef>
+          <a:fillRef idx="3">
+            <a:schemeClr val="accent1"/>
+          </a:fillRef>
+          <a:effectRef idx="2">
+            <a:schemeClr val="accent1"/>
+          </a:effectRef>
+          <a:fontRef idx="minor">
+            <a:schemeClr val="lt1"/>
+          </a:fontRef>
+        </p:style>
+        <p:txBody>
+          <a:bodyPr rtlCol="0" anchor="ctr"/>
+          <a:lstStyle/>
+          <a:p>
+            <a:pPr algn="ctr"/>
+          </a:p>
+        </p:txBody>
+      </p:sp>
+      <p:sp>
+        <p:nvSpPr>
+          <p:cNvPr id="15" name="TextBox 14"/>
+          <p:cNvSpPr txBox="1"/>
+          <p:nvPr/>
+        </p:nvSpPr>
+        <p:spPr>
+          <a:xfrm>
+            <a:off x="804672" y="3236976"/>
+            <a:ext cx="457200" cy="384048"/>
+          </a:xfrm>
+          <a:prstGeom prst="rect">
+            <a:avLst/>
+          </a:prstGeom>
+          <a:noFill/>
+        </p:spPr>
+        <p:txBody>
+          <a:bodyPr wrap="square" anchor="t" lIns="0" rIns="0" tIns="0" bIns="0">
+            <a:spAutoFit/>
+          </a:bodyPr>
+          <a:lstStyle/>
+          <a:p>
+            <a:pPr algn="ctr"/>
+            <a:r>
+              <a:rPr sz="1600" b="1">
+                <a:solidFill>
+                  <a:srgbClr val="FFFFFF"/>
+                </a:solidFill>
+                <a:latin typeface="微软雅黑"/>
+                <a:ea typeface="微软雅黑"/>
+                <a:cs typeface="微软雅黑"/>
+              </a:rPr>
+              <a:t>3</a:t>
+            </a:r>
+          </a:p>
+        </p:txBody>
+      </p:sp>
+      <p:sp>
+        <p:nvSpPr>
+          <p:cNvPr id="16" name="TextBox 15"/>
+          <p:cNvSpPr txBox="1"/>
+          <p:nvPr/>
+        </p:nvSpPr>
+        <p:spPr>
+          <a:xfrm>
+            <a:off x="1371600" y="3127248"/>
+            <a:ext cx="9997135" cy="484632"/>
+          </a:xfrm>
+          <a:prstGeom prst="rect">
+            <a:avLst/>
+          </a:prstGeom>
+          <a:noFill/>
+        </p:spPr>
+        <p:txBody>
+          <a:bodyPr wrap="square" anchor="t" lIns="0" rIns="0" tIns="0" bIns="0">
+            <a:spAutoFit/>
+          </a:bodyPr>
+          <a:lstStyle/>
+          <a:p>
+            <a:pPr algn="l">
+              <a:lnSpc>
+                <a:spcPct val="110000"/>
+              </a:lnSpc>
+            </a:pPr>
+            <a:r>
+              <a:rPr sz="1600" b="1">
+                <a:solidFill>
+                  <a:srgbClr val="1C2A33"/>
+                </a:solidFill>
+                <a:latin typeface="微软雅黑"/>
+                <a:ea typeface="微软雅黑"/>
+                <a:cs typeface="微软雅黑"/>
+              </a:rPr>
+              <a:t>Step 3 讲评典型B</a:t>
+            </a:r>
+          </a:p>
+        </p:txBody>
+      </p:sp>
+      <p:sp>
+        <p:nvSpPr>
+          <p:cNvPr id="17" name="Rounded Rectangle 16"/>
+          <p:cNvSpPr/>
+          <p:nvPr/>
+        </p:nvSpPr>
+        <p:spPr>
+          <a:xfrm>
+            <a:off x="640080" y="3840480"/>
+            <a:ext cx="10911535" cy="685800"/>
+          </a:xfrm>
+          <a:prstGeom prst="roundRect">
+            <a:avLst/>
+          </a:prstGeom>
+          <a:solidFill>
+            <a:srgbClr val="FFFFFF"/>
+          </a:solidFill>
+          <a:ln w="22860">
+            <a:solidFill>
+              <a:srgbClr val="2E7D6B"/>
+            </a:solidFill>
+          </a:ln>
+          <a:effectLst/>
+        </p:spPr>
+        <p:style>
+          <a:lnRef idx="1">
+            <a:schemeClr val="accent1"/>
+          </a:lnRef>
+          <a:fillRef idx="3">
+            <a:schemeClr val="accent1"/>
+          </a:fillRef>
+          <a:effectRef idx="2">
+            <a:schemeClr val="accent1"/>
+          </a:effectRef>
+          <a:fontRef idx="minor">
+            <a:schemeClr val="lt1"/>
+          </a:fontRef>
+        </p:style>
+        <p:txBody>
+          <a:bodyPr rtlCol="0" anchor="ctr"/>
+          <a:lstStyle/>
+          <a:p>
+            <a:pPr algn="ctr"/>
+          </a:p>
+        </p:txBody>
+      </p:sp>
+      <p:sp>
+        <p:nvSpPr>
+          <p:cNvPr id="18" name="Oval 17"/>
+          <p:cNvSpPr/>
+          <p:nvPr/>
+        </p:nvSpPr>
+        <p:spPr>
+          <a:xfrm>
+            <a:off x="804672" y="4005072"/>
+            <a:ext cx="457200" cy="457200"/>
+          </a:xfrm>
+          <a:prstGeom prst="ellipse">
+            <a:avLst/>
+          </a:prstGeom>
+          <a:solidFill>
+            <a:srgbClr val="2E7D6B"/>
+          </a:solidFill>
+          <a:ln>
+            <a:noFill/>
+          </a:ln>
+          <a:effectLst/>
+        </p:spPr>
+        <p:style>
+          <a:lnRef idx="1">
+            <a:schemeClr val="accent1"/>
+          </a:lnRef>
+          <a:fillRef idx="3">
+            <a:schemeClr val="accent1"/>
+          </a:fillRef>
+          <a:effectRef idx="2">
+            <a:schemeClr val="accent1"/>
+          </a:effectRef>
+          <a:fontRef idx="minor">
+            <a:schemeClr val="lt1"/>
+          </a:fontRef>
+        </p:style>
+        <p:txBody>
+          <a:bodyPr rtlCol="0" anchor="ctr"/>
+          <a:lstStyle/>
+          <a:p>
+            <a:pPr algn="ctr"/>
+          </a:p>
+        </p:txBody>
+      </p:sp>
+      <p:sp>
+        <p:nvSpPr>
+          <p:cNvPr id="19" name="TextBox 18"/>
+          <p:cNvSpPr txBox="1"/>
+          <p:nvPr/>
+        </p:nvSpPr>
+        <p:spPr>
+          <a:xfrm>
+            <a:off x="804672" y="4059936"/>
+            <a:ext cx="457200" cy="384048"/>
+          </a:xfrm>
+          <a:prstGeom prst="rect">
+            <a:avLst/>
+          </a:prstGeom>
+          <a:noFill/>
+        </p:spPr>
+        <p:txBody>
+          <a:bodyPr wrap="square" anchor="t" lIns="0" rIns="0" tIns="0" bIns="0">
+            <a:spAutoFit/>
+          </a:bodyPr>
+          <a:lstStyle/>
+          <a:p>
+            <a:pPr algn="ctr"/>
+            <a:r>
+              <a:rPr sz="1600" b="1">
+                <a:solidFill>
+                  <a:srgbClr val="FFFFFF"/>
+                </a:solidFill>
+                <a:latin typeface="微软雅黑"/>
+                <a:ea typeface="微软雅黑"/>
+                <a:cs typeface="微软雅黑"/>
+              </a:rPr>
+              <a:t>4</a:t>
+            </a:r>
+          </a:p>
+        </p:txBody>
+      </p:sp>
+      <p:sp>
+        <p:nvSpPr>
+          <p:cNvPr id="20" name="TextBox 19"/>
+          <p:cNvSpPr txBox="1"/>
+          <p:nvPr/>
+        </p:nvSpPr>
+        <p:spPr>
+          <a:xfrm>
+            <a:off x="1371600" y="3950208"/>
+            <a:ext cx="9997135" cy="484632"/>
+          </a:xfrm>
+          <a:prstGeom prst="rect">
+            <a:avLst/>
+          </a:prstGeom>
+          <a:noFill/>
+        </p:spPr>
+        <p:txBody>
+          <a:bodyPr wrap="square" anchor="t" lIns="0" rIns="0" tIns="0" bIns="0">
+            <a:spAutoFit/>
+          </a:bodyPr>
+          <a:lstStyle/>
+          <a:p>
+            <a:pPr algn="l">
+              <a:lnSpc>
+                <a:spcPct val="110000"/>
+              </a:lnSpc>
+            </a:pPr>
+            <a:r>
+              <a:rPr sz="1600" b="1">
+                <a:solidFill>
+                  <a:srgbClr val="1C2A33"/>
+                </a:solidFill>
+                <a:latin typeface="微软雅黑"/>
+                <a:ea typeface="微软雅黑"/>
+                <a:cs typeface="微软雅黑"/>
+              </a:rPr>
+              <a:t>Step 4 讲评典型C</a:t>
+            </a:r>
+          </a:p>
+        </p:txBody>
+      </p:sp>
+      <p:sp>
+        <p:nvSpPr>
+          <p:cNvPr id="21" name="Rounded Rectangle 20"/>
+          <p:cNvSpPr/>
+          <p:nvPr/>
+        </p:nvSpPr>
+        <p:spPr>
+          <a:xfrm>
+            <a:off x="640080" y="4663440"/>
+            <a:ext cx="10911535" cy="685800"/>
+          </a:xfrm>
+          <a:prstGeom prst="roundRect">
+            <a:avLst/>
+          </a:prstGeom>
+          <a:solidFill>
+            <a:srgbClr val="FFFFFF"/>
+          </a:solidFill>
+          <a:ln w="22860">
+            <a:solidFill>
+              <a:srgbClr val="2E7D6B"/>
+            </a:solidFill>
+          </a:ln>
+          <a:effectLst/>
+        </p:spPr>
+        <p:style>
+          <a:lnRef idx="1">
+            <a:schemeClr val="accent1"/>
+          </a:lnRef>
+          <a:fillRef idx="3">
+            <a:schemeClr val="accent1"/>
+          </a:fillRef>
+          <a:effectRef idx="2">
+            <a:schemeClr val="accent1"/>
+          </a:effectRef>
+          <a:fontRef idx="minor">
+            <a:schemeClr val="lt1"/>
+          </a:fontRef>
+        </p:style>
+        <p:txBody>
+          <a:bodyPr rtlCol="0" anchor="ctr"/>
+          <a:lstStyle/>
+          <a:p>
+            <a:pPr algn="ctr"/>
+          </a:p>
+        </p:txBody>
+      </p:sp>
+      <p:sp>
+        <p:nvSpPr>
+          <p:cNvPr id="22" name="Oval 21"/>
+          <p:cNvSpPr/>
+          <p:nvPr/>
+        </p:nvSpPr>
+        <p:spPr>
+          <a:xfrm>
+            <a:off x="804672" y="4828032"/>
+            <a:ext cx="457200" cy="457200"/>
+          </a:xfrm>
+          <a:prstGeom prst="ellipse">
+            <a:avLst/>
+          </a:prstGeom>
+          <a:solidFill>
+            <a:srgbClr val="2E7D6B"/>
+          </a:solidFill>
+          <a:ln>
+            <a:noFill/>
+          </a:ln>
+          <a:effectLst/>
+        </p:spPr>
+        <p:style>
+          <a:lnRef idx="1">
+            <a:schemeClr val="accent1"/>
+          </a:lnRef>
+          <a:fillRef idx="3">
+            <a:schemeClr val="accent1"/>
+          </a:fillRef>
+          <a:effectRef idx="2">
+            <a:schemeClr val="accent1"/>
+          </a:effectRef>
+          <a:fontRef idx="minor">
+            <a:schemeClr val="lt1"/>
+          </a:fontRef>
+        </p:style>
+        <p:txBody>
+          <a:bodyPr rtlCol="0" anchor="ctr"/>
+          <a:lstStyle/>
+          <a:p>
+            <a:pPr algn="ctr"/>
+          </a:p>
+        </p:txBody>
+      </p:sp>
+      <p:sp>
+        <p:nvSpPr>
+          <p:cNvPr id="23" name="TextBox 22"/>
+          <p:cNvSpPr txBox="1"/>
+          <p:nvPr/>
+        </p:nvSpPr>
+        <p:spPr>
+          <a:xfrm>
+            <a:off x="804672" y="4882896"/>
+            <a:ext cx="457200" cy="384048"/>
+          </a:xfrm>
+          <a:prstGeom prst="rect">
+            <a:avLst/>
+          </a:prstGeom>
+          <a:noFill/>
+        </p:spPr>
+        <p:txBody>
+          <a:bodyPr wrap="square" anchor="t" lIns="0" rIns="0" tIns="0" bIns="0">
+            <a:spAutoFit/>
+          </a:bodyPr>
+          <a:lstStyle/>
+          <a:p>
+            <a:pPr algn="ctr"/>
+            <a:r>
+              <a:rPr sz="1600" b="1">
+                <a:solidFill>
+                  <a:srgbClr val="FFFFFF"/>
+                </a:solidFill>
+                <a:latin typeface="微软雅黑"/>
+                <a:ea typeface="微软雅黑"/>
+                <a:cs typeface="微软雅黑"/>
+              </a:rPr>
+              <a:t>5</a:t>
+            </a:r>
+          </a:p>
+        </p:txBody>
+      </p:sp>
+      <p:sp>
+        <p:nvSpPr>
+          <p:cNvPr id="24" name="TextBox 23"/>
+          <p:cNvSpPr txBox="1"/>
+          <p:nvPr/>
+        </p:nvSpPr>
+        <p:spPr>
+          <a:xfrm>
+            <a:off x="1371600" y="4773168"/>
+            <a:ext cx="9997135" cy="484632"/>
+          </a:xfrm>
+          <a:prstGeom prst="rect">
+            <a:avLst/>
+          </a:prstGeom>
+          <a:noFill/>
+        </p:spPr>
+        <p:txBody>
+          <a:bodyPr wrap="square" anchor="t" lIns="0" rIns="0" tIns="0" bIns="0">
+            <a:spAutoFit/>
+          </a:bodyPr>
+          <a:lstStyle/>
+          <a:p>
+            <a:pPr algn="l">
+              <a:lnSpc>
+                <a:spcPct val="110000"/>
+              </a:lnSpc>
+            </a:pPr>
+            <a:r>
+              <a:rPr sz="1400" b="1">
+                <a:solidFill>
+                  <a:srgbClr val="1C2A33"/>
+                </a:solidFill>
+                <a:latin typeface="微软雅黑"/>
+                <a:ea typeface="微软雅黑"/>
+                <a:cs typeface="微软雅黑"/>
+              </a:rPr>
+              <a:t>Step 5 当场修改示范</a:t>
+            </a:r>
+          </a:p>
+        </p:txBody>
+      </p:sp>
+      <p:sp>
+        <p:nvSpPr>
+          <p:cNvPr id="25" name="Rounded Rectangle 24"/>
+          <p:cNvSpPr/>
+          <p:nvPr/>
+        </p:nvSpPr>
+        <p:spPr>
+          <a:xfrm>
+            <a:off x="640080" y="5486400"/>
+            <a:ext cx="10911535" cy="685800"/>
+          </a:xfrm>
+          <a:prstGeom prst="roundRect">
+            <a:avLst/>
+          </a:prstGeom>
+          <a:solidFill>
+            <a:srgbClr val="FFFFFF"/>
+          </a:solidFill>
+          <a:ln w="22860">
+            <a:solidFill>
+              <a:srgbClr val="2E7D6B"/>
+            </a:solidFill>
+          </a:ln>
+          <a:effectLst/>
+        </p:spPr>
+        <p:style>
+          <a:lnRef idx="1">
+            <a:schemeClr val="accent1"/>
+          </a:lnRef>
+          <a:fillRef idx="3">
+            <a:schemeClr val="accent1"/>
+          </a:fillRef>
+          <a:effectRef idx="2">
+            <a:schemeClr val="accent1"/>
+          </a:effectRef>
+          <a:fontRef idx="minor">
+            <a:schemeClr val="lt1"/>
+          </a:fontRef>
+        </p:style>
+        <p:txBody>
+          <a:bodyPr rtlCol="0" anchor="ctr"/>
+          <a:lstStyle/>
+          <a:p>
+            <a:pPr algn="ctr"/>
+          </a:p>
+        </p:txBody>
+      </p:sp>
+      <p:sp>
+        <p:nvSpPr>
+          <p:cNvPr id="26" name="Oval 25"/>
+          <p:cNvSpPr/>
+          <p:nvPr/>
+        </p:nvSpPr>
+        <p:spPr>
+          <a:xfrm>
+            <a:off x="804672" y="5650992"/>
+            <a:ext cx="457200" cy="457200"/>
+          </a:xfrm>
+          <a:prstGeom prst="ellipse">
+            <a:avLst/>
+          </a:prstGeom>
+          <a:solidFill>
+            <a:srgbClr val="2E7D6B"/>
+          </a:solidFill>
+          <a:ln>
+            <a:noFill/>
+          </a:ln>
+          <a:effectLst/>
+        </p:spPr>
+        <p:style>
+          <a:lnRef idx="1">
+            <a:schemeClr val="accent1"/>
+          </a:lnRef>
+          <a:fillRef idx="3">
+            <a:schemeClr val="accent1"/>
+          </a:fillRef>
+          <a:effectRef idx="2">
+            <a:schemeClr val="accent1"/>
+          </a:effectRef>
+          <a:fontRef idx="minor">
+            <a:schemeClr val="lt1"/>
+          </a:fontRef>
+        </p:style>
+        <p:txBody>
+          <a:bodyPr rtlCol="0" anchor="ctr"/>
+          <a:lstStyle/>
+          <a:p>
+            <a:pPr algn="ctr"/>
+          </a:p>
+        </p:txBody>
+      </p:sp>
+      <p:sp>
+        <p:nvSpPr>
+          <p:cNvPr id="27" name="TextBox 26"/>
+          <p:cNvSpPr txBox="1"/>
+          <p:nvPr/>
+        </p:nvSpPr>
+        <p:spPr>
+          <a:xfrm>
+            <a:off x="804672" y="5705856"/>
+            <a:ext cx="457200" cy="384048"/>
+          </a:xfrm>
+          <a:prstGeom prst="rect">
+            <a:avLst/>
+          </a:prstGeom>
+          <a:noFill/>
+        </p:spPr>
+        <p:txBody>
+          <a:bodyPr wrap="square" anchor="t" lIns="0" rIns="0" tIns="0" bIns="0">
+            <a:spAutoFit/>
+          </a:bodyPr>
+          <a:lstStyle/>
+          <a:p>
+            <a:pPr algn="ctr"/>
+            <a:r>
+              <a:rPr sz="1600" b="1">
+                <a:solidFill>
+                  <a:srgbClr val="FFFFFF"/>
+                </a:solidFill>
+                <a:latin typeface="微软雅黑"/>
+                <a:ea typeface="微软雅黑"/>
+                <a:cs typeface="微软雅黑"/>
+              </a:rPr>
+              <a:t>6</a:t>
+            </a:r>
+          </a:p>
+        </p:txBody>
+      </p:sp>
+      <p:sp>
+        <p:nvSpPr>
+          <p:cNvPr id="28" name="TextBox 27"/>
+          <p:cNvSpPr txBox="1"/>
+          <p:nvPr/>
+        </p:nvSpPr>
+        <p:spPr>
+          <a:xfrm>
+            <a:off x="1371600" y="5596128"/>
+            <a:ext cx="9997135" cy="484632"/>
+          </a:xfrm>
+          <a:prstGeom prst="rect">
+            <a:avLst/>
+          </a:prstGeom>
+          <a:noFill/>
+        </p:spPr>
+        <p:txBody>
+          <a:bodyPr wrap="square" anchor="t" lIns="0" rIns="0" tIns="0" bIns="0">
+            <a:spAutoFit/>
+          </a:bodyPr>
+          <a:lstStyle/>
+          <a:p>
+            <a:pPr algn="l">
+              <a:lnSpc>
+                <a:spcPct val="110000"/>
+              </a:lnSpc>
+            </a:pPr>
+            <a:r>
+              <a:rPr sz="1400" b="1">
+                <a:solidFill>
+                  <a:srgbClr val="1C2A33"/>
+                </a:solidFill>
+                <a:latin typeface="微软雅黑"/>
+                <a:ea typeface="微软雅黑"/>
+                <a:cs typeface="微软雅黑"/>
+              </a:rPr>
+              <a:t>Step 6 终稿修改+互签</a:t>
+            </a:r>
+          </a:p>
+        </p:txBody>
+      </p:sp>
+      <p:sp>
+        <p:nvSpPr>
+          <p:cNvPr id="29" name="TextBox 28"/>
           <p:cNvSpPr txBox="1"/>
           <p:nvPr/>
         </p:nvSpPr>
@@ -6749,7 +6589,7 @@
                 <a:ea typeface="微软雅黑"/>
                 <a:cs typeface="微软雅黑"/>
               </a:rPr>
-              <a:t>难点 · 怎么破</a:t>
+              <a:t>易混易错</a:t>
             </a:r>
           </a:p>
         </p:txBody>
@@ -6800,51 +6640,14 @@
       </p:sp>
       <p:sp>
         <p:nvSpPr>
-          <p:cNvPr id="5" name="TextBox 4"/>
-          <p:cNvSpPr txBox="1"/>
-          <p:nvPr/>
-        </p:nvSpPr>
-        <p:spPr>
-          <a:xfrm>
-            <a:off x="640080" y="1325880"/>
-            <a:ext cx="10058400" cy="548640"/>
-          </a:xfrm>
-          <a:prstGeom prst="rect">
-            <a:avLst/>
-          </a:prstGeom>
-          <a:noFill/>
-        </p:spPr>
-        <p:txBody>
-          <a:bodyPr wrap="square" anchor="t" lIns="0" rIns="0" tIns="0" bIns="0">
-            <a:spAutoFit/>
-          </a:bodyPr>
-          <a:lstStyle/>
-          <a:p>
-            <a:pPr algn="l"/>
-            <a:r>
-              <a:rPr sz="2600" b="1">
-                <a:solidFill>
-                  <a:srgbClr val="1C2A33"/>
-                </a:solidFill>
-                <a:latin typeface="楷体"/>
-                <a:ea typeface="楷体"/>
-                <a:cs typeface="楷体"/>
-              </a:rPr>
-              <a:t>三处容易卡住的地方</a:t>
-            </a:r>
-          </a:p>
-        </p:txBody>
-      </p:sp>
-      <p:sp>
-        <p:nvSpPr>
-          <p:cNvPr id="6" name="Rounded Rectangle 5"/>
+          <p:cNvPr id="5" name="Rounded Rectangle 4"/>
           <p:cNvSpPr/>
           <p:nvPr/>
         </p:nvSpPr>
         <p:spPr>
           <a:xfrm>
-            <a:off x="640080" y="2194560"/>
-            <a:ext cx="3393338" cy="3840480"/>
+            <a:off x="640080" y="1417320"/>
+            <a:ext cx="5349240" cy="2057400"/>
           </a:xfrm>
           <a:prstGeom prst="roundRect">
             <a:avLst/>
@@ -6852,7 +6655,7 @@
           <a:solidFill>
             <a:srgbClr val="FFFFFF"/>
           </a:solidFill>
-          <a:ln w="20320">
+          <a:ln w="22860">
             <a:solidFill>
               <a:srgbClr val="B23A2A"/>
             </a:solidFill>
@@ -6883,14 +6686,14 @@
       </p:sp>
       <p:sp>
         <p:nvSpPr>
-          <p:cNvPr id="7" name="Oval 6"/>
+          <p:cNvPr id="6" name="Oval 5"/>
           <p:cNvSpPr/>
           <p:nvPr/>
         </p:nvSpPr>
         <p:spPr>
           <a:xfrm>
-            <a:off x="868680" y="2423160"/>
-            <a:ext cx="548640" cy="548640"/>
+            <a:off x="804672" y="1581912"/>
+            <a:ext cx="457200" cy="457200"/>
           </a:xfrm>
           <a:prstGeom prst="ellipse">
             <a:avLst/>
@@ -6927,14 +6730,14 @@
       </p:sp>
       <p:sp>
         <p:nvSpPr>
-          <p:cNvPr id="8" name="TextBox 7"/>
+          <p:cNvPr id="7" name="TextBox 6"/>
           <p:cNvSpPr txBox="1"/>
           <p:nvPr/>
         </p:nvSpPr>
         <p:spPr>
           <a:xfrm>
-            <a:off x="868680" y="2496312"/>
-            <a:ext cx="548640" cy="411480"/>
+            <a:off x="804672" y="1636776"/>
+            <a:ext cx="457200" cy="384048"/>
           </a:xfrm>
           <a:prstGeom prst="rect">
             <a:avLst/>
@@ -6949,7 +6752,7 @@
           <a:p>
             <a:pPr algn="ctr"/>
             <a:r>
-              <a:rPr sz="2000" b="1">
+              <a:rPr sz="1600" b="1">
                 <a:solidFill>
                   <a:srgbClr val="FFFFFF"/>
                 </a:solidFill>
@@ -6957,21 +6760,21 @@
                 <a:ea typeface="微软雅黑"/>
                 <a:cs typeface="微软雅黑"/>
               </a:rPr>
-              <a:t>1</a:t>
-            </a:r>
-          </a:p>
-        </p:txBody>
-      </p:sp>
-      <p:sp>
-        <p:nvSpPr>
-          <p:cNvPr id="9" name="TextBox 8"/>
+              <a:t>!</a:t>
+            </a:r>
+          </a:p>
+        </p:txBody>
+      </p:sp>
+      <p:sp>
+        <p:nvSpPr>
+          <p:cNvPr id="8" name="TextBox 7"/>
           <p:cNvSpPr txBox="1"/>
           <p:nvPr/>
         </p:nvSpPr>
         <p:spPr>
           <a:xfrm>
-            <a:off x="1554480" y="2450592"/>
-            <a:ext cx="2296058" cy="731520"/>
+            <a:off x="1371600" y="1527048"/>
+            <a:ext cx="4434840" cy="457200"/>
           </a:xfrm>
           <a:prstGeom prst="rect">
             <a:avLst/>
@@ -6986,11 +6789,52 @@
           <a:p>
             <a:pPr algn="l">
               <a:lnSpc>
-                <a:spcPct val="130000"/>
+                <a:spcPct val="110000"/>
               </a:lnSpc>
             </a:pPr>
             <a:r>
-              <a:rPr sz="1650" b="1">
+              <a:rPr sz="1600" b="1">
+                <a:solidFill>
+                  <a:srgbClr val="1C2A33"/>
+                </a:solidFill>
+                <a:latin typeface="微软雅黑"/>
+                <a:ea typeface="微软雅黑"/>
+                <a:cs typeface="微软雅黑"/>
+              </a:rPr>
+              <a:t/>
+            </a:r>
+          </a:p>
+        </p:txBody>
+      </p:sp>
+      <p:sp>
+        <p:nvSpPr>
+          <p:cNvPr id="9" name="TextBox 8"/>
+          <p:cNvSpPr txBox="1"/>
+          <p:nvPr/>
+        </p:nvSpPr>
+        <p:spPr>
+          <a:xfrm>
+            <a:off x="1371600" y="1965960"/>
+            <a:ext cx="4434840" cy="1417320"/>
+          </a:xfrm>
+          <a:prstGeom prst="rect">
+            <a:avLst/>
+          </a:prstGeom>
+          <a:noFill/>
+        </p:spPr>
+        <p:txBody>
+          <a:bodyPr wrap="square" anchor="t" lIns="0" rIns="0" tIns="0" bIns="0">
+            <a:spAutoFit/>
+          </a:bodyPr>
+          <a:lstStyle/>
+          <a:p>
+            <a:pPr algn="l">
+              <a:lnSpc>
+                <a:spcPct val="128000"/>
+              </a:lnSpc>
+            </a:pPr>
+            <a:r>
+              <a:rPr sz="1200" b="0">
                 <a:solidFill>
                   <a:srgbClr val="1C2A33"/>
                 </a:solidFill>
@@ -6998,62 +6842,21 @@
                 <a:ea typeface="楷体"/>
                 <a:cs typeface="楷体"/>
               </a:rPr>
-              <a:t>评价词自检难</a:t>
-            </a:r>
-          </a:p>
-        </p:txBody>
-      </p:sp>
-      <p:sp>
-        <p:nvSpPr>
-          <p:cNvPr id="10" name="TextBox 9"/>
-          <p:cNvSpPr txBox="1"/>
-          <p:nvPr/>
-        </p:nvSpPr>
-        <p:spPr>
-          <a:xfrm>
-            <a:off x="914400" y="3246120"/>
-            <a:ext cx="2844698" cy="2651760"/>
-          </a:xfrm>
-          <a:prstGeom prst="rect">
-            <a:avLst/>
-          </a:prstGeom>
-          <a:noFill/>
-        </p:spPr>
-        <p:txBody>
-          <a:bodyPr wrap="square" anchor="t" lIns="0" rIns="0" tIns="0" bIns="0">
-            <a:spAutoFit/>
-          </a:bodyPr>
-          <a:lstStyle/>
-          <a:p>
-            <a:pPr algn="l">
-              <a:lnSpc>
-                <a:spcPct val="150000"/>
-              </a:lnSpc>
-            </a:pPr>
-            <a:r>
-              <a:rPr sz="1400" b="0">
-                <a:solidFill>
-                  <a:srgbClr val="1C2A33"/>
-                </a:solidFill>
-                <a:latin typeface="楷体"/>
-                <a:ea typeface="楷体"/>
-                <a:cs typeface="楷体"/>
-              </a:rPr>
-              <a:t>不自觉写出"伟大·无私"。→ 用"全文检索法"逐句排查，圈出所有形容词式评价。</a:t>
-            </a:r>
-          </a:p>
-        </p:txBody>
-      </p:sp>
-      <p:sp>
-        <p:nvSpPr>
-          <p:cNvPr id="11" name="Rounded Rectangle 10"/>
+              <a:t>① 「评价词违规」的自我检测。原因：学生不自觉使用「伟大」「无私」等词，需用「全文搜索法」逐句检查。</a:t>
+            </a:r>
+          </a:p>
+        </p:txBody>
+      </p:sp>
+      <p:sp>
+        <p:nvSpPr>
+          <p:cNvPr id="10" name="Rounded Rectangle 9"/>
           <p:cNvSpPr/>
           <p:nvPr/>
         </p:nvSpPr>
         <p:spPr>
           <a:xfrm>
-            <a:off x="4399178" y="2194560"/>
-            <a:ext cx="3393338" cy="3840480"/>
+            <a:off x="6263640" y="1417320"/>
+            <a:ext cx="5349240" cy="2057400"/>
           </a:xfrm>
           <a:prstGeom prst="roundRect">
             <a:avLst/>
@@ -7061,9 +6864,9 @@
           <a:solidFill>
             <a:srgbClr val="FFFFFF"/>
           </a:solidFill>
-          <a:ln w="20320">
+          <a:ln w="22860">
             <a:solidFill>
-              <a:srgbClr val="2E7D6B"/>
+              <a:srgbClr val="B23A2A"/>
             </a:solidFill>
           </a:ln>
           <a:effectLst/>
@@ -7092,20 +6895,20 @@
       </p:sp>
       <p:sp>
         <p:nvSpPr>
-          <p:cNvPr id="12" name="Oval 11"/>
+          <p:cNvPr id="11" name="Oval 10"/>
           <p:cNvSpPr/>
           <p:nvPr/>
         </p:nvSpPr>
         <p:spPr>
           <a:xfrm>
-            <a:off x="4627778" y="2423160"/>
-            <a:ext cx="548640" cy="548640"/>
+            <a:off x="6428232" y="1581912"/>
+            <a:ext cx="457200" cy="457200"/>
           </a:xfrm>
           <a:prstGeom prst="ellipse">
             <a:avLst/>
           </a:prstGeom>
           <a:solidFill>
-            <a:srgbClr val="2E7D6B"/>
+            <a:srgbClr val="B23A2A"/>
           </a:solidFill>
           <a:ln>
             <a:noFill/>
@@ -7136,14 +6939,14 @@
       </p:sp>
       <p:sp>
         <p:nvSpPr>
-          <p:cNvPr id="13" name="TextBox 12"/>
+          <p:cNvPr id="12" name="TextBox 11"/>
           <p:cNvSpPr txBox="1"/>
           <p:nvPr/>
         </p:nvSpPr>
         <p:spPr>
           <a:xfrm>
-            <a:off x="4627778" y="2496312"/>
-            <a:ext cx="548640" cy="411480"/>
+            <a:off x="6428232" y="1636776"/>
+            <a:ext cx="457200" cy="384048"/>
           </a:xfrm>
           <a:prstGeom prst="rect">
             <a:avLst/>
@@ -7158,7 +6961,7 @@
           <a:p>
             <a:pPr algn="ctr"/>
             <a:r>
-              <a:rPr sz="2000" b="1">
+              <a:rPr sz="1600" b="1">
                 <a:solidFill>
                   <a:srgbClr val="FFFFFF"/>
                 </a:solidFill>
@@ -7166,21 +6969,21 @@
                 <a:ea typeface="微软雅黑"/>
                 <a:cs typeface="微软雅黑"/>
               </a:rPr>
-              <a:t>2</a:t>
-            </a:r>
-          </a:p>
-        </p:txBody>
-      </p:sp>
-      <p:sp>
-        <p:nvSpPr>
-          <p:cNvPr id="14" name="TextBox 13"/>
+              <a:t>!</a:t>
+            </a:r>
+          </a:p>
+        </p:txBody>
+      </p:sp>
+      <p:sp>
+        <p:nvSpPr>
+          <p:cNvPr id="13" name="TextBox 12"/>
           <p:cNvSpPr txBox="1"/>
           <p:nvPr/>
         </p:nvSpPr>
         <p:spPr>
           <a:xfrm>
-            <a:off x="5313578" y="2450592"/>
-            <a:ext cx="2296058" cy="731520"/>
+            <a:off x="6995160" y="1527048"/>
+            <a:ext cx="4434840" cy="457200"/>
           </a:xfrm>
           <a:prstGeom prst="rect">
             <a:avLst/>
@@ -7195,11 +6998,52 @@
           <a:p>
             <a:pPr algn="l">
               <a:lnSpc>
-                <a:spcPct val="130000"/>
+                <a:spcPct val="110000"/>
               </a:lnSpc>
             </a:pPr>
             <a:r>
-              <a:rPr sz="1650" b="1">
+              <a:rPr sz="1600" b="1">
+                <a:solidFill>
+                  <a:srgbClr val="1C2A33"/>
+                </a:solidFill>
+                <a:latin typeface="微软雅黑"/>
+                <a:ea typeface="微软雅黑"/>
+                <a:cs typeface="微软雅黑"/>
+              </a:rPr>
+              <a:t/>
+            </a:r>
+          </a:p>
+        </p:txBody>
+      </p:sp>
+      <p:sp>
+        <p:nvSpPr>
+          <p:cNvPr id="14" name="TextBox 13"/>
+          <p:cNvSpPr txBox="1"/>
+          <p:nvPr/>
+        </p:nvSpPr>
+        <p:spPr>
+          <a:xfrm>
+            <a:off x="6995160" y="1965960"/>
+            <a:ext cx="4434840" cy="1417320"/>
+          </a:xfrm>
+          <a:prstGeom prst="rect">
+            <a:avLst/>
+          </a:prstGeom>
+          <a:noFill/>
+        </p:spPr>
+        <p:txBody>
+          <a:bodyPr wrap="square" anchor="t" lIns="0" rIns="0" tIns="0" bIns="0">
+            <a:spAutoFit/>
+          </a:bodyPr>
+          <a:lstStyle/>
+          <a:p>
+            <a:pPr algn="l">
+              <a:lnSpc>
+                <a:spcPct val="128000"/>
+              </a:lnSpc>
+            </a:pPr>
+            <a:r>
+              <a:rPr sz="1200" b="0">
                 <a:solidFill>
                   <a:srgbClr val="1C2A33"/>
                 </a:solidFill>
@@ -7207,62 +7051,21 @@
                 <a:ea typeface="楷体"/>
                 <a:cs typeface="楷体"/>
               </a:rPr>
-              <a:t>舍不得删素材</a:t>
-            </a:r>
-          </a:p>
-        </p:txBody>
-      </p:sp>
-      <p:sp>
-        <p:nvSpPr>
-          <p:cNvPr id="15" name="TextBox 14"/>
-          <p:cNvSpPr txBox="1"/>
-          <p:nvPr/>
-        </p:nvSpPr>
-        <p:spPr>
-          <a:xfrm>
-            <a:off x="4673498" y="3246120"/>
-            <a:ext cx="2844698" cy="2651760"/>
-          </a:xfrm>
-          <a:prstGeom prst="rect">
-            <a:avLst/>
-          </a:prstGeom>
-          <a:noFill/>
-        </p:spPr>
-        <p:txBody>
-          <a:bodyPr wrap="square" anchor="t" lIns="0" rIns="0" tIns="0" bIns="0">
-            <a:spAutoFit/>
-          </a:bodyPr>
-          <a:lstStyle/>
-          <a:p>
-            <a:pPr algn="l">
-              <a:lnSpc>
-                <a:spcPct val="150000"/>
-              </a:lnSpc>
-            </a:pPr>
-            <a:r>
-              <a:rPr sz="1400" b="0">
-                <a:solidFill>
-                  <a:srgbClr val="1C2A33"/>
-                </a:solidFill>
-                <a:latin typeface="楷体"/>
-                <a:ea typeface="楷体"/>
-                <a:cs typeface="楷体"/>
-              </a:rPr>
-              <a:t>"写了就舍不得删"。→ 用检测尺追问：删掉它形象变不变？不变就删。</a:t>
-            </a:r>
-          </a:p>
-        </p:txBody>
-      </p:sp>
-      <p:sp>
-        <p:nvSpPr>
-          <p:cNvPr id="16" name="Rounded Rectangle 15"/>
+              <a:t>② 「删素材」的勇气。原因：学生觉得「写了就舍不得删」，需用「删掉它形象变不变」来引导。</a:t>
+            </a:r>
+          </a:p>
+        </p:txBody>
+      </p:sp>
+      <p:sp>
+        <p:nvSpPr>
+          <p:cNvPr id="15" name="Rounded Rectangle 14"/>
           <p:cNvSpPr/>
           <p:nvPr/>
         </p:nvSpPr>
         <p:spPr>
           <a:xfrm>
-            <a:off x="8158276" y="2194560"/>
-            <a:ext cx="3393338" cy="3840480"/>
+            <a:off x="640080" y="3703320"/>
+            <a:ext cx="5349240" cy="2057400"/>
           </a:xfrm>
           <a:prstGeom prst="roundRect">
             <a:avLst/>
@@ -7270,9 +7073,9 @@
           <a:solidFill>
             <a:srgbClr val="FFFFFF"/>
           </a:solidFill>
-          <a:ln w="20320">
+          <a:ln w="22860">
             <a:solidFill>
-              <a:srgbClr val="C8A86B"/>
+              <a:srgbClr val="B23A2A"/>
             </a:solidFill>
           </a:ln>
           <a:effectLst/>
@@ -7301,20 +7104,20 @@
       </p:sp>
       <p:sp>
         <p:nvSpPr>
-          <p:cNvPr id="17" name="Oval 16"/>
+          <p:cNvPr id="16" name="Oval 15"/>
           <p:cNvSpPr/>
           <p:nvPr/>
         </p:nvSpPr>
         <p:spPr>
           <a:xfrm>
-            <a:off x="8386876" y="2423160"/>
-            <a:ext cx="548640" cy="548640"/>
+            <a:off x="804672" y="3867912"/>
+            <a:ext cx="457200" cy="457200"/>
           </a:xfrm>
           <a:prstGeom prst="ellipse">
             <a:avLst/>
           </a:prstGeom>
           <a:solidFill>
-            <a:srgbClr val="C8A86B"/>
+            <a:srgbClr val="B23A2A"/>
           </a:solidFill>
           <a:ln>
             <a:noFill/>
@@ -7345,14 +7148,14 @@
       </p:sp>
       <p:sp>
         <p:nvSpPr>
-          <p:cNvPr id="18" name="TextBox 17"/>
+          <p:cNvPr id="17" name="TextBox 16"/>
           <p:cNvSpPr txBox="1"/>
           <p:nvPr/>
         </p:nvSpPr>
         <p:spPr>
           <a:xfrm>
-            <a:off x="8386876" y="2496312"/>
-            <a:ext cx="548640" cy="411480"/>
+            <a:off x="804672" y="3922776"/>
+            <a:ext cx="457200" cy="384048"/>
           </a:xfrm>
           <a:prstGeom prst="rect">
             <a:avLst/>
@@ -7367,7 +7170,7 @@
           <a:p>
             <a:pPr algn="ctr"/>
             <a:r>
-              <a:rPr sz="2000" b="1">
+              <a:rPr sz="1600" b="1">
                 <a:solidFill>
                   <a:srgbClr val="FFFFFF"/>
                 </a:solidFill>
@@ -7375,21 +7178,21 @@
                 <a:ea typeface="微软雅黑"/>
                 <a:cs typeface="微软雅黑"/>
               </a:rPr>
-              <a:t>3</a:t>
-            </a:r>
-          </a:p>
-        </p:txBody>
-      </p:sp>
-      <p:sp>
-        <p:nvSpPr>
-          <p:cNvPr id="19" name="TextBox 18"/>
+              <a:t>!</a:t>
+            </a:r>
+          </a:p>
+        </p:txBody>
+      </p:sp>
+      <p:sp>
+        <p:nvSpPr>
+          <p:cNvPr id="18" name="TextBox 17"/>
           <p:cNvSpPr txBox="1"/>
           <p:nvPr/>
         </p:nvSpPr>
         <p:spPr>
           <a:xfrm>
-            <a:off x="9072676" y="2450592"/>
-            <a:ext cx="2296058" cy="731520"/>
+            <a:off x="1371600" y="3813048"/>
+            <a:ext cx="4434840" cy="457200"/>
           </a:xfrm>
           <a:prstGeom prst="rect">
             <a:avLst/>
@@ -7404,11 +7207,52 @@
           <a:p>
             <a:pPr algn="l">
               <a:lnSpc>
-                <a:spcPct val="130000"/>
+                <a:spcPct val="110000"/>
               </a:lnSpc>
             </a:pPr>
             <a:r>
-              <a:rPr sz="1650" b="1">
+              <a:rPr sz="1600" b="1">
+                <a:solidFill>
+                  <a:srgbClr val="1C2A33"/>
+                </a:solidFill>
+                <a:latin typeface="微软雅黑"/>
+                <a:ea typeface="微软雅黑"/>
+                <a:cs typeface="微软雅黑"/>
+              </a:rPr>
+              <a:t/>
+            </a:r>
+          </a:p>
+        </p:txBody>
+      </p:sp>
+      <p:sp>
+        <p:nvSpPr>
+          <p:cNvPr id="19" name="TextBox 18"/>
+          <p:cNvSpPr txBox="1"/>
+          <p:nvPr/>
+        </p:nvSpPr>
+        <p:spPr>
+          <a:xfrm>
+            <a:off x="1371600" y="4251960"/>
+            <a:ext cx="4434840" cy="1417320"/>
+          </a:xfrm>
+          <a:prstGeom prst="rect">
+            <a:avLst/>
+          </a:prstGeom>
+          <a:noFill/>
+        </p:spPr>
+        <p:txBody>
+          <a:bodyPr wrap="square" anchor="t" lIns="0" rIns="0" tIns="0" bIns="0">
+            <a:spAutoFit/>
+          </a:bodyPr>
+          <a:lstStyle/>
+          <a:p>
+            <a:pPr algn="l">
+              <a:lnSpc>
+                <a:spcPct val="128000"/>
+              </a:lnSpc>
+            </a:pPr>
+            <a:r>
+              <a:rPr sz="1200" b="0">
                 <a:solidFill>
                   <a:srgbClr val="1C2A33"/>
                 </a:solidFill>
@@ -7416,7 +7260,7 @@
                 <a:ea typeface="楷体"/>
                 <a:cs typeface="楷体"/>
               </a:rPr>
-              <a:t>赏析只会"夸"</a:t>
+              <a:t>③ 讲评的接受度。原因：被公开讲评的学生可能有压力，需先讲优点再提建议，保护写作热情。</a:t>
             </a:r>
           </a:p>
         </p:txBody>
@@ -7424,47 +7268,6 @@
       <p:sp>
         <p:nvSpPr>
           <p:cNvPr id="20" name="TextBox 19"/>
-          <p:cNvSpPr txBox="1"/>
-          <p:nvPr/>
-        </p:nvSpPr>
-        <p:spPr>
-          <a:xfrm>
-            <a:off x="8432596" y="3246120"/>
-            <a:ext cx="2844698" cy="2651760"/>
-          </a:xfrm>
-          <a:prstGeom prst="rect">
-            <a:avLst/>
-          </a:prstGeom>
-          <a:noFill/>
-        </p:spPr>
-        <p:txBody>
-          <a:bodyPr wrap="square" anchor="t" lIns="0" rIns="0" tIns="0" bIns="0">
-            <a:spAutoFit/>
-          </a:bodyPr>
-          <a:lstStyle/>
-          <a:p>
-            <a:pPr algn="l">
-              <a:lnSpc>
-                <a:spcPct val="150000"/>
-              </a:lnSpc>
-            </a:pPr>
-            <a:r>
-              <a:rPr sz="1400" b="0">
-                <a:solidFill>
-                  <a:srgbClr val="1C2A33"/>
-                </a:solidFill>
-                <a:latin typeface="楷体"/>
-                <a:ea typeface="楷体"/>
-                <a:cs typeface="楷体"/>
-              </a:rPr>
-              <a:t>评点只说"写得好"。→ 赏析要落到具体词句：好在哪、为什么好。</a:t>
-            </a:r>
-          </a:p>
-        </p:txBody>
-      </p:sp>
-      <p:sp>
-        <p:nvSpPr>
-          <p:cNvPr id="21" name="TextBox 20"/>
           <p:cNvSpPr txBox="1"/>
           <p:nvPr/>
         </p:nvSpPr>
@@ -7591,13 +7394,13 @@
             <a:r>
               <a:rPr sz="1300" b="1">
                 <a:solidFill>
-                  <a:srgbClr val="B23A2A"/>
+                  <a:srgbClr val="C8A86B"/>
                 </a:solidFill>
                 <a:latin typeface="微软雅黑"/>
                 <a:ea typeface="微软雅黑"/>
                 <a:cs typeface="微软雅黑"/>
               </a:rPr>
-              <a:t>探究 · 招牌招式</a:t>
+              <a:t>要点板书</a:t>
             </a:r>
           </a:p>
         </p:txBody>
@@ -7617,7 +7420,7 @@
             <a:avLst/>
           </a:prstGeom>
           <a:solidFill>
-            <a:srgbClr val="B23A2A"/>
+            <a:srgbClr val="C8A86B"/>
           </a:solidFill>
           <a:ln>
             <a:noFill/>
@@ -7648,51 +7451,14 @@
       </p:sp>
       <p:sp>
         <p:nvSpPr>
-          <p:cNvPr id="5" name="TextBox 4"/>
-          <p:cNvSpPr txBox="1"/>
-          <p:nvPr/>
-        </p:nvSpPr>
-        <p:spPr>
-          <a:xfrm>
-            <a:off x="640080" y="1280160"/>
-            <a:ext cx="10515600" cy="640080"/>
-          </a:xfrm>
-          <a:prstGeom prst="rect">
-            <a:avLst/>
-          </a:prstGeom>
-          <a:noFill/>
-        </p:spPr>
-        <p:txBody>
-          <a:bodyPr wrap="square" anchor="t" lIns="0" rIns="0" tIns="0" bIns="0">
-            <a:spAutoFit/>
-          </a:bodyPr>
-          <a:lstStyle/>
-          <a:p>
-            <a:pPr algn="l"/>
-            <a:r>
-              <a:rPr sz="2500" b="1">
-                <a:solidFill>
-                  <a:srgbClr val="1C2A33"/>
-                </a:solidFill>
-                <a:latin typeface="楷体"/>
-                <a:ea typeface="楷体"/>
-                <a:cs typeface="楷体"/>
-              </a:rPr>
-              <a:t>对比修改法 + 约束修改法</a:t>
-            </a:r>
-          </a:p>
-        </p:txBody>
-      </p:sp>
-      <p:sp>
-        <p:nvSpPr>
-          <p:cNvPr id="6" name="Rounded Rectangle 5"/>
+          <p:cNvPr id="5" name="Rounded Rectangle 4"/>
           <p:cNvSpPr/>
           <p:nvPr/>
         </p:nvSpPr>
         <p:spPr>
           <a:xfrm>
-            <a:off x="640080" y="2057400"/>
-            <a:ext cx="5227167" cy="2057400"/>
+            <a:off x="640080" y="1417320"/>
+            <a:ext cx="10911535" cy="5394960"/>
           </a:xfrm>
           <a:prstGeom prst="roundRect">
             <a:avLst/>
@@ -7700,9 +7466,9 @@
           <a:solidFill>
             <a:srgbClr val="FFFFFF"/>
           </a:solidFill>
-          <a:ln w="22860">
+          <a:ln w="25400">
             <a:solidFill>
-              <a:srgbClr val="B23A2A"/>
+              <a:srgbClr val="C8A86B"/>
             </a:solidFill>
           </a:ln>
           <a:effectLst/>
@@ -7731,14 +7497,14 @@
       </p:sp>
       <p:sp>
         <p:nvSpPr>
-          <p:cNvPr id="7" name="TextBox 6"/>
+          <p:cNvPr id="6" name="TextBox 5"/>
           <p:cNvSpPr txBox="1"/>
           <p:nvPr/>
         </p:nvSpPr>
         <p:spPr>
           <a:xfrm>
-            <a:off x="914400" y="2212848"/>
-            <a:ext cx="4678527" cy="457200"/>
+            <a:off x="914400" y="1554480"/>
+            <a:ext cx="10362895" cy="5120640"/>
           </a:xfrm>
           <a:prstGeom prst="rect">
             <a:avLst/>
@@ -7751,417 +7517,55 @@
           </a:bodyPr>
           <a:lstStyle/>
           <a:p>
-            <a:pPr algn="l"/>
-            <a:r>
-              <a:rPr sz="1600" b="1">
-                <a:solidFill>
-                  <a:srgbClr val="B23A2A"/>
-                </a:solidFill>
-                <a:latin typeface="楷体"/>
-                <a:ea typeface="楷体"/>
-                <a:cs typeface="楷体"/>
-              </a:rPr>
-              <a:t>① 对比修改法</a:t>
-            </a:r>
-          </a:p>
-        </p:txBody>
-      </p:sp>
-      <p:sp>
-        <p:nvSpPr>
-          <p:cNvPr id="8" name="TextBox 7"/>
-          <p:cNvSpPr txBox="1"/>
-          <p:nvPr/>
-        </p:nvSpPr>
-        <p:spPr>
-          <a:xfrm>
-            <a:off x="914400" y="2697480"/>
-            <a:ext cx="4678527" cy="1371600"/>
-          </a:xfrm>
-          <a:prstGeom prst="rect">
-            <a:avLst/>
-          </a:prstGeom>
-          <a:noFill/>
-        </p:spPr>
-        <p:txBody>
-          <a:bodyPr wrap="square" anchor="t" lIns="0" rIns="0" tIns="0" bIns="0">
-            <a:spAutoFit/>
-          </a:bodyPr>
-          <a:lstStyle/>
-          <a:p>
             <a:pPr algn="l">
               <a:lnSpc>
-                <a:spcPct val="145000"/>
+                <a:spcPct val="110000"/>
               </a:lnSpc>
               <a:spcAft>
-                <a:spcPts val="600"/>
+                <a:spcPts val="100"/>
               </a:spcAft>
             </a:pPr>
             <a:r>
               <a:rPr sz="1300" b="0">
                 <a:solidFill>
                   <a:srgbClr val="1C2A33"/>
-                </a:solidFill>
-                <a:latin typeface="楷体"/>
-                <a:ea typeface="楷体"/>
-                <a:cs typeface="楷体"/>
-              </a:rPr>
-              <a:t>同一句两版对照：原句"她待人特别好，是大家眼里的热心人"；改句"办公室的灯总亮到很晚，抽屉里备着感冒药，谁嗓子哑了就递一盒"。</a:t>
-            </a:r>
-          </a:p>
-          <a:p>
-            <a:pPr algn="l">
-              <a:lnSpc>
-                <a:spcPct val="145000"/>
-              </a:lnSpc>
-            </a:pPr>
-            <a:r>
-              <a:rPr sz="1300" b="0">
-                <a:solidFill>
-                  <a:srgbClr val="6B6258"/>
-                </a:solidFill>
-                <a:latin typeface="楷体"/>
-                <a:ea typeface="楷体"/>
-                <a:cs typeface="楷体"/>
-              </a:rPr>
-              <a:t>评价变成了画面，好自现。</a:t>
-            </a:r>
-          </a:p>
-        </p:txBody>
-      </p:sp>
-      <p:sp>
-        <p:nvSpPr>
-          <p:cNvPr id="9" name="Rounded Rectangle 8"/>
-          <p:cNvSpPr/>
-          <p:nvPr/>
-        </p:nvSpPr>
-        <p:spPr>
-          <a:xfrm>
-            <a:off x="640080" y="4297680"/>
-            <a:ext cx="5227167" cy="2057400"/>
-          </a:xfrm>
-          <a:prstGeom prst="roundRect">
-            <a:avLst/>
-          </a:prstGeom>
-          <a:solidFill>
-            <a:srgbClr val="FFFFFF"/>
-          </a:solidFill>
-          <a:ln w="22860">
-            <a:solidFill>
-              <a:srgbClr val="2E7D6B"/>
-            </a:solidFill>
-          </a:ln>
-          <a:effectLst/>
-        </p:spPr>
-        <p:style>
-          <a:lnRef idx="1">
-            <a:schemeClr val="accent1"/>
-          </a:lnRef>
-          <a:fillRef idx="3">
-            <a:schemeClr val="accent1"/>
-          </a:fillRef>
-          <a:effectRef idx="2">
-            <a:schemeClr val="accent1"/>
-          </a:effectRef>
-          <a:fontRef idx="minor">
-            <a:schemeClr val="lt1"/>
-          </a:fontRef>
-        </p:style>
-        <p:txBody>
-          <a:bodyPr rtlCol="0" anchor="ctr"/>
-          <a:lstStyle/>
-          <a:p>
-            <a:pPr algn="ctr"/>
-          </a:p>
-        </p:txBody>
-      </p:sp>
-      <p:sp>
-        <p:nvSpPr>
-          <p:cNvPr id="10" name="TextBox 9"/>
-          <p:cNvSpPr txBox="1"/>
-          <p:nvPr/>
-        </p:nvSpPr>
-        <p:spPr>
-          <a:xfrm>
-            <a:off x="914400" y="4453128"/>
-            <a:ext cx="4678527" cy="457200"/>
-          </a:xfrm>
-          <a:prstGeom prst="rect">
-            <a:avLst/>
-          </a:prstGeom>
-          <a:noFill/>
-        </p:spPr>
-        <p:txBody>
-          <a:bodyPr wrap="square" anchor="t" lIns="0" rIns="0" tIns="0" bIns="0">
-            <a:spAutoFit/>
-          </a:bodyPr>
-          <a:lstStyle/>
-          <a:p>
-            <a:pPr algn="l"/>
-            <a:r>
-              <a:rPr sz="1600" b="1">
-                <a:solidFill>
-                  <a:srgbClr val="2E7D6B"/>
-                </a:solidFill>
-                <a:latin typeface="楷体"/>
-                <a:ea typeface="楷体"/>
-                <a:cs typeface="楷体"/>
-              </a:rPr>
-              <a:t>② 约束修改法</a:t>
-            </a:r>
-          </a:p>
-        </p:txBody>
-      </p:sp>
-      <p:sp>
-        <p:nvSpPr>
-          <p:cNvPr id="11" name="TextBox 10"/>
-          <p:cNvSpPr txBox="1"/>
-          <p:nvPr/>
-        </p:nvSpPr>
-        <p:spPr>
-          <a:xfrm>
-            <a:off x="914400" y="4937760"/>
-            <a:ext cx="4678527" cy="1371600"/>
-          </a:xfrm>
-          <a:prstGeom prst="rect">
-            <a:avLst/>
-          </a:prstGeom>
-          <a:noFill/>
-        </p:spPr>
-        <p:txBody>
-          <a:bodyPr wrap="square" anchor="t" lIns="0" rIns="0" tIns="0" bIns="0">
-            <a:spAutoFit/>
-          </a:bodyPr>
-          <a:lstStyle/>
-          <a:p>
-            <a:pPr algn="l">
-              <a:lnSpc>
-                <a:spcPct val="150000"/>
-              </a:lnSpc>
-              <a:spcAft>
-                <a:spcPts val="600"/>
-              </a:spcAft>
-            </a:pPr>
-            <a:r>
-              <a:rPr sz="1350" b="0">
-                <a:solidFill>
-                  <a:srgbClr val="1C2A33"/>
-                </a:solidFill>
-                <a:latin typeface="楷体"/>
-                <a:ea typeface="楷体"/>
-                <a:cs typeface="楷体"/>
-              </a:rPr>
-              <a:t>终稿通篇不许出现"伟大·无私·奉献"等评价词——用约束逼出以事写人。</a:t>
-            </a:r>
-          </a:p>
-          <a:p>
-            <a:pPr algn="l">
-              <a:lnSpc>
-                <a:spcPct val="145000"/>
-              </a:lnSpc>
-            </a:pPr>
-            <a:r>
-              <a:rPr sz="1350" b="0">
-                <a:solidFill>
-                  <a:srgbClr val="6B6258"/>
-                </a:solidFill>
-                <a:latin typeface="楷体"/>
-                <a:ea typeface="楷体"/>
-                <a:cs typeface="楷体"/>
-              </a:rPr>
-              <a:t>写漏了就划掉，换成具体事件。</a:t>
-            </a:r>
-          </a:p>
-        </p:txBody>
-      </p:sp>
-      <p:pic>
-        <p:nvPicPr>
-          <p:cNvPr id="12" name="Picture 11" descr="ctype.jpg"/>
-          <p:cNvPicPr>
-            <a:picLocks noChangeAspect="1"/>
-          </p:cNvPicPr>
-          <p:nvPr/>
-        </p:nvPicPr>
-        <p:blipFill>
-          <a:blip r:embed="rId2"/>
-          <a:srcRect t="23177" b="23177"/>
-          <a:stretch>
-            <a:fillRect/>
-          </a:stretch>
-        </p:blipFill>
-        <p:spPr>
-          <a:xfrm>
-            <a:off x="6324447" y="2057400"/>
-            <a:ext cx="5227167" cy="2103120"/>
-          </a:xfrm>
-          <a:prstGeom prst="rect">
-            <a:avLst/>
-          </a:prstGeom>
-        </p:spPr>
-      </p:pic>
-      <p:sp>
-        <p:nvSpPr>
-          <p:cNvPr id="13" name="TextBox 12"/>
-          <p:cNvSpPr txBox="1"/>
-          <p:nvPr/>
-        </p:nvSpPr>
-        <p:spPr>
-          <a:xfrm>
-            <a:off x="6324447" y="4251960"/>
-            <a:ext cx="5227167" cy="365760"/>
-          </a:xfrm>
-          <a:prstGeom prst="rect">
-            <a:avLst/>
-          </a:prstGeom>
-          <a:noFill/>
-        </p:spPr>
-        <p:txBody>
-          <a:bodyPr wrap="square" anchor="t" lIns="0" rIns="0" tIns="0" bIns="0">
-            <a:spAutoFit/>
-          </a:bodyPr>
-          <a:lstStyle/>
-          <a:p>
-            <a:pPr algn="ctr"/>
-            <a:r>
-              <a:rPr sz="1100" b="0">
-                <a:solidFill>
-                  <a:srgbClr val="6B6258"/>
                 </a:solidFill>
                 <a:latin typeface="微软雅黑"/>
                 <a:ea typeface="微软雅黑"/>
                 <a:cs typeface="微软雅黑"/>
               </a:rPr>
-              <a:t>中文打字机（CC BY-SA 4.0）· "写作"的实物象征</a:t>
-            </a:r>
-          </a:p>
-        </p:txBody>
-      </p:sp>
-      <p:sp>
-        <p:nvSpPr>
-          <p:cNvPr id="14" name="Rounded Rectangle 13"/>
-          <p:cNvSpPr/>
-          <p:nvPr/>
-        </p:nvSpPr>
-        <p:spPr>
-          <a:xfrm>
-            <a:off x="6324447" y="4617719"/>
-            <a:ext cx="5227167" cy="1737360"/>
-          </a:xfrm>
-          <a:prstGeom prst="roundRect">
-            <a:avLst/>
-          </a:prstGeom>
-          <a:solidFill>
-            <a:srgbClr val="1C2A33"/>
-          </a:solidFill>
-          <a:effectLst/>
-        </p:spPr>
-        <p:style>
-          <a:lnRef idx="1">
-            <a:schemeClr val="accent1"/>
-          </a:lnRef>
-          <a:fillRef idx="3">
-            <a:schemeClr val="accent1"/>
-          </a:fillRef>
-          <a:effectRef idx="2">
-            <a:schemeClr val="accent1"/>
-          </a:effectRef>
-          <a:fontRef idx="minor">
-            <a:schemeClr val="lt1"/>
-          </a:fontRef>
-        </p:style>
-        <p:txBody>
-          <a:bodyPr rtlCol="0" anchor="ctr"/>
-          <a:lstStyle/>
-          <a:p>
-            <a:pPr algn="ctr"/>
-          </a:p>
-        </p:txBody>
-      </p:sp>
-      <p:sp>
-        <p:nvSpPr>
-          <p:cNvPr id="15" name="TextBox 14"/>
-          <p:cNvSpPr txBox="1"/>
-          <p:nvPr/>
-        </p:nvSpPr>
-        <p:spPr>
-          <a:xfrm>
-            <a:off x="6598767" y="4754880"/>
-            <a:ext cx="4678527" cy="1554480"/>
-          </a:xfrm>
-          <a:prstGeom prst="rect">
-            <a:avLst/>
-          </a:prstGeom>
-          <a:noFill/>
-        </p:spPr>
-        <p:txBody>
-          <a:bodyPr wrap="square" anchor="t" lIns="0" rIns="0" tIns="0" bIns="0">
-            <a:spAutoFit/>
-          </a:bodyPr>
-          <a:lstStyle/>
-          <a:p>
-            <a:pPr algn="l">
-              <a:lnSpc>
-                <a:spcPct val="140000"/>
-              </a:lnSpc>
-              <a:spcAft>
-                <a:spcPts val="500"/>
-              </a:spcAft>
-            </a:pPr>
-            <a:r>
-              <a:rPr sz="1300" b="1">
-                <a:solidFill>
-                  <a:srgbClr val="C8A86B"/>
-                </a:solidFill>
-                <a:latin typeface="楷体"/>
-                <a:ea typeface="楷体"/>
-                <a:cs typeface="楷体"/>
-              </a:rPr>
-              <a:t>穆青（新华社原社长，《焦裕禄》作者）：</a:t>
-            </a:r>
-          </a:p>
-          <a:p>
-            <a:pPr algn="l">
-              <a:lnSpc>
-                <a:spcPct val="145000"/>
-              </a:lnSpc>
-              <a:spcAft>
-                <a:spcPts val="500"/>
-              </a:spcAft>
-            </a:pPr>
-            <a:r>
-              <a:rPr sz="1300" b="0">
-                <a:solidFill>
-                  <a:srgbClr val="FFFFFF"/>
-                </a:solidFill>
-                <a:latin typeface="楷体"/>
-                <a:ea typeface="楷体"/>
-                <a:cs typeface="楷体"/>
-              </a:rPr>
-              <a:t>"获得细节、处理好细节，是记者综合水平的反映。"</a:t>
-            </a:r>
-          </a:p>
-          <a:p>
-            <a:pPr algn="l">
-              <a:lnSpc>
-                <a:spcPct val="140000"/>
-              </a:lnSpc>
-            </a:pPr>
-            <a:r>
-              <a:rPr sz="1200" b="0">
-                <a:solidFill>
-                  <a:srgbClr val="E7DFD2"/>
-                </a:solidFill>
-                <a:latin typeface="楷体"/>
-                <a:ea typeface="楷体"/>
-                <a:cs typeface="楷体"/>
-              </a:rPr>
-              <a:t>《焦裕禄》以"倚门望雪"的场景烘托人——细节比评价更有力量。</a:t>
-            </a:r>
-          </a:p>
-        </p:txBody>
-      </p:sp>
-      <p:sp>
-        <p:nvSpPr>
-          <p:cNvPr id="16" name="TextBox 15"/>
+              <a:t>┌── 通讯讲评 ──┐
+│ 【好通讯三标准】│
+│ ①真实(不虚构) │
+│ ②典型(事件精当)│
+│ ③以事写人 │
+│ │
+│ 习作A:评价词✗ │
+│ →删评价加事实 │
+│ 伟大→亮着灯 │
+│ 无私→感冒药 │
+│ │
+│ 习作B:选材✗ │
+│ →删流水账选 │
+│ 典型 │
+│ 穿制服→记名字 │
+│ │
+│ 习作C:以事写人✓│
+│ →赏析 │
+│ 手抖→勺子说话 │
+│ │
+│ 【修改三方向】 │
+│ 换素材/调结构/ │
+│ 改语言 │
+│ (评价→画面) │
+└────────────────┘</a:t>
+            </a:r>
+          </a:p>
+        </p:txBody>
+      </p:sp>
+      <p:sp>
+        <p:nvSpPr>
+          <p:cNvPr id="7" name="TextBox 6"/>
           <p:cNvSpPr txBox="1"/>
           <p:nvPr/>
         </p:nvSpPr>
@@ -8288,13 +7692,13 @@
             <a:r>
               <a:rPr sz="1300" b="1">
                 <a:solidFill>
-                  <a:srgbClr val="B23A2A"/>
+                  <a:srgbClr val="2E7D6B"/>
                 </a:solidFill>
                 <a:latin typeface="微软雅黑"/>
                 <a:ea typeface="微软雅黑"/>
                 <a:cs typeface="微软雅黑"/>
               </a:rPr>
-              <a:t>板书 · 通讯修改</a:t>
+              <a:t>分层作业</a:t>
             </a:r>
           </a:p>
         </p:txBody>
@@ -8314,7 +7718,7 @@
             <a:avLst/>
           </a:prstGeom>
           <a:solidFill>
-            <a:srgbClr val="B23A2A"/>
+            <a:srgbClr val="2E7D6B"/>
           </a:solidFill>
           <a:ln>
             <a:noFill/>
@@ -8351,15 +7755,20 @@
         </p:nvSpPr>
         <p:spPr>
           <a:xfrm>
-            <a:off x="640080" y="1737360"/>
-            <a:ext cx="10911535" cy="502920"/>
+            <a:off x="640080" y="1417320"/>
+            <a:ext cx="10911535" cy="1417320"/>
           </a:xfrm>
           <a:prstGeom prst="roundRect">
             <a:avLst/>
           </a:prstGeom>
           <a:solidFill>
-            <a:srgbClr val="1C2A33"/>
+            <a:srgbClr val="FFFFFF"/>
           </a:solidFill>
+          <a:ln w="22860">
+            <a:solidFill>
+              <a:srgbClr val="2E7D6B"/>
+            </a:solidFill>
+          </a:ln>
           <a:effectLst/>
         </p:spPr>
         <p:style>
@@ -8392,8 +7801,8 @@
         </p:nvSpPr>
         <p:spPr>
           <a:xfrm>
-            <a:off x="914400" y="1810512"/>
-            <a:ext cx="3108960" cy="365760"/>
+            <a:off x="1371600" y="1527048"/>
+            <a:ext cx="9997135" cy="457200"/>
           </a:xfrm>
           <a:prstGeom prst="rect">
             <a:avLst/>
@@ -8406,17 +7815,21 @@
           </a:bodyPr>
           <a:lstStyle/>
           <a:p>
-            <a:pPr algn="l"/>
-            <a:r>
-              <a:rPr sz="1500" b="1">
-                <a:solidFill>
-                  <a:srgbClr val="FFFFFF"/>
+            <a:pPr algn="l">
+              <a:lnSpc>
+                <a:spcPct val="110000"/>
+              </a:lnSpc>
+            </a:pPr>
+            <a:r>
+              <a:rPr sz="1600" b="1">
+                <a:solidFill>
+                  <a:srgbClr val="1C2A33"/>
                 </a:solidFill>
                 <a:latin typeface="微软雅黑"/>
                 <a:ea typeface="微软雅黑"/>
                 <a:cs typeface="微软雅黑"/>
               </a:rPr>
-              <a:t>维度</a:t>
+              <a:t/>
             </a:r>
           </a:p>
         </p:txBody>
@@ -8429,8 +7842,8 @@
         </p:nvSpPr>
         <p:spPr>
           <a:xfrm>
-            <a:off x="4297680" y="1810512"/>
-            <a:ext cx="7680960" cy="365760"/>
+            <a:off x="1371600" y="1965960"/>
+            <a:ext cx="9997135" cy="777240"/>
           </a:xfrm>
           <a:prstGeom prst="rect">
             <a:avLst/>
@@ -8443,17 +7856,21 @@
           </a:bodyPr>
           <a:lstStyle/>
           <a:p>
-            <a:pPr algn="l"/>
-            <a:r>
-              <a:rPr sz="1500" b="1">
-                <a:solidFill>
-                  <a:srgbClr val="C8A86B"/>
-                </a:solidFill>
-                <a:latin typeface="微软雅黑"/>
-                <a:ea typeface="微软雅黑"/>
-                <a:cs typeface="微软雅黑"/>
+            <a:pPr algn="l">
+              <a:lnSpc>
+                <a:spcPct val="128000"/>
+              </a:lnSpc>
+            </a:pPr>
+            <a:r>
+              <a:rPr sz="1100" b="0">
+                <a:solidFill>
+                  <a:srgbClr val="1C2A33"/>
+                </a:solidFill>
+                <a:latin typeface="楷体"/>
+                <a:ea typeface="楷体"/>
+                <a:cs typeface="楷体"/>
               </a:rPr>
-              <a:t>内容</a:t>
+              <a:t>【基础作业】1. 提交人物通讯终稿（修改后誊抄版），附同桌互签评语。2. 在终稿下方写50字自评：我改了什么、为什么改、改前后效果对比。</a:t>
             </a:r>
           </a:p>
         </p:txBody>
@@ -8466,8 +7883,8 @@
         </p:nvSpPr>
         <p:spPr>
           <a:xfrm>
-            <a:off x="640080" y="2331720"/>
-            <a:ext cx="10911535" cy="530352"/>
+            <a:off x="640080" y="2971800"/>
+            <a:ext cx="10911535" cy="1417320"/>
           </a:xfrm>
           <a:prstGeom prst="roundRect">
             <a:avLst/>
@@ -8475,9 +7892,9 @@
           <a:solidFill>
             <a:srgbClr val="FFFFFF"/>
           </a:solidFill>
-          <a:ln w="10160">
+          <a:ln w="22860">
             <a:solidFill>
-              <a:srgbClr val="6B6258"/>
+              <a:srgbClr val="2E7D6B"/>
             </a:solidFill>
           </a:ln>
           <a:effectLst/>
@@ -8512,8 +7929,8 @@
         </p:nvSpPr>
         <p:spPr>
           <a:xfrm>
-            <a:off x="914400" y="2423160"/>
-            <a:ext cx="3108960" cy="365760"/>
+            <a:off x="1371600" y="3081528"/>
+            <a:ext cx="9997135" cy="457200"/>
           </a:xfrm>
           <a:prstGeom prst="rect">
             <a:avLst/>
@@ -8526,17 +7943,21 @@
           </a:bodyPr>
           <a:lstStyle/>
           <a:p>
-            <a:pPr algn="l"/>
-            <a:r>
-              <a:rPr sz="1400" b="1">
-                <a:solidFill>
-                  <a:srgbClr val="B23A2A"/>
+            <a:pPr algn="l">
+              <a:lnSpc>
+                <a:spcPct val="110000"/>
+              </a:lnSpc>
+            </a:pPr>
+            <a:r>
+              <a:rPr sz="1600" b="1">
+                <a:solidFill>
+                  <a:srgbClr val="1C2A33"/>
                 </a:solidFill>
                 <a:latin typeface="微软雅黑"/>
                 <a:ea typeface="微软雅黑"/>
                 <a:cs typeface="微软雅黑"/>
               </a:rPr>
-              <a:t>好通讯三标准</a:t>
+              <a:t/>
             </a:r>
           </a:p>
         </p:txBody>
@@ -8549,8 +7970,8 @@
         </p:nvSpPr>
         <p:spPr>
           <a:xfrm>
-            <a:off x="4297680" y="2423160"/>
-            <a:ext cx="7680960" cy="365760"/>
+            <a:off x="1371600" y="3520440"/>
+            <a:ext cx="9997135" cy="777240"/>
           </a:xfrm>
           <a:prstGeom prst="rect">
             <a:avLst/>
@@ -8563,9 +7984,13 @@
           </a:bodyPr>
           <a:lstStyle/>
           <a:p>
-            <a:pPr algn="l"/>
-            <a:r>
-              <a:rPr sz="1350" b="0">
+            <a:pPr algn="l">
+              <a:lnSpc>
+                <a:spcPct val="128000"/>
+              </a:lnSpc>
+            </a:pPr>
+            <a:r>
+              <a:rPr sz="1100" b="0">
                 <a:solidFill>
                   <a:srgbClr val="1C2A33"/>
                 </a:solidFill>
@@ -8573,614 +7998,14 @@
                 <a:ea typeface="楷体"/>
                 <a:cs typeface="楷体"/>
               </a:rPr>
-              <a:t>真实(不虚构) · 典型(事件精当) · 以事写人</a:t>
-            </a:r>
-          </a:p>
-        </p:txBody>
-      </p:sp>
-      <p:sp>
-        <p:nvSpPr>
-          <p:cNvPr id="11" name="Rounded Rectangle 10"/>
-          <p:cNvSpPr/>
-          <p:nvPr/>
-        </p:nvSpPr>
-        <p:spPr>
-          <a:xfrm>
-            <a:off x="640080" y="2916936"/>
-            <a:ext cx="10911535" cy="530352"/>
-          </a:xfrm>
-          <a:prstGeom prst="roundRect">
-            <a:avLst/>
-          </a:prstGeom>
-          <a:solidFill>
-            <a:srgbClr val="E7DFD2"/>
-          </a:solidFill>
-          <a:ln w="10160">
-            <a:solidFill>
-              <a:srgbClr val="6B6258"/>
-            </a:solidFill>
-          </a:ln>
-          <a:effectLst/>
-        </p:spPr>
-        <p:style>
-          <a:lnRef idx="1">
-            <a:schemeClr val="accent1"/>
-          </a:lnRef>
-          <a:fillRef idx="3">
-            <a:schemeClr val="accent1"/>
-          </a:fillRef>
-          <a:effectRef idx="2">
-            <a:schemeClr val="accent1"/>
-          </a:effectRef>
-          <a:fontRef idx="minor">
-            <a:schemeClr val="lt1"/>
-          </a:fontRef>
-        </p:style>
-        <p:txBody>
-          <a:bodyPr rtlCol="0" anchor="ctr"/>
-          <a:lstStyle/>
-          <a:p>
-            <a:pPr algn="ctr"/>
-          </a:p>
-        </p:txBody>
-      </p:sp>
-      <p:sp>
-        <p:nvSpPr>
-          <p:cNvPr id="12" name="TextBox 11"/>
-          <p:cNvSpPr txBox="1"/>
-          <p:nvPr/>
-        </p:nvSpPr>
-        <p:spPr>
-          <a:xfrm>
-            <a:off x="914400" y="3008376"/>
-            <a:ext cx="3108960" cy="365760"/>
-          </a:xfrm>
-          <a:prstGeom prst="rect">
-            <a:avLst/>
-          </a:prstGeom>
-          <a:noFill/>
-        </p:spPr>
-        <p:txBody>
-          <a:bodyPr wrap="square" anchor="t" lIns="0" rIns="0" tIns="0" bIns="0">
-            <a:spAutoFit/>
-          </a:bodyPr>
-          <a:lstStyle/>
-          <a:p>
-            <a:pPr algn="l"/>
-            <a:r>
-              <a:rPr sz="1400" b="1">
-                <a:solidFill>
-                  <a:srgbClr val="2E7D6B"/>
-                </a:solidFill>
-                <a:latin typeface="微软雅黑"/>
-                <a:ea typeface="微软雅黑"/>
-                <a:cs typeface="微软雅黑"/>
-              </a:rPr>
-              <a:t>习作A 评价词违规</a:t>
-            </a:r>
-          </a:p>
-        </p:txBody>
-      </p:sp>
-      <p:sp>
-        <p:nvSpPr>
-          <p:cNvPr id="13" name="TextBox 12"/>
-          <p:cNvSpPr txBox="1"/>
-          <p:nvPr/>
-        </p:nvSpPr>
-        <p:spPr>
-          <a:xfrm>
-            <a:off x="4297680" y="3008376"/>
-            <a:ext cx="7680960" cy="365760"/>
-          </a:xfrm>
-          <a:prstGeom prst="rect">
-            <a:avLst/>
-          </a:prstGeom>
-          <a:noFill/>
-        </p:spPr>
-        <p:txBody>
-          <a:bodyPr wrap="square" anchor="t" lIns="0" rIns="0" tIns="0" bIns="0">
-            <a:spAutoFit/>
-          </a:bodyPr>
-          <a:lstStyle/>
-          <a:p>
-            <a:pPr algn="l"/>
-            <a:r>
-              <a:rPr sz="1350" b="0">
-                <a:solidFill>
-                  <a:srgbClr val="1C2A33"/>
-                </a:solidFill>
-                <a:latin typeface="楷体"/>
-                <a:ea typeface="楷体"/>
-                <a:cs typeface="楷体"/>
-              </a:rPr>
-              <a:t>删评价加事实：伟大→亮着灯，无私→感冒药</a:t>
-            </a:r>
-          </a:p>
-        </p:txBody>
-      </p:sp>
-      <p:sp>
-        <p:nvSpPr>
-          <p:cNvPr id="14" name="Rounded Rectangle 13"/>
-          <p:cNvSpPr/>
-          <p:nvPr/>
-        </p:nvSpPr>
-        <p:spPr>
-          <a:xfrm>
-            <a:off x="640080" y="3502152"/>
-            <a:ext cx="10911535" cy="530352"/>
-          </a:xfrm>
-          <a:prstGeom prst="roundRect">
-            <a:avLst/>
-          </a:prstGeom>
-          <a:solidFill>
-            <a:srgbClr val="FFFFFF"/>
-          </a:solidFill>
-          <a:ln w="10160">
-            <a:solidFill>
-              <a:srgbClr val="6B6258"/>
-            </a:solidFill>
-          </a:ln>
-          <a:effectLst/>
-        </p:spPr>
-        <p:style>
-          <a:lnRef idx="1">
-            <a:schemeClr val="accent1"/>
-          </a:lnRef>
-          <a:fillRef idx="3">
-            <a:schemeClr val="accent1"/>
-          </a:fillRef>
-          <a:effectRef idx="2">
-            <a:schemeClr val="accent1"/>
-          </a:effectRef>
-          <a:fontRef idx="minor">
-            <a:schemeClr val="lt1"/>
-          </a:fontRef>
-        </p:style>
-        <p:txBody>
-          <a:bodyPr rtlCol="0" anchor="ctr"/>
-          <a:lstStyle/>
-          <a:p>
-            <a:pPr algn="ctr"/>
-          </a:p>
-        </p:txBody>
-      </p:sp>
-      <p:sp>
-        <p:nvSpPr>
-          <p:cNvPr id="15" name="TextBox 14"/>
-          <p:cNvSpPr txBox="1"/>
-          <p:nvPr/>
-        </p:nvSpPr>
-        <p:spPr>
-          <a:xfrm>
-            <a:off x="914400" y="3593592"/>
-            <a:ext cx="3108960" cy="365760"/>
-          </a:xfrm>
-          <a:prstGeom prst="rect">
-            <a:avLst/>
-          </a:prstGeom>
-          <a:noFill/>
-        </p:spPr>
-        <p:txBody>
-          <a:bodyPr wrap="square" anchor="t" lIns="0" rIns="0" tIns="0" bIns="0">
-            <a:spAutoFit/>
-          </a:bodyPr>
-          <a:lstStyle/>
-          <a:p>
-            <a:pPr algn="l"/>
-            <a:r>
-              <a:rPr sz="1400" b="1">
-                <a:solidFill>
-                  <a:srgbClr val="C8A86B"/>
-                </a:solidFill>
-                <a:latin typeface="微软雅黑"/>
-                <a:ea typeface="微软雅黑"/>
-                <a:cs typeface="微软雅黑"/>
-              </a:rPr>
-              <a:t>习作B 选材不准</a:t>
-            </a:r>
-          </a:p>
-        </p:txBody>
-      </p:sp>
-      <p:sp>
-        <p:nvSpPr>
-          <p:cNvPr id="16" name="TextBox 15"/>
-          <p:cNvSpPr txBox="1"/>
-          <p:nvPr/>
-        </p:nvSpPr>
-        <p:spPr>
-          <a:xfrm>
-            <a:off x="4297680" y="3593592"/>
-            <a:ext cx="7680960" cy="365760"/>
-          </a:xfrm>
-          <a:prstGeom prst="rect">
-            <a:avLst/>
-          </a:prstGeom>
-          <a:noFill/>
-        </p:spPr>
-        <p:txBody>
-          <a:bodyPr wrap="square" anchor="t" lIns="0" rIns="0" tIns="0" bIns="0">
-            <a:spAutoFit/>
-          </a:bodyPr>
-          <a:lstStyle/>
-          <a:p>
-            <a:pPr algn="l"/>
-            <a:r>
-              <a:rPr sz="1350" b="0">
-                <a:solidFill>
-                  <a:srgbClr val="1C2A33"/>
-                </a:solidFill>
-                <a:latin typeface="楷体"/>
-                <a:ea typeface="楷体"/>
-                <a:cs typeface="楷体"/>
-              </a:rPr>
-              <a:t>删流水账选典型：穿制服→记住每个名字</a:t>
-            </a:r>
-          </a:p>
-        </p:txBody>
-      </p:sp>
-      <p:sp>
-        <p:nvSpPr>
-          <p:cNvPr id="17" name="Rounded Rectangle 16"/>
-          <p:cNvSpPr/>
-          <p:nvPr/>
-        </p:nvSpPr>
-        <p:spPr>
-          <a:xfrm>
-            <a:off x="640080" y="4087368"/>
-            <a:ext cx="10911535" cy="530352"/>
-          </a:xfrm>
-          <a:prstGeom prst="roundRect">
-            <a:avLst/>
-          </a:prstGeom>
-          <a:solidFill>
-            <a:srgbClr val="E7DFD2"/>
-          </a:solidFill>
-          <a:ln w="10160">
-            <a:solidFill>
-              <a:srgbClr val="6B6258"/>
-            </a:solidFill>
-          </a:ln>
-          <a:effectLst/>
-        </p:spPr>
-        <p:style>
-          <a:lnRef idx="1">
-            <a:schemeClr val="accent1"/>
-          </a:lnRef>
-          <a:fillRef idx="3">
-            <a:schemeClr val="accent1"/>
-          </a:fillRef>
-          <a:effectRef idx="2">
-            <a:schemeClr val="accent1"/>
-          </a:effectRef>
-          <a:fontRef idx="minor">
-            <a:schemeClr val="lt1"/>
-          </a:fontRef>
-        </p:style>
-        <p:txBody>
-          <a:bodyPr rtlCol="0" anchor="ctr"/>
-          <a:lstStyle/>
-          <a:p>
-            <a:pPr algn="ctr"/>
-          </a:p>
-        </p:txBody>
-      </p:sp>
-      <p:sp>
-        <p:nvSpPr>
-          <p:cNvPr id="18" name="TextBox 17"/>
-          <p:cNvSpPr txBox="1"/>
-          <p:nvPr/>
-        </p:nvSpPr>
-        <p:spPr>
-          <a:xfrm>
-            <a:off x="914400" y="4178808"/>
-            <a:ext cx="3108960" cy="365760"/>
-          </a:xfrm>
-          <a:prstGeom prst="rect">
-            <a:avLst/>
-          </a:prstGeom>
-          <a:noFill/>
-        </p:spPr>
-        <p:txBody>
-          <a:bodyPr wrap="square" anchor="t" lIns="0" rIns="0" tIns="0" bIns="0">
-            <a:spAutoFit/>
-          </a:bodyPr>
-          <a:lstStyle/>
-          <a:p>
-            <a:pPr algn="l"/>
-            <a:r>
-              <a:rPr sz="1400" b="1">
-                <a:solidFill>
-                  <a:srgbClr val="B23A2A"/>
-                </a:solidFill>
-                <a:latin typeface="微软雅黑"/>
-                <a:ea typeface="微软雅黑"/>
-                <a:cs typeface="微软雅黑"/>
-              </a:rPr>
-              <a:t>习作C 以事写人 ✓</a:t>
-            </a:r>
-          </a:p>
-        </p:txBody>
-      </p:sp>
-      <p:sp>
-        <p:nvSpPr>
-          <p:cNvPr id="19" name="TextBox 18"/>
-          <p:cNvSpPr txBox="1"/>
-          <p:nvPr/>
-        </p:nvSpPr>
-        <p:spPr>
-          <a:xfrm>
-            <a:off x="4297680" y="4178808"/>
-            <a:ext cx="7680960" cy="365760"/>
-          </a:xfrm>
-          <a:prstGeom prst="rect">
-            <a:avLst/>
-          </a:prstGeom>
-          <a:noFill/>
-        </p:spPr>
-        <p:txBody>
-          <a:bodyPr wrap="square" anchor="t" lIns="0" rIns="0" tIns="0" bIns="0">
-            <a:spAutoFit/>
-          </a:bodyPr>
-          <a:lstStyle/>
-          <a:p>
-            <a:pPr algn="l"/>
-            <a:r>
-              <a:rPr sz="1350" b="0">
-                <a:solidFill>
-                  <a:srgbClr val="1C2A33"/>
-                </a:solidFill>
-                <a:latin typeface="楷体"/>
-                <a:ea typeface="楷体"/>
-                <a:cs typeface="楷体"/>
-              </a:rPr>
-              <a:t>借物代言：手抖→"勺子替她说了"</a:t>
-            </a:r>
-          </a:p>
-        </p:txBody>
-      </p:sp>
-      <p:sp>
-        <p:nvSpPr>
-          <p:cNvPr id="20" name="Rounded Rectangle 19"/>
-          <p:cNvSpPr/>
-          <p:nvPr/>
-        </p:nvSpPr>
-        <p:spPr>
-          <a:xfrm>
-            <a:off x="640080" y="4672584"/>
-            <a:ext cx="10911535" cy="530352"/>
-          </a:xfrm>
-          <a:prstGeom prst="roundRect">
-            <a:avLst/>
-          </a:prstGeom>
-          <a:solidFill>
-            <a:srgbClr val="FFFFFF"/>
-          </a:solidFill>
-          <a:ln w="10160">
-            <a:solidFill>
-              <a:srgbClr val="6B6258"/>
-            </a:solidFill>
-          </a:ln>
-          <a:effectLst/>
-        </p:spPr>
-        <p:style>
-          <a:lnRef idx="1">
-            <a:schemeClr val="accent1"/>
-          </a:lnRef>
-          <a:fillRef idx="3">
-            <a:schemeClr val="accent1"/>
-          </a:fillRef>
-          <a:effectRef idx="2">
-            <a:schemeClr val="accent1"/>
-          </a:effectRef>
-          <a:fontRef idx="minor">
-            <a:schemeClr val="lt1"/>
-          </a:fontRef>
-        </p:style>
-        <p:txBody>
-          <a:bodyPr rtlCol="0" anchor="ctr"/>
-          <a:lstStyle/>
-          <a:p>
-            <a:pPr algn="ctr"/>
-          </a:p>
-        </p:txBody>
-      </p:sp>
-      <p:sp>
-        <p:nvSpPr>
-          <p:cNvPr id="21" name="TextBox 20"/>
-          <p:cNvSpPr txBox="1"/>
-          <p:nvPr/>
-        </p:nvSpPr>
-        <p:spPr>
-          <a:xfrm>
-            <a:off x="914400" y="4764024"/>
-            <a:ext cx="3108960" cy="365760"/>
-          </a:xfrm>
-          <a:prstGeom prst="rect">
-            <a:avLst/>
-          </a:prstGeom>
-          <a:noFill/>
-        </p:spPr>
-        <p:txBody>
-          <a:bodyPr wrap="square" anchor="t" lIns="0" rIns="0" tIns="0" bIns="0">
-            <a:spAutoFit/>
-          </a:bodyPr>
-          <a:lstStyle/>
-          <a:p>
-            <a:pPr algn="l"/>
-            <a:r>
-              <a:rPr sz="1400" b="1">
-                <a:solidFill>
-                  <a:srgbClr val="2E7D6B"/>
-                </a:solidFill>
-                <a:latin typeface="微软雅黑"/>
-                <a:ea typeface="微软雅黑"/>
-                <a:cs typeface="微软雅黑"/>
-              </a:rPr>
-              <a:t>修改三方向</a:t>
-            </a:r>
-          </a:p>
-        </p:txBody>
-      </p:sp>
-      <p:sp>
-        <p:nvSpPr>
-          <p:cNvPr id="22" name="TextBox 21"/>
-          <p:cNvSpPr txBox="1"/>
-          <p:nvPr/>
-        </p:nvSpPr>
-        <p:spPr>
-          <a:xfrm>
-            <a:off x="4297680" y="4764024"/>
-            <a:ext cx="7680960" cy="365760"/>
-          </a:xfrm>
-          <a:prstGeom prst="rect">
-            <a:avLst/>
-          </a:prstGeom>
-          <a:noFill/>
-        </p:spPr>
-        <p:txBody>
-          <a:bodyPr wrap="square" anchor="t" lIns="0" rIns="0" tIns="0" bIns="0">
-            <a:spAutoFit/>
-          </a:bodyPr>
-          <a:lstStyle/>
-          <a:p>
-            <a:pPr algn="l"/>
-            <a:r>
-              <a:rPr sz="1350" b="0">
-                <a:solidFill>
-                  <a:srgbClr val="1C2A33"/>
-                </a:solidFill>
-                <a:latin typeface="楷体"/>
-                <a:ea typeface="楷体"/>
-                <a:cs typeface="楷体"/>
-              </a:rPr>
-              <a:t>换素材 · 调结构 · 改语言（评价→画面）</a:t>
-            </a:r>
-          </a:p>
-        </p:txBody>
-      </p:sp>
-      <p:sp>
-        <p:nvSpPr>
-          <p:cNvPr id="23" name="Rounded Rectangle 22"/>
-          <p:cNvSpPr/>
-          <p:nvPr/>
-        </p:nvSpPr>
-        <p:spPr>
-          <a:xfrm>
-            <a:off x="640080" y="5257800"/>
-            <a:ext cx="10911535" cy="530352"/>
-          </a:xfrm>
-          <a:prstGeom prst="roundRect">
-            <a:avLst/>
-          </a:prstGeom>
-          <a:solidFill>
-            <a:srgbClr val="E7DFD2"/>
-          </a:solidFill>
-          <a:ln w="10160">
-            <a:solidFill>
-              <a:srgbClr val="6B6258"/>
-            </a:solidFill>
-          </a:ln>
-          <a:effectLst/>
-        </p:spPr>
-        <p:style>
-          <a:lnRef idx="1">
-            <a:schemeClr val="accent1"/>
-          </a:lnRef>
-          <a:fillRef idx="3">
-            <a:schemeClr val="accent1"/>
-          </a:fillRef>
-          <a:effectRef idx="2">
-            <a:schemeClr val="accent1"/>
-          </a:effectRef>
-          <a:fontRef idx="minor">
-            <a:schemeClr val="lt1"/>
-          </a:fontRef>
-        </p:style>
-        <p:txBody>
-          <a:bodyPr rtlCol="0" anchor="ctr"/>
-          <a:lstStyle/>
-          <a:p>
-            <a:pPr algn="ctr"/>
-          </a:p>
-        </p:txBody>
-      </p:sp>
-      <p:sp>
-        <p:nvSpPr>
-          <p:cNvPr id="24" name="TextBox 23"/>
-          <p:cNvSpPr txBox="1"/>
-          <p:nvPr/>
-        </p:nvSpPr>
-        <p:spPr>
-          <a:xfrm>
-            <a:off x="914400" y="5349240"/>
-            <a:ext cx="3108960" cy="365760"/>
-          </a:xfrm>
-          <a:prstGeom prst="rect">
-            <a:avLst/>
-          </a:prstGeom>
-          <a:noFill/>
-        </p:spPr>
-        <p:txBody>
-          <a:bodyPr wrap="square" anchor="t" lIns="0" rIns="0" tIns="0" bIns="0">
-            <a:spAutoFit/>
-          </a:bodyPr>
-          <a:lstStyle/>
-          <a:p>
-            <a:pPr algn="l"/>
-            <a:r>
-              <a:rPr sz="1400" b="1">
-                <a:solidFill>
-                  <a:srgbClr val="C8A86B"/>
-                </a:solidFill>
-                <a:latin typeface="微软雅黑"/>
-                <a:ea typeface="微软雅黑"/>
-                <a:cs typeface="微软雅黑"/>
-              </a:rPr>
-              <a:t>互签量表</a:t>
-            </a:r>
-          </a:p>
-        </p:txBody>
-      </p:sp>
-      <p:sp>
-        <p:nvSpPr>
-          <p:cNvPr id="25" name="TextBox 24"/>
-          <p:cNvSpPr txBox="1"/>
-          <p:nvPr/>
-        </p:nvSpPr>
-        <p:spPr>
-          <a:xfrm>
-            <a:off x="4297680" y="5349240"/>
-            <a:ext cx="7680960" cy="365760"/>
-          </a:xfrm>
-          <a:prstGeom prst="rect">
-            <a:avLst/>
-          </a:prstGeom>
-          <a:noFill/>
-        </p:spPr>
-        <p:txBody>
-          <a:bodyPr wrap="square" anchor="t" lIns="0" rIns="0" tIns="0" bIns="0">
-            <a:spAutoFit/>
-          </a:bodyPr>
-          <a:lstStyle/>
-          <a:p>
-            <a:pPr algn="l"/>
-            <a:r>
-              <a:rPr sz="1350" b="0">
-                <a:solidFill>
-                  <a:srgbClr val="1C2A33"/>
-                </a:solidFill>
-                <a:latin typeface="楷体"/>
-                <a:ea typeface="楷体"/>
-                <a:cs typeface="楷体"/>
-              </a:rPr>
-              <a:t>真实 | 典型 | 结构 | 语言（四维互评）</a:t>
-            </a:r>
-          </a:p>
-        </p:txBody>
-      </p:sp>
-      <p:sp>
-        <p:nvSpPr>
-          <p:cNvPr id="26" name="TextBox 25"/>
+              <a:t>【提高作业】为你的通讯配一个新闻标题（主标题+副标题），并在下方写一句话说明你选择的结构类型（时间线/细节聚焦/时间跨度）。</a:t>
+            </a:r>
+          </a:p>
+        </p:txBody>
+      </p:sp>
+      <p:sp>
+        <p:nvSpPr>
+          <p:cNvPr id="11" name="TextBox 10"/>
           <p:cNvSpPr txBox="1"/>
           <p:nvPr/>
         </p:nvSpPr>
@@ -9307,13 +8132,13 @@
             <a:r>
               <a:rPr sz="1300" b="1">
                 <a:solidFill>
-                  <a:srgbClr val="B23A2A"/>
+                  <a:srgbClr val="C8A86B"/>
                 </a:solidFill>
                 <a:latin typeface="微软雅黑"/>
                 <a:ea typeface="微软雅黑"/>
                 <a:cs typeface="微软雅黑"/>
               </a:rPr>
-              <a:t>作业 · 分层</a:t>
+              <a:t>本课小结</a:t>
             </a:r>
           </a:p>
         </p:txBody>
@@ -9328,469 +8153,6 @@
           <a:xfrm>
             <a:off x="640080" y="1097280"/>
             <a:ext cx="822960" cy="30480"/>
-          </a:xfrm>
-          <a:prstGeom prst="rect">
-            <a:avLst/>
-          </a:prstGeom>
-          <a:solidFill>
-            <a:srgbClr val="B23A2A"/>
-          </a:solidFill>
-          <a:ln>
-            <a:noFill/>
-          </a:ln>
-          <a:effectLst/>
-        </p:spPr>
-        <p:style>
-          <a:lnRef idx="1">
-            <a:schemeClr val="accent1"/>
-          </a:lnRef>
-          <a:fillRef idx="3">
-            <a:schemeClr val="accent1"/>
-          </a:fillRef>
-          <a:effectRef idx="2">
-            <a:schemeClr val="accent1"/>
-          </a:effectRef>
-          <a:fontRef idx="minor">
-            <a:schemeClr val="lt1"/>
-          </a:fontRef>
-        </p:style>
-        <p:txBody>
-          <a:bodyPr rtlCol="0" anchor="ctr"/>
-          <a:lstStyle/>
-          <a:p>
-            <a:pPr algn="ctr"/>
-          </a:p>
-        </p:txBody>
-      </p:sp>
-      <p:sp>
-        <p:nvSpPr>
-          <p:cNvPr id="5" name="TextBox 4"/>
-          <p:cNvSpPr txBox="1"/>
-          <p:nvPr/>
-        </p:nvSpPr>
-        <p:spPr>
-          <a:xfrm>
-            <a:off x="640080" y="1325880"/>
-            <a:ext cx="10058400" cy="548640"/>
-          </a:xfrm>
-          <a:prstGeom prst="rect">
-            <a:avLst/>
-          </a:prstGeom>
-          <a:noFill/>
-        </p:spPr>
-        <p:txBody>
-          <a:bodyPr wrap="square" anchor="t" lIns="0" rIns="0" tIns="0" bIns="0">
-            <a:spAutoFit/>
-          </a:bodyPr>
-          <a:lstStyle/>
-          <a:p>
-            <a:pPr algn="l"/>
-            <a:r>
-              <a:rPr sz="2600" b="1">
-                <a:solidFill>
-                  <a:srgbClr val="1C2A33"/>
-                </a:solidFill>
-                <a:latin typeface="楷体"/>
-                <a:ea typeface="楷体"/>
-                <a:cs typeface="楷体"/>
-              </a:rPr>
-              <a:t>基础 · 提升 · 拓展</a:t>
-            </a:r>
-          </a:p>
-        </p:txBody>
-      </p:sp>
-      <p:sp>
-        <p:nvSpPr>
-          <p:cNvPr id="6" name="Rounded Rectangle 5"/>
-          <p:cNvSpPr/>
-          <p:nvPr/>
-        </p:nvSpPr>
-        <p:spPr>
-          <a:xfrm>
-            <a:off x="640080" y="2194560"/>
-            <a:ext cx="3393338" cy="3383280"/>
-          </a:xfrm>
-          <a:prstGeom prst="roundRect">
-            <a:avLst/>
-          </a:prstGeom>
-          <a:solidFill>
-            <a:srgbClr val="FFFFFF"/>
-          </a:solidFill>
-          <a:ln w="20320">
-            <a:solidFill>
-              <a:srgbClr val="B23A2A"/>
-            </a:solidFill>
-          </a:ln>
-          <a:effectLst/>
-        </p:spPr>
-        <p:style>
-          <a:lnRef idx="1">
-            <a:schemeClr val="accent1"/>
-          </a:lnRef>
-          <a:fillRef idx="3">
-            <a:schemeClr val="accent1"/>
-          </a:fillRef>
-          <a:effectRef idx="2">
-            <a:schemeClr val="accent1"/>
-          </a:effectRef>
-          <a:fontRef idx="minor">
-            <a:schemeClr val="lt1"/>
-          </a:fontRef>
-        </p:style>
-        <p:txBody>
-          <a:bodyPr rtlCol="0" anchor="ctr"/>
-          <a:lstStyle/>
-          <a:p>
-            <a:pPr algn="ctr"/>
-          </a:p>
-        </p:txBody>
-      </p:sp>
-      <p:sp>
-        <p:nvSpPr>
-          <p:cNvPr id="7" name="Rectangle 6"/>
-          <p:cNvSpPr/>
-          <p:nvPr/>
-        </p:nvSpPr>
-        <p:spPr>
-          <a:xfrm>
-            <a:off x="640080" y="2194560"/>
-            <a:ext cx="3393338" cy="548640"/>
-          </a:xfrm>
-          <a:prstGeom prst="rect">
-            <a:avLst/>
-          </a:prstGeom>
-          <a:solidFill>
-            <a:srgbClr val="B23A2A"/>
-          </a:solidFill>
-          <a:ln>
-            <a:noFill/>
-          </a:ln>
-          <a:effectLst/>
-        </p:spPr>
-        <p:style>
-          <a:lnRef idx="1">
-            <a:schemeClr val="accent1"/>
-          </a:lnRef>
-          <a:fillRef idx="3">
-            <a:schemeClr val="accent1"/>
-          </a:fillRef>
-          <a:effectRef idx="2">
-            <a:schemeClr val="accent1"/>
-          </a:effectRef>
-          <a:fontRef idx="minor">
-            <a:schemeClr val="lt1"/>
-          </a:fontRef>
-        </p:style>
-        <p:txBody>
-          <a:bodyPr rtlCol="0" anchor="ctr"/>
-          <a:lstStyle/>
-          <a:p>
-            <a:pPr algn="ctr"/>
-          </a:p>
-        </p:txBody>
-      </p:sp>
-      <p:sp>
-        <p:nvSpPr>
-          <p:cNvPr id="8" name="TextBox 7"/>
-          <p:cNvSpPr txBox="1"/>
-          <p:nvPr/>
-        </p:nvSpPr>
-        <p:spPr>
-          <a:xfrm>
-            <a:off x="640080" y="2304288"/>
-            <a:ext cx="3393338" cy="365760"/>
-          </a:xfrm>
-          <a:prstGeom prst="rect">
-            <a:avLst/>
-          </a:prstGeom>
-          <a:noFill/>
-        </p:spPr>
-        <p:txBody>
-          <a:bodyPr wrap="square" anchor="t" lIns="0" rIns="0" tIns="0" bIns="0">
-            <a:spAutoFit/>
-          </a:bodyPr>
-          <a:lstStyle/>
-          <a:p>
-            <a:pPr algn="ctr"/>
-            <a:r>
-              <a:rPr sz="1600" b="1">
-                <a:solidFill>
-                  <a:srgbClr val="FFFFFF"/>
-                </a:solidFill>
-                <a:latin typeface="微软雅黑"/>
-                <a:ea typeface="微软雅黑"/>
-                <a:cs typeface="微软雅黑"/>
-              </a:rPr>
-              <a:t>基础 · 必做</a:t>
-            </a:r>
-          </a:p>
-        </p:txBody>
-      </p:sp>
-      <p:sp>
-        <p:nvSpPr>
-          <p:cNvPr id="9" name="TextBox 8"/>
-          <p:cNvSpPr txBox="1"/>
-          <p:nvPr/>
-        </p:nvSpPr>
-        <p:spPr>
-          <a:xfrm>
-            <a:off x="914400" y="2971800"/>
-            <a:ext cx="2844698" cy="2468880"/>
-          </a:xfrm>
-          <a:prstGeom prst="rect">
-            <a:avLst/>
-          </a:prstGeom>
-          <a:noFill/>
-        </p:spPr>
-        <p:txBody>
-          <a:bodyPr wrap="square" anchor="t" lIns="0" rIns="0" tIns="0" bIns="0">
-            <a:spAutoFit/>
-          </a:bodyPr>
-          <a:lstStyle/>
-          <a:p>
-            <a:pPr algn="l">
-              <a:lnSpc>
-                <a:spcPct val="155000"/>
-              </a:lnSpc>
-            </a:pPr>
-            <a:r>
-              <a:rPr sz="1350" b="0">
-                <a:solidFill>
-                  <a:srgbClr val="1C2A33"/>
-                </a:solidFill>
-                <a:latin typeface="楷体"/>
-                <a:ea typeface="楷体"/>
-                <a:cs typeface="楷体"/>
-              </a:rPr>
-              <a:t>依据讲评修改通讯终稿并誊抄：先全文检索评价词，再核对选材是否典型；文下附 50 字自评（改了什么·为什么改）。</a:t>
-            </a:r>
-          </a:p>
-        </p:txBody>
-      </p:sp>
-      <p:sp>
-        <p:nvSpPr>
-          <p:cNvPr id="10" name="Rounded Rectangle 9"/>
-          <p:cNvSpPr/>
-          <p:nvPr/>
-        </p:nvSpPr>
-        <p:spPr>
-          <a:xfrm>
-            <a:off x="4399178" y="2194560"/>
-            <a:ext cx="3393338" cy="3383280"/>
-          </a:xfrm>
-          <a:prstGeom prst="roundRect">
-            <a:avLst/>
-          </a:prstGeom>
-          <a:solidFill>
-            <a:srgbClr val="FFFFFF"/>
-          </a:solidFill>
-          <a:ln w="20320">
-            <a:solidFill>
-              <a:srgbClr val="2E7D6B"/>
-            </a:solidFill>
-          </a:ln>
-          <a:effectLst/>
-        </p:spPr>
-        <p:style>
-          <a:lnRef idx="1">
-            <a:schemeClr val="accent1"/>
-          </a:lnRef>
-          <a:fillRef idx="3">
-            <a:schemeClr val="accent1"/>
-          </a:fillRef>
-          <a:effectRef idx="2">
-            <a:schemeClr val="accent1"/>
-          </a:effectRef>
-          <a:fontRef idx="minor">
-            <a:schemeClr val="lt1"/>
-          </a:fontRef>
-        </p:style>
-        <p:txBody>
-          <a:bodyPr rtlCol="0" anchor="ctr"/>
-          <a:lstStyle/>
-          <a:p>
-            <a:pPr algn="ctr"/>
-          </a:p>
-        </p:txBody>
-      </p:sp>
-      <p:sp>
-        <p:nvSpPr>
-          <p:cNvPr id="11" name="Rectangle 10"/>
-          <p:cNvSpPr/>
-          <p:nvPr/>
-        </p:nvSpPr>
-        <p:spPr>
-          <a:xfrm>
-            <a:off x="4399178" y="2194560"/>
-            <a:ext cx="3393338" cy="548640"/>
-          </a:xfrm>
-          <a:prstGeom prst="rect">
-            <a:avLst/>
-          </a:prstGeom>
-          <a:solidFill>
-            <a:srgbClr val="2E7D6B"/>
-          </a:solidFill>
-          <a:ln>
-            <a:noFill/>
-          </a:ln>
-          <a:effectLst/>
-        </p:spPr>
-        <p:style>
-          <a:lnRef idx="1">
-            <a:schemeClr val="accent1"/>
-          </a:lnRef>
-          <a:fillRef idx="3">
-            <a:schemeClr val="accent1"/>
-          </a:fillRef>
-          <a:effectRef idx="2">
-            <a:schemeClr val="accent1"/>
-          </a:effectRef>
-          <a:fontRef idx="minor">
-            <a:schemeClr val="lt1"/>
-          </a:fontRef>
-        </p:style>
-        <p:txBody>
-          <a:bodyPr rtlCol="0" anchor="ctr"/>
-          <a:lstStyle/>
-          <a:p>
-            <a:pPr algn="ctr"/>
-          </a:p>
-        </p:txBody>
-      </p:sp>
-      <p:sp>
-        <p:nvSpPr>
-          <p:cNvPr id="12" name="TextBox 11"/>
-          <p:cNvSpPr txBox="1"/>
-          <p:nvPr/>
-        </p:nvSpPr>
-        <p:spPr>
-          <a:xfrm>
-            <a:off x="4399178" y="2304288"/>
-            <a:ext cx="3393338" cy="365760"/>
-          </a:xfrm>
-          <a:prstGeom prst="rect">
-            <a:avLst/>
-          </a:prstGeom>
-          <a:noFill/>
-        </p:spPr>
-        <p:txBody>
-          <a:bodyPr wrap="square" anchor="t" lIns="0" rIns="0" tIns="0" bIns="0">
-            <a:spAutoFit/>
-          </a:bodyPr>
-          <a:lstStyle/>
-          <a:p>
-            <a:pPr algn="ctr"/>
-            <a:r>
-              <a:rPr sz="1600" b="1">
-                <a:solidFill>
-                  <a:srgbClr val="FFFFFF"/>
-                </a:solidFill>
-                <a:latin typeface="微软雅黑"/>
-                <a:ea typeface="微软雅黑"/>
-                <a:cs typeface="微软雅黑"/>
-              </a:rPr>
-              <a:t>提升 · 选做</a:t>
-            </a:r>
-          </a:p>
-        </p:txBody>
-      </p:sp>
-      <p:sp>
-        <p:nvSpPr>
-          <p:cNvPr id="13" name="TextBox 12"/>
-          <p:cNvSpPr txBox="1"/>
-          <p:nvPr/>
-        </p:nvSpPr>
-        <p:spPr>
-          <a:xfrm>
-            <a:off x="4673498" y="2971800"/>
-            <a:ext cx="2844698" cy="2468880"/>
-          </a:xfrm>
-          <a:prstGeom prst="rect">
-            <a:avLst/>
-          </a:prstGeom>
-          <a:noFill/>
-        </p:spPr>
-        <p:txBody>
-          <a:bodyPr wrap="square" anchor="t" lIns="0" rIns="0" tIns="0" bIns="0">
-            <a:spAutoFit/>
-          </a:bodyPr>
-          <a:lstStyle/>
-          <a:p>
-            <a:pPr algn="l">
-              <a:lnSpc>
-                <a:spcPct val="155000"/>
-              </a:lnSpc>
-            </a:pPr>
-            <a:r>
-              <a:rPr sz="1350" b="0">
-                <a:solidFill>
-                  <a:srgbClr val="1C2A33"/>
-                </a:solidFill>
-                <a:latin typeface="楷体"/>
-                <a:ea typeface="楷体"/>
-                <a:cs typeface="楷体"/>
-              </a:rPr>
-              <a:t>为通讯拟正副标题（主标题有文采 + 副标题点明身份），并注明所选结构：时间线 / 细节聚焦 / 时间跨度。</a:t>
-            </a:r>
-          </a:p>
-        </p:txBody>
-      </p:sp>
-      <p:sp>
-        <p:nvSpPr>
-          <p:cNvPr id="14" name="Rounded Rectangle 13"/>
-          <p:cNvSpPr/>
-          <p:nvPr/>
-        </p:nvSpPr>
-        <p:spPr>
-          <a:xfrm>
-            <a:off x="8158276" y="2194560"/>
-            <a:ext cx="3393338" cy="3383280"/>
-          </a:xfrm>
-          <a:prstGeom prst="roundRect">
-            <a:avLst/>
-          </a:prstGeom>
-          <a:solidFill>
-            <a:srgbClr val="FFFFFF"/>
-          </a:solidFill>
-          <a:ln w="20320">
-            <a:solidFill>
-              <a:srgbClr val="C8A86B"/>
-            </a:solidFill>
-          </a:ln>
-          <a:effectLst/>
-        </p:spPr>
-        <p:style>
-          <a:lnRef idx="1">
-            <a:schemeClr val="accent1"/>
-          </a:lnRef>
-          <a:fillRef idx="3">
-            <a:schemeClr val="accent1"/>
-          </a:fillRef>
-          <a:effectRef idx="2">
-            <a:schemeClr val="accent1"/>
-          </a:effectRef>
-          <a:fontRef idx="minor">
-            <a:schemeClr val="lt1"/>
-          </a:fontRef>
-        </p:style>
-        <p:txBody>
-          <a:bodyPr rtlCol="0" anchor="ctr"/>
-          <a:lstStyle/>
-          <a:p>
-            <a:pPr algn="ctr"/>
-          </a:p>
-        </p:txBody>
-      </p:sp>
-      <p:sp>
-        <p:nvSpPr>
-          <p:cNvPr id="15" name="Rectangle 14"/>
-          <p:cNvSpPr/>
-          <p:nvPr/>
-        </p:nvSpPr>
-        <p:spPr>
-          <a:xfrm>
-            <a:off x="8158276" y="2194560"/>
-            <a:ext cx="3393338" cy="548640"/>
           </a:xfrm>
           <a:prstGeom prst="rect">
             <a:avLst/>
@@ -9827,133 +8189,14 @@
       </p:sp>
       <p:sp>
         <p:nvSpPr>
-          <p:cNvPr id="16" name="TextBox 15"/>
-          <p:cNvSpPr txBox="1"/>
-          <p:nvPr/>
-        </p:nvSpPr>
-        <p:spPr>
-          <a:xfrm>
-            <a:off x="8158276" y="2304288"/>
-            <a:ext cx="3393338" cy="365760"/>
-          </a:xfrm>
-          <a:prstGeom prst="rect">
-            <a:avLst/>
-          </a:prstGeom>
-          <a:noFill/>
-        </p:spPr>
-        <p:txBody>
-          <a:bodyPr wrap="square" anchor="t" lIns="0" rIns="0" tIns="0" bIns="0">
-            <a:spAutoFit/>
-          </a:bodyPr>
-          <a:lstStyle/>
-          <a:p>
-            <a:pPr algn="ctr"/>
-            <a:r>
-              <a:rPr sz="1600" b="1">
-                <a:solidFill>
-                  <a:srgbClr val="FFFFFF"/>
-                </a:solidFill>
-                <a:latin typeface="微软雅黑"/>
-                <a:ea typeface="微软雅黑"/>
-                <a:cs typeface="微软雅黑"/>
-              </a:rPr>
-              <a:t>拓展 · 衔接</a:t>
-            </a:r>
-          </a:p>
-        </p:txBody>
-      </p:sp>
-      <p:sp>
-        <p:nvSpPr>
-          <p:cNvPr id="17" name="TextBox 16"/>
-          <p:cNvSpPr txBox="1"/>
-          <p:nvPr/>
-        </p:nvSpPr>
-        <p:spPr>
-          <a:xfrm>
-            <a:off x="8432596" y="2971800"/>
-            <a:ext cx="2844698" cy="2468880"/>
-          </a:xfrm>
-          <a:prstGeom prst="rect">
-            <a:avLst/>
-          </a:prstGeom>
-          <a:noFill/>
-        </p:spPr>
-        <p:txBody>
-          <a:bodyPr wrap="square" anchor="t" lIns="0" rIns="0" tIns="0" bIns="0">
-            <a:spAutoFit/>
-          </a:bodyPr>
-          <a:lstStyle/>
-          <a:p>
-            <a:pPr algn="l">
-              <a:lnSpc>
-                <a:spcPct val="155000"/>
-              </a:lnSpc>
-            </a:pPr>
-            <a:r>
-              <a:rPr sz="1350" b="0">
-                <a:solidFill>
-                  <a:srgbClr val="1C2A33"/>
-                </a:solidFill>
-                <a:latin typeface="楷体"/>
-                <a:ea typeface="楷体"/>
-                <a:cs typeface="楷体"/>
-              </a:rPr>
-              <a:t>与同桌互签：写一句具体评语（一处优点 + 一处可改），为下一课单元活动"我身边的劳动者"分享做准备。</a:t>
-            </a:r>
-          </a:p>
-        </p:txBody>
-      </p:sp>
-      <p:sp>
-        <p:nvSpPr>
-          <p:cNvPr id="18" name="Rounded Rectangle 17"/>
+          <p:cNvPr id="5" name="Rectangle 4"/>
           <p:cNvSpPr/>
           <p:nvPr/>
         </p:nvSpPr>
         <p:spPr>
           <a:xfrm>
-            <a:off x="640080" y="5166360"/>
-            <a:ext cx="10911535" cy="1325880"/>
-          </a:xfrm>
-          <a:prstGeom prst="roundRect">
-            <a:avLst/>
-          </a:prstGeom>
-          <a:solidFill>
-            <a:srgbClr val="1C2A33"/>
-          </a:solidFill>
-          <a:effectLst/>
-        </p:spPr>
-        <p:style>
-          <a:lnRef idx="1">
-            <a:schemeClr val="accent1"/>
-          </a:lnRef>
-          <a:fillRef idx="3">
-            <a:schemeClr val="accent1"/>
-          </a:fillRef>
-          <a:effectRef idx="2">
-            <a:schemeClr val="accent1"/>
-          </a:effectRef>
-          <a:fontRef idx="minor">
-            <a:schemeClr val="lt1"/>
-          </a:fontRef>
-        </p:style>
-        <p:txBody>
-          <a:bodyPr rtlCol="0" anchor="ctr"/>
-          <a:lstStyle/>
-          <a:p>
-            <a:pPr algn="ctr"/>
-          </a:p>
-        </p:txBody>
-      </p:sp>
-      <p:sp>
-        <p:nvSpPr>
-          <p:cNvPr id="19" name="Rectangle 18"/>
-          <p:cNvSpPr/>
-          <p:nvPr/>
-        </p:nvSpPr>
-        <p:spPr>
-          <a:xfrm>
-            <a:off x="914400" y="5394960"/>
-            <a:ext cx="54864" cy="279400"/>
+            <a:off x="640080" y="1737360"/>
+            <a:ext cx="54864" cy="431800"/>
           </a:xfrm>
           <a:prstGeom prst="rect">
             <a:avLst/>
@@ -9990,14 +8233,14 @@
       </p:sp>
       <p:sp>
         <p:nvSpPr>
-          <p:cNvPr id="20" name="TextBox 19"/>
+          <p:cNvPr id="6" name="TextBox 5"/>
           <p:cNvSpPr txBox="1"/>
           <p:nvPr/>
         </p:nvSpPr>
         <p:spPr>
           <a:xfrm>
-            <a:off x="1143000" y="5303520"/>
-            <a:ext cx="10180015" cy="1097280"/>
+            <a:off x="868680" y="1645920"/>
+            <a:ext cx="10682935" cy="2194560"/>
           </a:xfrm>
           <a:prstGeom prst="rect">
             <a:avLst/>
@@ -10011,45 +8254,44 @@
           <a:lstStyle/>
           <a:p>
             <a:pPr algn="l">
+              <a:lnSpc>
+                <a:spcPct val="150000"/>
+              </a:lnSpc>
               <a:spcAft>
-                <a:spcPts val="400"/>
+                <a:spcPts val="1000"/>
               </a:spcAft>
             </a:pPr>
             <a:r>
-              <a:rPr sz="1600" b="1">
-                <a:solidFill>
-                  <a:srgbClr val="C8A86B"/>
+              <a:rPr sz="2200" b="0">
+                <a:solidFill>
+                  <a:srgbClr val="1C2A33"/>
                 </a:solidFill>
                 <a:latin typeface="楷体"/>
                 <a:ea typeface="楷体"/>
                 <a:cs typeface="楷体"/>
               </a:rPr>
-              <a:t>通讯修改口诀</a:t>
-            </a:r>
-          </a:p>
-          <a:p>
-            <a:pPr algn="l">
-              <a:lnSpc>
-                <a:spcPct val="145000"/>
-              </a:lnSpc>
-            </a:pPr>
-            <a:r>
-              <a:rPr sz="1350" b="0">
-                <a:solidFill>
-                  <a:srgbClr val="FFFFFF"/>
-                </a:solidFill>
-                <a:latin typeface="楷体"/>
-                <a:ea typeface="楷体"/>
-                <a:cs typeface="楷体"/>
+              <a:t>本单元主题：劳动光荣。把今天学到的方法带进下一篇——自己读、自己想、自己写。</a:t>
+            </a:r>
+          </a:p>
+          <a:p>
+            <a:pPr algn="l"/>
+            <a:r>
+              <a:rPr sz="1600" b="1">
+                <a:solidFill>
+                  <a:srgbClr val="B23A2A"/>
+                </a:solidFill>
+                <a:latin typeface="微软雅黑"/>
+                <a:ea typeface="微软雅黑"/>
+                <a:cs typeface="微软雅黑"/>
               </a:rPr>
-              <a:t>检索评价词 → 换典型素材 → 改成画面语言。下一课：单元活动"我身边的劳动者"分享与单元总结。</a:t>
-            </a:r>
-          </a:p>
-        </p:txBody>
-      </p:sp>
-      <p:sp>
-        <p:nvSpPr>
-          <p:cNvPr id="21" name="TextBox 20"/>
+              <a:t>方法迁移：圈关键信息 → 理事件脉络 → 析人物精神</a:t>
+            </a:r>
+          </a:p>
+        </p:txBody>
+      </p:sp>
+      <p:sp>
+        <p:nvSpPr>
+          <p:cNvPr id="7" name="TextBox 6"/>
           <p:cNvSpPr txBox="1"/>
           <p:nvPr/>
         </p:nvSpPr>
